--- a/figure/proposal/variant.pptx
+++ b/figure/proposal/variant.pptx
@@ -197,7 +197,7 @@
           <a:p>
             <a:fld id="{AC970DB7-02B4-4BEE-8620-9614CE913B9E}" type="datetimeFigureOut">
               <a:rPr lang="zh-CN" altLang="en-US" smtClean="0"/>
-              <a:t>2026/3/10</a:t>
+              <a:t>2026/3/15</a:t>
             </a:fld>
             <a:endParaRPr lang="zh-CN" altLang="en-US"/>
           </a:p>
@@ -695,7 +695,7 @@
           <a:p>
             <a:fld id="{808D6836-B624-4DA9-B5B6-545033C9EEE0}" type="datetimeFigureOut">
               <a:rPr lang="zh-CN" altLang="en-US" smtClean="0"/>
-              <a:t>2026/3/10</a:t>
+              <a:t>2026/3/15</a:t>
             </a:fld>
             <a:endParaRPr lang="zh-CN" altLang="en-US"/>
           </a:p>
@@ -893,7 +893,7 @@
           <a:p>
             <a:fld id="{808D6836-B624-4DA9-B5B6-545033C9EEE0}" type="datetimeFigureOut">
               <a:rPr lang="zh-CN" altLang="en-US" smtClean="0"/>
-              <a:t>2026/3/10</a:t>
+              <a:t>2026/3/15</a:t>
             </a:fld>
             <a:endParaRPr lang="zh-CN" altLang="en-US"/>
           </a:p>
@@ -1101,7 +1101,7 @@
           <a:p>
             <a:fld id="{808D6836-B624-4DA9-B5B6-545033C9EEE0}" type="datetimeFigureOut">
               <a:rPr lang="zh-CN" altLang="en-US" smtClean="0"/>
-              <a:t>2026/3/10</a:t>
+              <a:t>2026/3/15</a:t>
             </a:fld>
             <a:endParaRPr lang="zh-CN" altLang="en-US"/>
           </a:p>
@@ -1299,7 +1299,7 @@
           <a:p>
             <a:fld id="{808D6836-B624-4DA9-B5B6-545033C9EEE0}" type="datetimeFigureOut">
               <a:rPr lang="zh-CN" altLang="en-US" smtClean="0"/>
-              <a:t>2026/3/10</a:t>
+              <a:t>2026/3/15</a:t>
             </a:fld>
             <a:endParaRPr lang="zh-CN" altLang="en-US"/>
           </a:p>
@@ -1574,7 +1574,7 @@
           <a:p>
             <a:fld id="{808D6836-B624-4DA9-B5B6-545033C9EEE0}" type="datetimeFigureOut">
               <a:rPr lang="zh-CN" altLang="en-US" smtClean="0"/>
-              <a:t>2026/3/10</a:t>
+              <a:t>2026/3/15</a:t>
             </a:fld>
             <a:endParaRPr lang="zh-CN" altLang="en-US"/>
           </a:p>
@@ -1839,7 +1839,7 @@
           <a:p>
             <a:fld id="{808D6836-B624-4DA9-B5B6-545033C9EEE0}" type="datetimeFigureOut">
               <a:rPr lang="zh-CN" altLang="en-US" smtClean="0"/>
-              <a:t>2026/3/10</a:t>
+              <a:t>2026/3/15</a:t>
             </a:fld>
             <a:endParaRPr lang="zh-CN" altLang="en-US"/>
           </a:p>
@@ -2251,7 +2251,7 @@
           <a:p>
             <a:fld id="{808D6836-B624-4DA9-B5B6-545033C9EEE0}" type="datetimeFigureOut">
               <a:rPr lang="zh-CN" altLang="en-US" smtClean="0"/>
-              <a:t>2026/3/10</a:t>
+              <a:t>2026/3/15</a:t>
             </a:fld>
             <a:endParaRPr lang="zh-CN" altLang="en-US"/>
           </a:p>
@@ -2392,7 +2392,7 @@
           <a:p>
             <a:fld id="{808D6836-B624-4DA9-B5B6-545033C9EEE0}" type="datetimeFigureOut">
               <a:rPr lang="zh-CN" altLang="en-US" smtClean="0"/>
-              <a:t>2026/3/10</a:t>
+              <a:t>2026/3/15</a:t>
             </a:fld>
             <a:endParaRPr lang="zh-CN" altLang="en-US"/>
           </a:p>
@@ -2505,7 +2505,7 @@
           <a:p>
             <a:fld id="{808D6836-B624-4DA9-B5B6-545033C9EEE0}" type="datetimeFigureOut">
               <a:rPr lang="zh-CN" altLang="en-US" smtClean="0"/>
-              <a:t>2026/3/10</a:t>
+              <a:t>2026/3/15</a:t>
             </a:fld>
             <a:endParaRPr lang="zh-CN" altLang="en-US"/>
           </a:p>
@@ -2816,7 +2816,7 @@
           <a:p>
             <a:fld id="{808D6836-B624-4DA9-B5B6-545033C9EEE0}" type="datetimeFigureOut">
               <a:rPr lang="zh-CN" altLang="en-US" smtClean="0"/>
-              <a:t>2026/3/10</a:t>
+              <a:t>2026/3/15</a:t>
             </a:fld>
             <a:endParaRPr lang="zh-CN" altLang="en-US"/>
           </a:p>
@@ -3104,7 +3104,7 @@
           <a:p>
             <a:fld id="{808D6836-B624-4DA9-B5B6-545033C9EEE0}" type="datetimeFigureOut">
               <a:rPr lang="zh-CN" altLang="en-US" smtClean="0"/>
-              <a:t>2026/3/10</a:t>
+              <a:t>2026/3/15</a:t>
             </a:fld>
             <a:endParaRPr lang="zh-CN" altLang="en-US"/>
           </a:p>
@@ -3345,7 +3345,7 @@
           <a:p>
             <a:fld id="{808D6836-B624-4DA9-B5B6-545033C9EEE0}" type="datetimeFigureOut">
               <a:rPr lang="zh-CN" altLang="en-US" smtClean="0"/>
-              <a:t>2026/3/10</a:t>
+              <a:t>2026/3/15</a:t>
             </a:fld>
             <a:endParaRPr lang="zh-CN" altLang="en-US"/>
           </a:p>
@@ -3764,10 +3764,10 @@
       </p:grpSpPr>
       <p:sp>
         <p:nvSpPr>
-          <p:cNvPr id="4" name="矩形 3">
-            <a:extLst>
-              <a:ext uri="{FF2B5EF4-FFF2-40B4-BE49-F238E27FC236}">
-                <a16:creationId xmlns:a16="http://schemas.microsoft.com/office/drawing/2014/main" id="{7B6599D9-FF67-6AD4-9653-26BCFE8BD9FD}"/>
+          <p:cNvPr id="46" name="矩形: 折角 45">
+            <a:extLst>
+              <a:ext uri="{FF2B5EF4-FFF2-40B4-BE49-F238E27FC236}">
+                <a16:creationId xmlns:a16="http://schemas.microsoft.com/office/drawing/2014/main" id="{92218047-A8D3-76B0-C75E-142C24437C05}"/>
               </a:ext>
             </a:extLst>
           </p:cNvPr>
@@ -3776,10 +3776,10 @@
         </p:nvSpPr>
         <p:spPr>
           <a:xfrm>
-            <a:off x="1374667" y="556330"/>
-            <a:ext cx="2301342" cy="2545284"/>
-          </a:xfrm>
-          <a:prstGeom prst="rect">
+            <a:off x="3399497" y="3893892"/>
+            <a:ext cx="1709786" cy="1963393"/>
+          </a:xfrm>
+          <a:prstGeom prst="foldedCorner">
             <a:avLst/>
           </a:prstGeom>
           <a:solidFill>
@@ -3815,277 +3815,7 @@
           <a:lstStyle/>
           <a:p>
             <a:pPr algn="ctr"/>
-            <a:endParaRPr lang="zh-CN" altLang="en-US"/>
-          </a:p>
-        </p:txBody>
-      </p:sp>
-      <p:sp>
-        <p:nvSpPr>
-          <p:cNvPr id="6" name="文本框 5">
-            <a:extLst>
-              <a:ext uri="{FF2B5EF4-FFF2-40B4-BE49-F238E27FC236}">
-                <a16:creationId xmlns:a16="http://schemas.microsoft.com/office/drawing/2014/main" id="{3C08CF8D-607B-0255-73F0-AB9AB9754F1B}"/>
-              </a:ext>
-            </a:extLst>
-          </p:cNvPr>
-          <p:cNvSpPr txBox="1"/>
-          <p:nvPr/>
-        </p:nvSpPr>
-        <p:spPr>
-          <a:xfrm>
-            <a:off x="1380804" y="568603"/>
-            <a:ext cx="2301342" cy="2554545"/>
-          </a:xfrm>
-          <a:prstGeom prst="rect">
-            <a:avLst/>
-          </a:prstGeom>
-          <a:noFill/>
-        </p:spPr>
-        <p:txBody>
-          <a:bodyPr wrap="square" rtlCol="0">
-            <a:spAutoFit/>
-          </a:bodyPr>
-          <a:lstStyle/>
-          <a:p>
-            <a:r>
-              <a:rPr lang="en-US" altLang="zh-CN" sz="1600" b="1" dirty="0">
-                <a:latin typeface="Cascadia Code Light" panose="020B0609020000020004" pitchFamily="49" charset="0"/>
-                <a:ea typeface="Cascadia Code Light" panose="020B0609020000020004" pitchFamily="49" charset="0"/>
-                <a:cs typeface="Cascadia Code Light" panose="020B0609020000020004" pitchFamily="49" charset="0"/>
-              </a:rPr>
-              <a:t>text:</a:t>
-            </a:r>
-          </a:p>
-          <a:p>
-            <a:r>
-              <a:rPr lang="en-US" altLang="zh-CN" sz="1600" dirty="0">
-                <a:latin typeface="Cascadia Code Light" panose="020B0609020000020004" pitchFamily="49" charset="0"/>
-                <a:ea typeface="Cascadia Code Light" panose="020B0609020000020004" pitchFamily="49" charset="0"/>
-                <a:cs typeface="Cascadia Code Light" panose="020B0609020000020004" pitchFamily="49" charset="0"/>
-              </a:rPr>
-              <a:t>  </a:t>
-            </a:r>
-            <a:r>
-              <a:rPr lang="en-US" altLang="zh-CN" sz="1600" dirty="0" err="1">
-                <a:latin typeface="Cascadia Code Light" panose="020B0609020000020004" pitchFamily="49" charset="0"/>
-                <a:ea typeface="Cascadia Code Light" panose="020B0609020000020004" pitchFamily="49" charset="0"/>
-                <a:cs typeface="Cascadia Code Light" panose="020B0609020000020004" pitchFamily="49" charset="0"/>
-              </a:rPr>
-              <a:t>addi</a:t>
-            </a:r>
-            <a:r>
-              <a:rPr lang="en-US" altLang="zh-CN" sz="1600" dirty="0">
-                <a:latin typeface="Cascadia Code Light" panose="020B0609020000020004" pitchFamily="49" charset="0"/>
-                <a:ea typeface="Cascadia Code Light" panose="020B0609020000020004" pitchFamily="49" charset="0"/>
-                <a:cs typeface="Cascadia Code Light" panose="020B0609020000020004" pitchFamily="49" charset="0"/>
-              </a:rPr>
-              <a:t> t0, t0, 1</a:t>
-            </a:r>
-          </a:p>
-          <a:p>
-            <a:r>
-              <a:rPr lang="en-US" altLang="zh-CN" sz="1600" dirty="0">
-                <a:latin typeface="Cascadia Code Light" panose="020B0609020000020004" pitchFamily="49" charset="0"/>
-                <a:ea typeface="Cascadia Code Light" panose="020B0609020000020004" pitchFamily="49" charset="0"/>
-                <a:cs typeface="Cascadia Code Light" panose="020B0609020000020004" pitchFamily="49" charset="0"/>
-              </a:rPr>
-              <a:t>  </a:t>
-            </a:r>
-            <a:r>
-              <a:rPr lang="en-US" altLang="zh-CN" sz="1600" dirty="0" err="1">
-                <a:latin typeface="Cascadia Code Light" panose="020B0609020000020004" pitchFamily="49" charset="0"/>
-                <a:ea typeface="Cascadia Code Light" panose="020B0609020000020004" pitchFamily="49" charset="0"/>
-                <a:cs typeface="Cascadia Code Light" panose="020B0609020000020004" pitchFamily="49" charset="0"/>
-              </a:rPr>
-              <a:t>fdiv</a:t>
-            </a:r>
-            <a:r>
-              <a:rPr lang="en-US" altLang="zh-CN" sz="1600" dirty="0">
-                <a:latin typeface="Cascadia Code Light" panose="020B0609020000020004" pitchFamily="49" charset="0"/>
-                <a:ea typeface="Cascadia Code Light" panose="020B0609020000020004" pitchFamily="49" charset="0"/>
-                <a:cs typeface="Cascadia Code Light" panose="020B0609020000020004" pitchFamily="49" charset="0"/>
-              </a:rPr>
-              <a:t> a0, a4, a5</a:t>
-            </a:r>
-          </a:p>
-          <a:p>
-            <a:r>
-              <a:rPr lang="en-US" altLang="zh-CN" sz="1600" dirty="0">
-                <a:latin typeface="Cascadia Code Light" panose="020B0609020000020004" pitchFamily="49" charset="0"/>
-                <a:ea typeface="Cascadia Code Light" panose="020B0609020000020004" pitchFamily="49" charset="0"/>
-                <a:cs typeface="Cascadia Code Light" panose="020B0609020000020004" pitchFamily="49" charset="0"/>
-              </a:rPr>
-              <a:t>  ...</a:t>
-            </a:r>
-          </a:p>
-          <a:p>
-            <a:r>
-              <a:rPr lang="en-US" altLang="zh-CN" sz="1600" dirty="0">
-                <a:latin typeface="Cascadia Code Light" panose="020B0609020000020004" pitchFamily="49" charset="0"/>
-                <a:ea typeface="Cascadia Code Light" panose="020B0609020000020004" pitchFamily="49" charset="0"/>
-                <a:cs typeface="Cascadia Code Light" panose="020B0609020000020004" pitchFamily="49" charset="0"/>
-              </a:rPr>
-              <a:t>  j </a:t>
-            </a:r>
-            <a:r>
-              <a:rPr lang="en-US" altLang="zh-CN" sz="1600" dirty="0" err="1">
-                <a:latin typeface="Cascadia Code Light" panose="020B0609020000020004" pitchFamily="49" charset="0"/>
-                <a:ea typeface="Cascadia Code Light" panose="020B0609020000020004" pitchFamily="49" charset="0"/>
-                <a:cs typeface="Cascadia Code Light" panose="020B0609020000020004" pitchFamily="49" charset="0"/>
-              </a:rPr>
-              <a:t>formal_entry</a:t>
-            </a:r>
-            <a:endParaRPr lang="en-US" altLang="zh-CN" sz="1600" dirty="0">
-              <a:latin typeface="Cascadia Code Light" panose="020B0609020000020004" pitchFamily="49" charset="0"/>
-              <a:ea typeface="Cascadia Code Light" panose="020B0609020000020004" pitchFamily="49" charset="0"/>
-              <a:cs typeface="Cascadia Code Light" panose="020B0609020000020004" pitchFamily="49" charset="0"/>
-            </a:endParaRPr>
-          </a:p>
-          <a:p>
-            <a:r>
-              <a:rPr lang="en-US" altLang="zh-CN" sz="1600" b="1" dirty="0">
-                <a:latin typeface="Cascadia Code Light" panose="020B0609020000020004" pitchFamily="49" charset="0"/>
-                <a:ea typeface="Cascadia Code Light" panose="020B0609020000020004" pitchFamily="49" charset="0"/>
-                <a:cs typeface="Cascadia Code Light" panose="020B0609020000020004" pitchFamily="49" charset="0"/>
-              </a:rPr>
-              <a:t>data:</a:t>
-            </a:r>
-          </a:p>
-          <a:p>
-            <a:r>
-              <a:rPr lang="en-US" altLang="zh-CN" sz="1600" b="1" dirty="0">
-                <a:latin typeface="Cascadia Code Light" panose="020B0609020000020004" pitchFamily="49" charset="0"/>
-                <a:ea typeface="Cascadia Code Light" panose="020B0609020000020004" pitchFamily="49" charset="0"/>
-                <a:cs typeface="Cascadia Code Light" panose="020B0609020000020004" pitchFamily="49" charset="0"/>
-              </a:rPr>
-              <a:t>  </a:t>
-            </a:r>
-            <a:r>
-              <a:rPr lang="en-US" altLang="zh-CN" sz="1600" dirty="0">
-                <a:latin typeface="Cascadia Code Light" panose="020B0609020000020004" pitchFamily="49" charset="0"/>
-                <a:ea typeface="Cascadia Code Light" panose="020B0609020000020004" pitchFamily="49" charset="0"/>
-                <a:cs typeface="Cascadia Code Light" panose="020B0609020000020004" pitchFamily="49" charset="0"/>
-              </a:rPr>
-              <a:t>...</a:t>
-            </a:r>
-          </a:p>
-          <a:p>
-            <a:r>
-              <a:rPr lang="en-US" altLang="zh-CN" sz="1600" b="1" dirty="0">
-                <a:latin typeface="Cascadia Code Light" panose="020B0609020000020004" pitchFamily="49" charset="0"/>
-                <a:ea typeface="Cascadia Code Light" panose="020B0609020000020004" pitchFamily="49" charset="0"/>
-                <a:cs typeface="Cascadia Code Light" panose="020B0609020000020004" pitchFamily="49" charset="0"/>
-              </a:rPr>
-              <a:t>secret:</a:t>
-            </a:r>
-          </a:p>
-          <a:p>
-            <a:r>
-              <a:rPr lang="en-US" altLang="zh-CN" sz="1600" b="1" dirty="0">
-                <a:latin typeface="Cascadia Code Light" panose="020B0609020000020004" pitchFamily="49" charset="0"/>
-                <a:ea typeface="Cascadia Code Light" panose="020B0609020000020004" pitchFamily="49" charset="0"/>
-                <a:cs typeface="Cascadia Code Light" panose="020B0609020000020004" pitchFamily="49" charset="0"/>
-              </a:rPr>
-              <a:t>  </a:t>
-            </a:r>
-            <a:r>
-              <a:rPr lang="en-US" altLang="zh-CN" sz="1600" dirty="0">
-                <a:latin typeface="Cascadia Code Light" panose="020B0609020000020004" pitchFamily="49" charset="0"/>
-                <a:ea typeface="Cascadia Code Light" panose="020B0609020000020004" pitchFamily="49" charset="0"/>
-                <a:cs typeface="Cascadia Code Light" panose="020B0609020000020004" pitchFamily="49" charset="0"/>
-              </a:rPr>
-              <a:t>.byte </a:t>
-            </a:r>
-            <a:r>
-              <a:rPr lang="en-US" altLang="zh-CN" sz="1600" b="1" dirty="0">
-                <a:solidFill>
-                  <a:srgbClr val="FF0000"/>
-                </a:solidFill>
-                <a:latin typeface="Cascadia Code Light" panose="020B0609020000020004" pitchFamily="49" charset="0"/>
-                <a:ea typeface="Cascadia Code Light" panose="020B0609020000020004" pitchFamily="49" charset="0"/>
-                <a:cs typeface="Cascadia Code Light" panose="020B0609020000020004" pitchFamily="49" charset="0"/>
-              </a:rPr>
-              <a:t>0x0</a:t>
-            </a:r>
-          </a:p>
-          <a:p>
-            <a:r>
-              <a:rPr lang="en-US" altLang="zh-CN" sz="1600" b="1" dirty="0" err="1">
-                <a:latin typeface="Cascadia Code Light" panose="020B0609020000020004" pitchFamily="49" charset="0"/>
-                <a:ea typeface="Cascadia Code Light" panose="020B0609020000020004" pitchFamily="49" charset="0"/>
-                <a:cs typeface="Cascadia Code Light" panose="020B0609020000020004" pitchFamily="49" charset="0"/>
-              </a:rPr>
-              <a:t>formal_entry</a:t>
-            </a:r>
-            <a:r>
-              <a:rPr lang="en-US" altLang="zh-CN" sz="1600" b="1" dirty="0">
-                <a:latin typeface="Cascadia Code Light" panose="020B0609020000020004" pitchFamily="49" charset="0"/>
-                <a:ea typeface="Cascadia Code Light" panose="020B0609020000020004" pitchFamily="49" charset="0"/>
-                <a:cs typeface="Cascadia Code Light" panose="020B0609020000020004" pitchFamily="49" charset="0"/>
-              </a:rPr>
-              <a:t>:</a:t>
-            </a:r>
-            <a:endParaRPr lang="zh-CN" altLang="en-US" sz="1600" b="1" dirty="0">
-              <a:latin typeface="Cascadia Code Light" panose="020B0609020000020004" pitchFamily="49" charset="0"/>
-              <a:cs typeface="Cascadia Code Light" panose="020B0609020000020004" pitchFamily="49" charset="0"/>
-            </a:endParaRPr>
-          </a:p>
-        </p:txBody>
-      </p:sp>
-      <p:sp>
-        <p:nvSpPr>
-          <p:cNvPr id="10" name="矩形 9">
-            <a:extLst>
-              <a:ext uri="{FF2B5EF4-FFF2-40B4-BE49-F238E27FC236}">
-                <a16:creationId xmlns:a16="http://schemas.microsoft.com/office/drawing/2014/main" id="{FDB3A0B9-02CB-96CA-FCAA-C274365768AD}"/>
-              </a:ext>
-            </a:extLst>
-          </p:cNvPr>
-          <p:cNvSpPr/>
-          <p:nvPr/>
-        </p:nvSpPr>
-        <p:spPr>
-          <a:xfrm>
-            <a:off x="1374668" y="3701154"/>
-            <a:ext cx="2301342" cy="2545284"/>
-          </a:xfrm>
-          <a:prstGeom prst="rect">
-            <a:avLst/>
-          </a:prstGeom>
-          <a:solidFill>
-            <a:schemeClr val="accent4">
-              <a:lumMod val="20000"/>
-              <a:lumOff val="80000"/>
-            </a:schemeClr>
-          </a:solidFill>
-          <a:ln w="28575">
-            <a:solidFill>
-              <a:schemeClr val="tx1"/>
-            </a:solidFill>
-          </a:ln>
-        </p:spPr>
-        <p:style>
-          <a:lnRef idx="2">
-            <a:schemeClr val="accent1">
-              <a:shade val="15000"/>
-            </a:schemeClr>
-          </a:lnRef>
-          <a:fillRef idx="1">
-            <a:schemeClr val="accent1"/>
-          </a:fillRef>
-          <a:effectRef idx="0">
-            <a:schemeClr val="accent1"/>
-          </a:effectRef>
-          <a:fontRef idx="minor">
-            <a:schemeClr val="lt1"/>
-          </a:fontRef>
-        </p:style>
-        <p:txBody>
-          <a:bodyPr rtlCol="0" anchor="ctr"/>
-          <a:lstStyle/>
-          <a:p>
-            <a:pPr algn="ctr"/>
-            <a:endParaRPr lang="zh-CN" altLang="en-US"/>
+            <a:endParaRPr lang="zh-CN" altLang="en-US" dirty="0"/>
           </a:p>
         </p:txBody>
       </p:sp>
@@ -4103,8 +3833,8 @@
         </p:nvSpPr>
         <p:spPr>
           <a:xfrm>
-            <a:off x="4592456" y="2241977"/>
-            <a:ext cx="3007087" cy="1993556"/>
+            <a:off x="5573184" y="2410882"/>
+            <a:ext cx="1921209" cy="1842137"/>
           </a:xfrm>
           <a:prstGeom prst="roundRect">
             <a:avLst/>
@@ -4160,8 +3890,8 @@
         </p:nvSpPr>
         <p:spPr>
           <a:xfrm>
-            <a:off x="5414802" y="3557616"/>
-            <a:ext cx="1393079" cy="567663"/>
+            <a:off x="5876913" y="3631620"/>
+            <a:ext cx="1274619" cy="524547"/>
           </a:xfrm>
           <a:prstGeom prst="rect">
             <a:avLst/>
@@ -4200,7 +3930,7 @@
           <a:p>
             <a:pPr algn="ctr"/>
             <a:r>
-              <a:rPr lang="zh-CN" altLang="en-US" dirty="0">
+              <a:rPr lang="zh-CN" altLang="en-US" sz="1600" dirty="0">
                 <a:solidFill>
                   <a:schemeClr val="tx1"/>
                 </a:solidFill>
@@ -4224,8 +3954,8 @@
         </p:nvSpPr>
         <p:spPr>
           <a:xfrm>
-            <a:off x="4767357" y="3051106"/>
-            <a:ext cx="2681831" cy="276163"/>
+            <a:off x="5793317" y="3144137"/>
+            <a:ext cx="1481021" cy="255187"/>
           </a:xfrm>
           <a:prstGeom prst="rect">
             <a:avLst/>
@@ -4261,7 +3991,7 @@
           <a:p>
             <a:pPr algn="ctr"/>
             <a:r>
-              <a:rPr lang="en-US" altLang="zh-CN" dirty="0">
+              <a:rPr lang="en-US" altLang="zh-CN" sz="1600" dirty="0">
                 <a:solidFill>
                   <a:schemeClr val="tx1"/>
                 </a:solidFill>
@@ -4269,7 +3999,7 @@
               <a:t>AXI </a:t>
             </a:r>
             <a:r>
-              <a:rPr lang="zh-CN" altLang="en-US" dirty="0">
+              <a:rPr lang="zh-CN" altLang="en-US" sz="1600" dirty="0">
                 <a:solidFill>
                   <a:schemeClr val="tx1"/>
                 </a:solidFill>
@@ -4293,8 +4023,8 @@
         </p:nvSpPr>
         <p:spPr>
           <a:xfrm>
-            <a:off x="6310791" y="2343618"/>
-            <a:ext cx="938947" cy="475609"/>
+            <a:off x="6582451" y="2559311"/>
+            <a:ext cx="673483" cy="358377"/>
           </a:xfrm>
           <a:prstGeom prst="rect">
             <a:avLst/>
@@ -4330,7 +4060,7 @@
           <a:p>
             <a:pPr algn="ctr"/>
             <a:r>
-              <a:rPr lang="zh-CN" altLang="en-US" dirty="0">
+              <a:rPr lang="zh-CN" altLang="en-US" sz="1600" dirty="0">
                 <a:solidFill>
                   <a:schemeClr val="tx1"/>
                 </a:solidFill>
@@ -4354,8 +4084,8 @@
         </p:nvSpPr>
         <p:spPr>
           <a:xfrm>
-            <a:off x="6040765" y="3328801"/>
-            <a:ext cx="135014" cy="223997"/>
+            <a:off x="6438647" y="3409057"/>
+            <a:ext cx="123533" cy="206983"/>
           </a:xfrm>
           <a:prstGeom prst="upDownArrow">
             <a:avLst/>
@@ -4408,8 +4138,8 @@
         </p:nvSpPr>
         <p:spPr>
           <a:xfrm>
-            <a:off x="6740374" y="2819784"/>
-            <a:ext cx="135014" cy="219392"/>
+            <a:off x="6857425" y="2921866"/>
+            <a:ext cx="123533" cy="208653"/>
           </a:xfrm>
           <a:prstGeom prst="upDownArrow">
             <a:avLst/>
@@ -4462,8 +4192,8 @@
         </p:nvSpPr>
         <p:spPr>
           <a:xfrm>
-            <a:off x="4982150" y="2343617"/>
-            <a:ext cx="938947" cy="475609"/>
+            <a:off x="5793317" y="2559311"/>
+            <a:ext cx="645329" cy="362555"/>
           </a:xfrm>
           <a:prstGeom prst="rect">
             <a:avLst/>
@@ -4499,7 +4229,7 @@
           <a:p>
             <a:pPr algn="ctr"/>
             <a:r>
-              <a:rPr lang="zh-CN" altLang="en-US" dirty="0">
+              <a:rPr lang="zh-CN" altLang="en-US" sz="1600" dirty="0">
                 <a:solidFill>
                   <a:schemeClr val="tx1"/>
                 </a:solidFill>
@@ -4523,8 +4253,8 @@
         </p:nvSpPr>
         <p:spPr>
           <a:xfrm>
-            <a:off x="5384116" y="2830182"/>
-            <a:ext cx="135014" cy="219392"/>
+            <a:off x="6034991" y="2927791"/>
+            <a:ext cx="123533" cy="202728"/>
           </a:xfrm>
           <a:prstGeom prst="upDownArrow">
             <a:avLst/>
@@ -4577,8 +4307,8 @@
         </p:nvSpPr>
         <p:spPr>
           <a:xfrm>
-            <a:off x="1143007" y="3101614"/>
-            <a:ext cx="2738584" cy="369332"/>
+            <a:off x="3174872" y="2860514"/>
+            <a:ext cx="2161632" cy="338555"/>
           </a:xfrm>
           <a:prstGeom prst="rect">
             <a:avLst/>
@@ -4593,7 +4323,7 @@
           <a:p>
             <a:pPr algn="ctr"/>
             <a:r>
-              <a:rPr lang="zh-CN" altLang="en-US" dirty="0"/>
+              <a:rPr lang="zh-CN" altLang="en-US" sz="1400" dirty="0"/>
               <a:t>微架构状态设置程序本体</a:t>
             </a:r>
           </a:p>
@@ -4613,8 +4343,8 @@
         </p:nvSpPr>
         <p:spPr>
           <a:xfrm>
-            <a:off x="5414802" y="4281214"/>
-            <a:ext cx="1393079" cy="400110"/>
+            <a:off x="5905066" y="4285260"/>
+            <a:ext cx="1274619" cy="400110"/>
           </a:xfrm>
           <a:prstGeom prst="rect">
             <a:avLst/>
@@ -4652,8 +4382,8 @@
         </p:nvCxnSpPr>
         <p:spPr>
           <a:xfrm>
-            <a:off x="3676009" y="1845875"/>
-            <a:ext cx="380490" cy="0"/>
+            <a:off x="5122354" y="1887638"/>
+            <a:ext cx="225225" cy="0"/>
           </a:xfrm>
           <a:prstGeom prst="line">
             <a:avLst/>
@@ -4695,8 +4425,8 @@
         </p:nvCxnSpPr>
         <p:spPr>
           <a:xfrm>
-            <a:off x="4056499" y="1845875"/>
-            <a:ext cx="0" cy="3064673"/>
+            <a:off x="5331494" y="1887638"/>
+            <a:ext cx="0" cy="2975102"/>
           </a:xfrm>
           <a:prstGeom prst="line">
             <a:avLst/>
@@ -4738,8 +4468,8 @@
         </p:nvCxnSpPr>
         <p:spPr>
           <a:xfrm>
-            <a:off x="3682147" y="4910548"/>
-            <a:ext cx="374352" cy="0"/>
+            <a:off x="5132833" y="4849055"/>
+            <a:ext cx="185005" cy="0"/>
           </a:xfrm>
           <a:prstGeom prst="line">
             <a:avLst/>
@@ -4774,13 +4504,15 @@
               </a:ext>
             </a:extLst>
           </p:cNvPr>
-          <p:cNvCxnSpPr/>
+          <p:cNvCxnSpPr>
+            <a:cxnSpLocks/>
+          </p:cNvCxnSpPr>
           <p:nvPr/>
         </p:nvCxnSpPr>
         <p:spPr>
           <a:xfrm>
-            <a:off x="4056499" y="3239819"/>
-            <a:ext cx="535957" cy="0"/>
+            <a:off x="5347579" y="3324855"/>
+            <a:ext cx="233659" cy="0"/>
           </a:xfrm>
           <a:prstGeom prst="straightConnector1">
             <a:avLst/>
@@ -4816,13 +4548,15 @@
               </a:ext>
             </a:extLst>
           </p:cNvPr>
-          <p:cNvCxnSpPr/>
+          <p:cNvCxnSpPr>
+            <a:cxnSpLocks/>
+          </p:cNvCxnSpPr>
           <p:nvPr/>
         </p:nvCxnSpPr>
         <p:spPr>
           <a:xfrm>
-            <a:off x="7599543" y="3239819"/>
-            <a:ext cx="374353" cy="0"/>
+            <a:off x="7482943" y="3331744"/>
+            <a:ext cx="218883" cy="0"/>
           </a:xfrm>
           <a:prstGeom prst="line">
             <a:avLst/>
@@ -4864,7 +4598,7 @@
         </p:nvCxnSpPr>
         <p:spPr>
           <a:xfrm>
-            <a:off x="7973896" y="1765724"/>
+            <a:off x="7701826" y="1836645"/>
             <a:ext cx="0" cy="3144824"/>
           </a:xfrm>
           <a:prstGeom prst="line">
@@ -4905,8 +4639,8 @@
         </p:nvSpPr>
         <p:spPr>
           <a:xfrm>
-            <a:off x="8509853" y="1060735"/>
-            <a:ext cx="2539993" cy="1400115"/>
+            <a:off x="7951593" y="1215972"/>
+            <a:ext cx="1897046" cy="1251930"/>
           </a:xfrm>
           <a:prstGeom prst="rect">
             <a:avLst/>
@@ -4961,8 +4695,8 @@
         </p:nvSpPr>
         <p:spPr>
           <a:xfrm>
-            <a:off x="8655898" y="1202552"/>
-            <a:ext cx="2260599" cy="1096433"/>
+            <a:off x="8019975" y="1294506"/>
+            <a:ext cx="1756833" cy="1096433"/>
           </a:xfrm>
           <a:prstGeom prst="rect">
             <a:avLst/>
@@ -5018,7 +4752,7 @@
         </p:nvCxnSpPr>
         <p:spPr>
           <a:xfrm>
-            <a:off x="8655898" y="1524285"/>
+            <a:off x="8019974" y="1615241"/>
             <a:ext cx="254000" cy="0"/>
           </a:xfrm>
           <a:prstGeom prst="line">
@@ -5059,7 +4793,7 @@
         </p:nvCxnSpPr>
         <p:spPr>
           <a:xfrm>
-            <a:off x="8909898" y="1312618"/>
+            <a:off x="8273974" y="1403574"/>
             <a:ext cx="254000" cy="0"/>
           </a:xfrm>
           <a:prstGeom prst="line">
@@ -5102,7 +4836,7 @@
         </p:nvCxnSpPr>
         <p:spPr>
           <a:xfrm>
-            <a:off x="8909898" y="1312618"/>
+            <a:off x="8273974" y="1403574"/>
             <a:ext cx="0" cy="211667"/>
           </a:xfrm>
           <a:prstGeom prst="line">
@@ -5145,7 +4879,7 @@
         </p:nvCxnSpPr>
         <p:spPr>
           <a:xfrm>
-            <a:off x="9163898" y="1312618"/>
+            <a:off x="8527974" y="1403574"/>
             <a:ext cx="0" cy="211667"/>
           </a:xfrm>
           <a:prstGeom prst="line">
@@ -5186,7 +4920,7 @@
         </p:nvCxnSpPr>
         <p:spPr>
           <a:xfrm>
-            <a:off x="9155432" y="1524285"/>
+            <a:off x="8519508" y="1615241"/>
             <a:ext cx="254000" cy="0"/>
           </a:xfrm>
           <a:prstGeom prst="line">
@@ -5227,7 +4961,7 @@
         </p:nvCxnSpPr>
         <p:spPr>
           <a:xfrm>
-            <a:off x="9409432" y="1312618"/>
+            <a:off x="8773508" y="1403574"/>
             <a:ext cx="254000" cy="0"/>
           </a:xfrm>
           <a:prstGeom prst="line">
@@ -5270,7 +5004,7 @@
         </p:nvCxnSpPr>
         <p:spPr>
           <a:xfrm>
-            <a:off x="9409432" y="1312618"/>
+            <a:off x="8773508" y="1403574"/>
             <a:ext cx="0" cy="211667"/>
           </a:xfrm>
           <a:prstGeom prst="line">
@@ -5313,7 +5047,7 @@
         </p:nvCxnSpPr>
         <p:spPr>
           <a:xfrm>
-            <a:off x="9663432" y="1312618"/>
+            <a:off x="9027508" y="1403574"/>
             <a:ext cx="0" cy="211667"/>
           </a:xfrm>
           <a:prstGeom prst="line">
@@ -5354,7 +5088,7 @@
         </p:nvCxnSpPr>
         <p:spPr>
           <a:xfrm>
-            <a:off x="9659198" y="1524285"/>
+            <a:off x="9023274" y="1615241"/>
             <a:ext cx="254000" cy="0"/>
           </a:xfrm>
           <a:prstGeom prst="line">
@@ -5395,7 +5129,7 @@
         </p:nvCxnSpPr>
         <p:spPr>
           <a:xfrm>
-            <a:off x="9913198" y="1312618"/>
+            <a:off x="9277274" y="1403574"/>
             <a:ext cx="254000" cy="0"/>
           </a:xfrm>
           <a:prstGeom prst="line">
@@ -5438,7 +5172,7 @@
         </p:nvCxnSpPr>
         <p:spPr>
           <a:xfrm>
-            <a:off x="9913198" y="1312618"/>
+            <a:off x="9277274" y="1403574"/>
             <a:ext cx="0" cy="211667"/>
           </a:xfrm>
           <a:prstGeom prst="line">
@@ -5481,7 +5215,7 @@
         </p:nvCxnSpPr>
         <p:spPr>
           <a:xfrm>
-            <a:off x="10167198" y="1312618"/>
+            <a:off x="9531274" y="1403574"/>
             <a:ext cx="0" cy="211667"/>
           </a:xfrm>
           <a:prstGeom prst="line">
@@ -5522,175 +5256,7 @@
         </p:nvCxnSpPr>
         <p:spPr>
           <a:xfrm>
-            <a:off x="10158732" y="1524285"/>
-            <a:ext cx="254000" cy="0"/>
-          </a:xfrm>
-          <a:prstGeom prst="line">
-            <a:avLst/>
-          </a:prstGeom>
-          <a:ln w="19050">
-            <a:solidFill>
-              <a:schemeClr val="tx1"/>
-            </a:solidFill>
-          </a:ln>
-        </p:spPr>
-        <p:style>
-          <a:lnRef idx="1">
-            <a:schemeClr val="accent1"/>
-          </a:lnRef>
-          <a:fillRef idx="0">
-            <a:schemeClr val="accent1"/>
-          </a:fillRef>
-          <a:effectRef idx="0">
-            <a:schemeClr val="accent1"/>
-          </a:effectRef>
-          <a:fontRef idx="minor">
-            <a:schemeClr val="tx1"/>
-          </a:fontRef>
-        </p:style>
-      </p:cxnSp>
-      <p:cxnSp>
-        <p:nvCxnSpPr>
-          <p:cNvPr id="58" name="直接连接符 57">
-            <a:extLst>
-              <a:ext uri="{FF2B5EF4-FFF2-40B4-BE49-F238E27FC236}">
-                <a16:creationId xmlns:a16="http://schemas.microsoft.com/office/drawing/2014/main" id="{69313696-1ECE-1C04-1E0E-3D938BC8E03F}"/>
-              </a:ext>
-            </a:extLst>
-          </p:cNvPr>
-          <p:cNvCxnSpPr/>
-          <p:nvPr/>
-        </p:nvCxnSpPr>
-        <p:spPr>
-          <a:xfrm>
-            <a:off x="10412732" y="1312618"/>
-            <a:ext cx="254000" cy="0"/>
-          </a:xfrm>
-          <a:prstGeom prst="line">
-            <a:avLst/>
-          </a:prstGeom>
-          <a:ln w="19050">
-            <a:solidFill>
-              <a:schemeClr val="tx1"/>
-            </a:solidFill>
-          </a:ln>
-        </p:spPr>
-        <p:style>
-          <a:lnRef idx="1">
-            <a:schemeClr val="accent1"/>
-          </a:lnRef>
-          <a:fillRef idx="0">
-            <a:schemeClr val="accent1"/>
-          </a:fillRef>
-          <a:effectRef idx="0">
-            <a:schemeClr val="accent1"/>
-          </a:effectRef>
-          <a:fontRef idx="minor">
-            <a:schemeClr val="tx1"/>
-          </a:fontRef>
-        </p:style>
-      </p:cxnSp>
-      <p:cxnSp>
-        <p:nvCxnSpPr>
-          <p:cNvPr id="59" name="直接连接符 58">
-            <a:extLst>
-              <a:ext uri="{FF2B5EF4-FFF2-40B4-BE49-F238E27FC236}">
-                <a16:creationId xmlns:a16="http://schemas.microsoft.com/office/drawing/2014/main" id="{E91A1318-659F-7AC4-D9F4-4F0372DD4CEB}"/>
-              </a:ext>
-            </a:extLst>
-          </p:cNvPr>
-          <p:cNvCxnSpPr>
-            <a:cxnSpLocks/>
-          </p:cNvCxnSpPr>
-          <p:nvPr/>
-        </p:nvCxnSpPr>
-        <p:spPr>
-          <a:xfrm>
-            <a:off x="10412732" y="1312618"/>
-            <a:ext cx="0" cy="211667"/>
-          </a:xfrm>
-          <a:prstGeom prst="line">
-            <a:avLst/>
-          </a:prstGeom>
-          <a:ln w="19050">
-            <a:solidFill>
-              <a:schemeClr val="tx1"/>
-            </a:solidFill>
-          </a:ln>
-        </p:spPr>
-        <p:style>
-          <a:lnRef idx="1">
-            <a:schemeClr val="accent1"/>
-          </a:lnRef>
-          <a:fillRef idx="0">
-            <a:schemeClr val="accent1"/>
-          </a:fillRef>
-          <a:effectRef idx="0">
-            <a:schemeClr val="accent1"/>
-          </a:effectRef>
-          <a:fontRef idx="minor">
-            <a:schemeClr val="tx1"/>
-          </a:fontRef>
-        </p:style>
-      </p:cxnSp>
-      <p:cxnSp>
-        <p:nvCxnSpPr>
-          <p:cNvPr id="60" name="直接连接符 59">
-            <a:extLst>
-              <a:ext uri="{FF2B5EF4-FFF2-40B4-BE49-F238E27FC236}">
-                <a16:creationId xmlns:a16="http://schemas.microsoft.com/office/drawing/2014/main" id="{574620D6-9239-6615-21A0-D3D286CAC7ED}"/>
-              </a:ext>
-            </a:extLst>
-          </p:cNvPr>
-          <p:cNvCxnSpPr>
-            <a:cxnSpLocks/>
-          </p:cNvCxnSpPr>
-          <p:nvPr/>
-        </p:nvCxnSpPr>
-        <p:spPr>
-          <a:xfrm>
-            <a:off x="10666732" y="1312618"/>
-            <a:ext cx="0" cy="211667"/>
-          </a:xfrm>
-          <a:prstGeom prst="line">
-            <a:avLst/>
-          </a:prstGeom>
-          <a:ln w="19050">
-            <a:solidFill>
-              <a:schemeClr val="tx1"/>
-            </a:solidFill>
-          </a:ln>
-        </p:spPr>
-        <p:style>
-          <a:lnRef idx="1">
-            <a:schemeClr val="accent1"/>
-          </a:lnRef>
-          <a:fillRef idx="0">
-            <a:schemeClr val="accent1"/>
-          </a:fillRef>
-          <a:effectRef idx="0">
-            <a:schemeClr val="accent1"/>
-          </a:effectRef>
-          <a:fontRef idx="minor">
-            <a:schemeClr val="tx1"/>
-          </a:fontRef>
-        </p:style>
-      </p:cxnSp>
-      <p:cxnSp>
-        <p:nvCxnSpPr>
-          <p:cNvPr id="61" name="直接连接符 60">
-            <a:extLst>
-              <a:ext uri="{FF2B5EF4-FFF2-40B4-BE49-F238E27FC236}">
-                <a16:creationId xmlns:a16="http://schemas.microsoft.com/office/drawing/2014/main" id="{8A7EDDCC-85FC-6601-6F09-7DD784A1FA7D}"/>
-              </a:ext>
-            </a:extLst>
-          </p:cNvPr>
-          <p:cNvCxnSpPr/>
-          <p:nvPr/>
-        </p:nvCxnSpPr>
-        <p:spPr>
-          <a:xfrm>
-            <a:off x="10662497" y="1524285"/>
+            <a:off x="9522808" y="1615241"/>
             <a:ext cx="254000" cy="0"/>
           </a:xfrm>
           <a:prstGeom prst="line">
@@ -5733,7 +5299,7 @@
         </p:nvCxnSpPr>
         <p:spPr>
           <a:xfrm>
-            <a:off x="8655898" y="1855755"/>
+            <a:off x="8019974" y="1946711"/>
             <a:ext cx="508000" cy="0"/>
           </a:xfrm>
           <a:prstGeom prst="line">
@@ -5776,7 +5342,7 @@
         </p:nvCxnSpPr>
         <p:spPr>
           <a:xfrm>
-            <a:off x="9168978" y="1651708"/>
+            <a:off x="8533054" y="1742664"/>
             <a:ext cx="0" cy="211667"/>
           </a:xfrm>
           <a:prstGeom prst="line">
@@ -5817,7 +5383,7 @@
         </p:nvCxnSpPr>
         <p:spPr>
           <a:xfrm>
-            <a:off x="9160512" y="1651708"/>
+            <a:off x="8524588" y="1742664"/>
             <a:ext cx="254000" cy="0"/>
           </a:xfrm>
           <a:prstGeom prst="line">
@@ -5860,7 +5426,7 @@
         </p:nvCxnSpPr>
         <p:spPr>
           <a:xfrm>
-            <a:off x="9411126" y="1646628"/>
+            <a:off x="8775202" y="1737584"/>
             <a:ext cx="0" cy="211667"/>
           </a:xfrm>
           <a:prstGeom prst="line">
@@ -5903,7 +5469,7 @@
         </p:nvCxnSpPr>
         <p:spPr>
           <a:xfrm>
-            <a:off x="9405198" y="1853639"/>
+            <a:off x="8769274" y="1944595"/>
             <a:ext cx="508000" cy="0"/>
           </a:xfrm>
           <a:prstGeom prst="line">
@@ -5946,7 +5512,7 @@
         </p:nvCxnSpPr>
         <p:spPr>
           <a:xfrm>
-            <a:off x="9918277" y="1644936"/>
+            <a:off x="9282353" y="1735892"/>
             <a:ext cx="0" cy="211667"/>
           </a:xfrm>
           <a:prstGeom prst="line">
@@ -5987,7 +5553,7 @@
         </p:nvCxnSpPr>
         <p:spPr>
           <a:xfrm>
-            <a:off x="9909811" y="1644936"/>
+            <a:off x="9273887" y="1735892"/>
             <a:ext cx="254000" cy="0"/>
           </a:xfrm>
           <a:prstGeom prst="line">
@@ -6030,7 +5596,7 @@
         </p:nvCxnSpPr>
         <p:spPr>
           <a:xfrm>
-            <a:off x="10160425" y="1639856"/>
+            <a:off x="9524501" y="1730812"/>
             <a:ext cx="0" cy="211667"/>
           </a:xfrm>
           <a:prstGeom prst="line">
@@ -6073,92 +5639,8 @@
         </p:nvCxnSpPr>
         <p:spPr>
           <a:xfrm>
-            <a:off x="10154497" y="1846867"/>
-            <a:ext cx="508000" cy="0"/>
-          </a:xfrm>
-          <a:prstGeom prst="line">
-            <a:avLst/>
-          </a:prstGeom>
-          <a:ln w="19050">
-            <a:solidFill>
-              <a:schemeClr val="tx1"/>
-            </a:solidFill>
-          </a:ln>
-        </p:spPr>
-        <p:style>
-          <a:lnRef idx="1">
-            <a:schemeClr val="accent1"/>
-          </a:lnRef>
-          <a:fillRef idx="0">
-            <a:schemeClr val="accent1"/>
-          </a:fillRef>
-          <a:effectRef idx="0">
-            <a:schemeClr val="accent1"/>
-          </a:effectRef>
-          <a:fontRef idx="minor">
-            <a:schemeClr val="tx1"/>
-          </a:fontRef>
-        </p:style>
-      </p:cxnSp>
-      <p:cxnSp>
-        <p:nvCxnSpPr>
-          <p:cNvPr id="75" name="直接连接符 74">
-            <a:extLst>
-              <a:ext uri="{FF2B5EF4-FFF2-40B4-BE49-F238E27FC236}">
-                <a16:creationId xmlns:a16="http://schemas.microsoft.com/office/drawing/2014/main" id="{30535CCB-FBB2-9283-EF32-015F49E2F184}"/>
-              </a:ext>
-            </a:extLst>
-          </p:cNvPr>
-          <p:cNvCxnSpPr>
-            <a:cxnSpLocks/>
-          </p:cNvCxnSpPr>
-          <p:nvPr/>
-        </p:nvCxnSpPr>
-        <p:spPr>
-          <a:xfrm>
-            <a:off x="10658264" y="1641548"/>
-            <a:ext cx="0" cy="211667"/>
-          </a:xfrm>
-          <a:prstGeom prst="line">
-            <a:avLst/>
-          </a:prstGeom>
-          <a:ln w="19050">
-            <a:solidFill>
-              <a:schemeClr val="tx1"/>
-            </a:solidFill>
-          </a:ln>
-        </p:spPr>
-        <p:style>
-          <a:lnRef idx="1">
-            <a:schemeClr val="accent1"/>
-          </a:lnRef>
-          <a:fillRef idx="0">
-            <a:schemeClr val="accent1"/>
-          </a:fillRef>
-          <a:effectRef idx="0">
-            <a:schemeClr val="accent1"/>
-          </a:effectRef>
-          <a:fontRef idx="minor">
-            <a:schemeClr val="tx1"/>
-          </a:fontRef>
-        </p:style>
-      </p:cxnSp>
-      <p:cxnSp>
-        <p:nvCxnSpPr>
-          <p:cNvPr id="76" name="直接连接符 75">
-            <a:extLst>
-              <a:ext uri="{FF2B5EF4-FFF2-40B4-BE49-F238E27FC236}">
-                <a16:creationId xmlns:a16="http://schemas.microsoft.com/office/drawing/2014/main" id="{B16D52FE-78E0-66FE-CE1C-18389BADF0D8}"/>
-              </a:ext>
-            </a:extLst>
-          </p:cNvPr>
-          <p:cNvCxnSpPr/>
-          <p:nvPr/>
-        </p:nvCxnSpPr>
-        <p:spPr>
-          <a:xfrm>
-            <a:off x="10666732" y="1649593"/>
-            <a:ext cx="254000" cy="0"/>
+            <a:off x="9518573" y="1937823"/>
+            <a:ext cx="258235" cy="0"/>
           </a:xfrm>
           <a:prstGeom prst="line">
             <a:avLst/>
@@ -6200,7 +5682,7 @@
         </p:nvCxnSpPr>
         <p:spPr>
           <a:xfrm>
-            <a:off x="8655898" y="2185955"/>
+            <a:off x="8019974" y="2276911"/>
             <a:ext cx="758614" cy="0"/>
           </a:xfrm>
           <a:prstGeom prst="line">
@@ -6243,7 +5725,7 @@
         </p:nvCxnSpPr>
         <p:spPr>
           <a:xfrm>
-            <a:off x="9414510" y="1979368"/>
+            <a:off x="8778586" y="2070324"/>
             <a:ext cx="0" cy="211667"/>
           </a:xfrm>
           <a:prstGeom prst="line">
@@ -6284,7 +5766,7 @@
         </p:nvCxnSpPr>
         <p:spPr>
           <a:xfrm>
-            <a:off x="9406044" y="1979368"/>
+            <a:off x="8770120" y="2070324"/>
             <a:ext cx="254000" cy="0"/>
           </a:xfrm>
           <a:prstGeom prst="line">
@@ -6327,7 +5809,7 @@
         </p:nvCxnSpPr>
         <p:spPr>
           <a:xfrm>
-            <a:off x="9656658" y="1974288"/>
+            <a:off x="9020734" y="2065244"/>
             <a:ext cx="0" cy="211667"/>
           </a:xfrm>
           <a:prstGeom prst="line">
@@ -6370,7 +5852,7 @@
         </p:nvCxnSpPr>
         <p:spPr>
           <a:xfrm>
-            <a:off x="9663432" y="2185955"/>
+            <a:off x="9027508" y="2276911"/>
             <a:ext cx="498686" cy="0"/>
           </a:xfrm>
           <a:prstGeom prst="line">
@@ -6413,7 +5895,7 @@
         </p:nvCxnSpPr>
         <p:spPr>
           <a:xfrm>
-            <a:off x="10162118" y="1979368"/>
+            <a:off x="9526194" y="2070324"/>
             <a:ext cx="0" cy="211667"/>
           </a:xfrm>
           <a:prstGeom prst="line">
@@ -6454,94 +5936,8 @@
         </p:nvCxnSpPr>
         <p:spPr>
           <a:xfrm>
-            <a:off x="10153652" y="1979368"/>
+            <a:off x="9517728" y="2070324"/>
             <a:ext cx="254000" cy="0"/>
-          </a:xfrm>
-          <a:prstGeom prst="line">
-            <a:avLst/>
-          </a:prstGeom>
-          <a:ln w="19050">
-            <a:solidFill>
-              <a:schemeClr val="tx1"/>
-            </a:solidFill>
-          </a:ln>
-        </p:spPr>
-        <p:style>
-          <a:lnRef idx="1">
-            <a:schemeClr val="accent1"/>
-          </a:lnRef>
-          <a:fillRef idx="0">
-            <a:schemeClr val="accent1"/>
-          </a:fillRef>
-          <a:effectRef idx="0">
-            <a:schemeClr val="accent1"/>
-          </a:effectRef>
-          <a:fontRef idx="minor">
-            <a:schemeClr val="tx1"/>
-          </a:fontRef>
-        </p:style>
-      </p:cxnSp>
-      <p:cxnSp>
-        <p:nvCxnSpPr>
-          <p:cNvPr id="88" name="直接连接符 87">
-            <a:extLst>
-              <a:ext uri="{FF2B5EF4-FFF2-40B4-BE49-F238E27FC236}">
-                <a16:creationId xmlns:a16="http://schemas.microsoft.com/office/drawing/2014/main" id="{AA13A054-9D05-8D6F-7EB2-6E4920C36942}"/>
-              </a:ext>
-            </a:extLst>
-          </p:cNvPr>
-          <p:cNvCxnSpPr>
-            <a:cxnSpLocks/>
-          </p:cNvCxnSpPr>
-          <p:nvPr/>
-        </p:nvCxnSpPr>
-        <p:spPr>
-          <a:xfrm>
-            <a:off x="10404266" y="1974288"/>
-            <a:ext cx="0" cy="211667"/>
-          </a:xfrm>
-          <a:prstGeom prst="line">
-            <a:avLst/>
-          </a:prstGeom>
-          <a:ln w="19050">
-            <a:solidFill>
-              <a:schemeClr val="tx1"/>
-            </a:solidFill>
-          </a:ln>
-        </p:spPr>
-        <p:style>
-          <a:lnRef idx="1">
-            <a:schemeClr val="accent1"/>
-          </a:lnRef>
-          <a:fillRef idx="0">
-            <a:schemeClr val="accent1"/>
-          </a:fillRef>
-          <a:effectRef idx="0">
-            <a:schemeClr val="accent1"/>
-          </a:effectRef>
-          <a:fontRef idx="minor">
-            <a:schemeClr val="tx1"/>
-          </a:fontRef>
-        </p:style>
-      </p:cxnSp>
-      <p:cxnSp>
-        <p:nvCxnSpPr>
-          <p:cNvPr id="91" name="直接连接符 90">
-            <a:extLst>
-              <a:ext uri="{FF2B5EF4-FFF2-40B4-BE49-F238E27FC236}">
-                <a16:creationId xmlns:a16="http://schemas.microsoft.com/office/drawing/2014/main" id="{5C7C1933-481A-4DEB-3BE3-3AC534D505B8}"/>
-              </a:ext>
-            </a:extLst>
-          </p:cNvPr>
-          <p:cNvCxnSpPr>
-            <a:cxnSpLocks/>
-          </p:cNvCxnSpPr>
-          <p:nvPr/>
-        </p:nvCxnSpPr>
-        <p:spPr>
-          <a:xfrm>
-            <a:off x="10404266" y="2185955"/>
-            <a:ext cx="512231" cy="0"/>
           </a:xfrm>
           <a:prstGeom prst="line">
             <a:avLst/>
@@ -6581,8 +5977,8 @@
         </p:nvSpPr>
         <p:spPr>
           <a:xfrm>
-            <a:off x="8509853" y="4234931"/>
-            <a:ext cx="2539995" cy="1351234"/>
+            <a:off x="7951593" y="4376481"/>
+            <a:ext cx="1897046" cy="1251931"/>
           </a:xfrm>
           <a:prstGeom prst="rect">
             <a:avLst/>
@@ -6637,8 +6033,8 @@
         </p:nvSpPr>
         <p:spPr>
           <a:xfrm>
-            <a:off x="8655898" y="4351148"/>
-            <a:ext cx="2260599" cy="1096433"/>
+            <a:off x="8019975" y="4453288"/>
+            <a:ext cx="1751753" cy="1096433"/>
           </a:xfrm>
           <a:prstGeom prst="rect">
             <a:avLst/>
@@ -6696,7 +6092,7 @@
         </p:nvCxnSpPr>
         <p:spPr>
           <a:xfrm>
-            <a:off x="8655898" y="4672881"/>
+            <a:off x="8019974" y="4775021"/>
             <a:ext cx="254000" cy="0"/>
           </a:xfrm>
           <a:prstGeom prst="line">
@@ -6739,7 +6135,7 @@
         </p:nvCxnSpPr>
         <p:spPr>
           <a:xfrm>
-            <a:off x="8909898" y="4461214"/>
+            <a:off x="8273974" y="4563354"/>
             <a:ext cx="254000" cy="0"/>
           </a:xfrm>
           <a:prstGeom prst="line">
@@ -6782,7 +6178,7 @@
         </p:nvCxnSpPr>
         <p:spPr>
           <a:xfrm>
-            <a:off x="8909898" y="4461214"/>
+            <a:off x="8273974" y="4563354"/>
             <a:ext cx="0" cy="211667"/>
           </a:xfrm>
           <a:prstGeom prst="line">
@@ -6825,7 +6221,7 @@
         </p:nvCxnSpPr>
         <p:spPr>
           <a:xfrm>
-            <a:off x="9163898" y="4461214"/>
+            <a:off x="8527974" y="4563354"/>
             <a:ext cx="0" cy="211667"/>
           </a:xfrm>
           <a:prstGeom prst="line">
@@ -6868,7 +6264,7 @@
         </p:nvCxnSpPr>
         <p:spPr>
           <a:xfrm>
-            <a:off x="9155432" y="4672881"/>
+            <a:off x="8519508" y="4775021"/>
             <a:ext cx="254000" cy="0"/>
           </a:xfrm>
           <a:prstGeom prst="line">
@@ -6911,7 +6307,7 @@
         </p:nvCxnSpPr>
         <p:spPr>
           <a:xfrm>
-            <a:off x="9409432" y="4461214"/>
+            <a:off x="8773508" y="4563354"/>
             <a:ext cx="254000" cy="0"/>
           </a:xfrm>
           <a:prstGeom prst="line">
@@ -6954,7 +6350,7 @@
         </p:nvCxnSpPr>
         <p:spPr>
           <a:xfrm>
-            <a:off x="9409432" y="4461214"/>
+            <a:off x="8773508" y="4563354"/>
             <a:ext cx="0" cy="211667"/>
           </a:xfrm>
           <a:prstGeom prst="line">
@@ -6997,7 +6393,7 @@
         </p:nvCxnSpPr>
         <p:spPr>
           <a:xfrm>
-            <a:off x="9663432" y="4461214"/>
+            <a:off x="9027508" y="4563354"/>
             <a:ext cx="0" cy="211667"/>
           </a:xfrm>
           <a:prstGeom prst="line">
@@ -7040,7 +6436,7 @@
         </p:nvCxnSpPr>
         <p:spPr>
           <a:xfrm>
-            <a:off x="9659198" y="4672881"/>
+            <a:off x="9023274" y="4775021"/>
             <a:ext cx="254000" cy="0"/>
           </a:xfrm>
           <a:prstGeom prst="line">
@@ -7083,7 +6479,7 @@
         </p:nvCxnSpPr>
         <p:spPr>
           <a:xfrm>
-            <a:off x="9913198" y="4461214"/>
+            <a:off x="9277274" y="4563354"/>
             <a:ext cx="254000" cy="0"/>
           </a:xfrm>
           <a:prstGeom prst="line">
@@ -7126,7 +6522,7 @@
         </p:nvCxnSpPr>
         <p:spPr>
           <a:xfrm>
-            <a:off x="9913198" y="4461214"/>
+            <a:off x="9277274" y="4563354"/>
             <a:ext cx="0" cy="211667"/>
           </a:xfrm>
           <a:prstGeom prst="line">
@@ -7169,7 +6565,7 @@
         </p:nvCxnSpPr>
         <p:spPr>
           <a:xfrm>
-            <a:off x="10167198" y="4461214"/>
+            <a:off x="9531274" y="4563354"/>
             <a:ext cx="0" cy="211667"/>
           </a:xfrm>
           <a:prstGeom prst="line">
@@ -7212,179 +6608,7 @@
         </p:nvCxnSpPr>
         <p:spPr>
           <a:xfrm>
-            <a:off x="10158732" y="4672881"/>
-            <a:ext cx="254000" cy="0"/>
-          </a:xfrm>
-          <a:prstGeom prst="line">
-            <a:avLst/>
-          </a:prstGeom>
-          <a:ln w="19050">
-            <a:solidFill>
-              <a:schemeClr val="tx1"/>
-            </a:solidFill>
-          </a:ln>
-        </p:spPr>
-        <p:style>
-          <a:lnRef idx="1">
-            <a:schemeClr val="accent1"/>
-          </a:lnRef>
-          <a:fillRef idx="0">
-            <a:schemeClr val="accent1"/>
-          </a:fillRef>
-          <a:effectRef idx="0">
-            <a:schemeClr val="accent1"/>
-          </a:effectRef>
-          <a:fontRef idx="minor">
-            <a:schemeClr val="tx1"/>
-          </a:fontRef>
-        </p:style>
-      </p:cxnSp>
-      <p:cxnSp>
-        <p:nvCxnSpPr>
-          <p:cNvPr id="148" name="直接连接符 147">
-            <a:extLst>
-              <a:ext uri="{FF2B5EF4-FFF2-40B4-BE49-F238E27FC236}">
-                <a16:creationId xmlns:a16="http://schemas.microsoft.com/office/drawing/2014/main" id="{6B644531-0B1F-D265-4887-6D84237DBD3A}"/>
-              </a:ext>
-            </a:extLst>
-          </p:cNvPr>
-          <p:cNvCxnSpPr>
-            <a:cxnSpLocks/>
-          </p:cNvCxnSpPr>
-          <p:nvPr/>
-        </p:nvCxnSpPr>
-        <p:spPr>
-          <a:xfrm>
-            <a:off x="10412732" y="4461214"/>
-            <a:ext cx="254000" cy="0"/>
-          </a:xfrm>
-          <a:prstGeom prst="line">
-            <a:avLst/>
-          </a:prstGeom>
-          <a:ln w="19050">
-            <a:solidFill>
-              <a:schemeClr val="tx1"/>
-            </a:solidFill>
-          </a:ln>
-        </p:spPr>
-        <p:style>
-          <a:lnRef idx="1">
-            <a:schemeClr val="accent1"/>
-          </a:lnRef>
-          <a:fillRef idx="0">
-            <a:schemeClr val="accent1"/>
-          </a:fillRef>
-          <a:effectRef idx="0">
-            <a:schemeClr val="accent1"/>
-          </a:effectRef>
-          <a:fontRef idx="minor">
-            <a:schemeClr val="tx1"/>
-          </a:fontRef>
-        </p:style>
-      </p:cxnSp>
-      <p:cxnSp>
-        <p:nvCxnSpPr>
-          <p:cNvPr id="149" name="直接连接符 148">
-            <a:extLst>
-              <a:ext uri="{FF2B5EF4-FFF2-40B4-BE49-F238E27FC236}">
-                <a16:creationId xmlns:a16="http://schemas.microsoft.com/office/drawing/2014/main" id="{60F1DA32-72DF-3C07-C39C-8C88C78A5B00}"/>
-              </a:ext>
-            </a:extLst>
-          </p:cNvPr>
-          <p:cNvCxnSpPr>
-            <a:cxnSpLocks/>
-          </p:cNvCxnSpPr>
-          <p:nvPr/>
-        </p:nvCxnSpPr>
-        <p:spPr>
-          <a:xfrm>
-            <a:off x="10412732" y="4461214"/>
-            <a:ext cx="0" cy="211667"/>
-          </a:xfrm>
-          <a:prstGeom prst="line">
-            <a:avLst/>
-          </a:prstGeom>
-          <a:ln w="19050">
-            <a:solidFill>
-              <a:schemeClr val="tx1"/>
-            </a:solidFill>
-          </a:ln>
-        </p:spPr>
-        <p:style>
-          <a:lnRef idx="1">
-            <a:schemeClr val="accent1"/>
-          </a:lnRef>
-          <a:fillRef idx="0">
-            <a:schemeClr val="accent1"/>
-          </a:fillRef>
-          <a:effectRef idx="0">
-            <a:schemeClr val="accent1"/>
-          </a:effectRef>
-          <a:fontRef idx="minor">
-            <a:schemeClr val="tx1"/>
-          </a:fontRef>
-        </p:style>
-      </p:cxnSp>
-      <p:cxnSp>
-        <p:nvCxnSpPr>
-          <p:cNvPr id="150" name="直接连接符 149">
-            <a:extLst>
-              <a:ext uri="{FF2B5EF4-FFF2-40B4-BE49-F238E27FC236}">
-                <a16:creationId xmlns:a16="http://schemas.microsoft.com/office/drawing/2014/main" id="{4B0664F1-8EA9-F50C-4576-7BCDBFA85DC3}"/>
-              </a:ext>
-            </a:extLst>
-          </p:cNvPr>
-          <p:cNvCxnSpPr>
-            <a:cxnSpLocks/>
-          </p:cNvCxnSpPr>
-          <p:nvPr/>
-        </p:nvCxnSpPr>
-        <p:spPr>
-          <a:xfrm>
-            <a:off x="10666732" y="4461214"/>
-            <a:ext cx="0" cy="211667"/>
-          </a:xfrm>
-          <a:prstGeom prst="line">
-            <a:avLst/>
-          </a:prstGeom>
-          <a:ln w="19050">
-            <a:solidFill>
-              <a:schemeClr val="tx1"/>
-            </a:solidFill>
-          </a:ln>
-        </p:spPr>
-        <p:style>
-          <a:lnRef idx="1">
-            <a:schemeClr val="accent1"/>
-          </a:lnRef>
-          <a:fillRef idx="0">
-            <a:schemeClr val="accent1"/>
-          </a:fillRef>
-          <a:effectRef idx="0">
-            <a:schemeClr val="accent1"/>
-          </a:effectRef>
-          <a:fontRef idx="minor">
-            <a:schemeClr val="tx1"/>
-          </a:fontRef>
-        </p:style>
-      </p:cxnSp>
-      <p:cxnSp>
-        <p:nvCxnSpPr>
-          <p:cNvPr id="151" name="直接连接符 150">
-            <a:extLst>
-              <a:ext uri="{FF2B5EF4-FFF2-40B4-BE49-F238E27FC236}">
-                <a16:creationId xmlns:a16="http://schemas.microsoft.com/office/drawing/2014/main" id="{BF29F6D7-DC0B-A0AF-EBE3-1AF4D9ECACF5}"/>
-              </a:ext>
-            </a:extLst>
-          </p:cNvPr>
-          <p:cNvCxnSpPr>
-            <a:cxnSpLocks/>
-          </p:cNvCxnSpPr>
-          <p:nvPr/>
-        </p:nvCxnSpPr>
-        <p:spPr>
-          <a:xfrm>
-            <a:off x="10662497" y="4672881"/>
+            <a:off x="9522808" y="4775021"/>
             <a:ext cx="254000" cy="0"/>
           </a:xfrm>
           <a:prstGeom prst="line">
@@ -7427,7 +6651,7 @@
         </p:nvCxnSpPr>
         <p:spPr>
           <a:xfrm>
-            <a:off x="8655898" y="5004351"/>
+            <a:off x="8019974" y="5106491"/>
             <a:ext cx="508000" cy="0"/>
           </a:xfrm>
           <a:prstGeom prst="line">
@@ -7470,7 +6694,7 @@
         </p:nvCxnSpPr>
         <p:spPr>
           <a:xfrm>
-            <a:off x="9168978" y="4800304"/>
+            <a:off x="8533054" y="4902444"/>
             <a:ext cx="0" cy="211667"/>
           </a:xfrm>
           <a:prstGeom prst="line">
@@ -7513,7 +6737,7 @@
         </p:nvCxnSpPr>
         <p:spPr>
           <a:xfrm>
-            <a:off x="9160512" y="4800304"/>
+            <a:off x="8524588" y="4902444"/>
             <a:ext cx="254000" cy="0"/>
           </a:xfrm>
           <a:prstGeom prst="line">
@@ -7556,7 +6780,7 @@
         </p:nvCxnSpPr>
         <p:spPr>
           <a:xfrm>
-            <a:off x="9411126" y="4795224"/>
+            <a:off x="8775202" y="4897364"/>
             <a:ext cx="0" cy="211667"/>
           </a:xfrm>
           <a:prstGeom prst="line">
@@ -7599,7 +6823,7 @@
         </p:nvCxnSpPr>
         <p:spPr>
           <a:xfrm>
-            <a:off x="9405198" y="5002235"/>
+            <a:off x="8769274" y="5104375"/>
             <a:ext cx="508000" cy="0"/>
           </a:xfrm>
           <a:prstGeom prst="line">
@@ -7642,7 +6866,7 @@
         </p:nvCxnSpPr>
         <p:spPr>
           <a:xfrm>
-            <a:off x="9918277" y="4793532"/>
+            <a:off x="9282353" y="4895672"/>
             <a:ext cx="0" cy="211667"/>
           </a:xfrm>
           <a:prstGeom prst="line">
@@ -7685,7 +6909,7 @@
         </p:nvCxnSpPr>
         <p:spPr>
           <a:xfrm>
-            <a:off x="9909811" y="4793532"/>
+            <a:off x="9273887" y="4895672"/>
             <a:ext cx="254000" cy="0"/>
           </a:xfrm>
           <a:prstGeom prst="line">
@@ -7728,7 +6952,7 @@
         </p:nvCxnSpPr>
         <p:spPr>
           <a:xfrm>
-            <a:off x="10160425" y="4788452"/>
+            <a:off x="9524501" y="4890592"/>
             <a:ext cx="0" cy="211667"/>
           </a:xfrm>
           <a:prstGeom prst="line">
@@ -7771,94 +6995,8 @@
         </p:nvCxnSpPr>
         <p:spPr>
           <a:xfrm>
-            <a:off x="10154497" y="4995463"/>
-            <a:ext cx="508000" cy="0"/>
-          </a:xfrm>
-          <a:prstGeom prst="line">
-            <a:avLst/>
-          </a:prstGeom>
-          <a:ln w="19050">
-            <a:solidFill>
-              <a:schemeClr val="tx1"/>
-            </a:solidFill>
-          </a:ln>
-        </p:spPr>
-        <p:style>
-          <a:lnRef idx="1">
-            <a:schemeClr val="accent1"/>
-          </a:lnRef>
-          <a:fillRef idx="0">
-            <a:schemeClr val="accent1"/>
-          </a:fillRef>
-          <a:effectRef idx="0">
-            <a:schemeClr val="accent1"/>
-          </a:effectRef>
-          <a:fontRef idx="minor">
-            <a:schemeClr val="tx1"/>
-          </a:fontRef>
-        </p:style>
-      </p:cxnSp>
-      <p:cxnSp>
-        <p:nvCxnSpPr>
-          <p:cNvPr id="161" name="直接连接符 160">
-            <a:extLst>
-              <a:ext uri="{FF2B5EF4-FFF2-40B4-BE49-F238E27FC236}">
-                <a16:creationId xmlns:a16="http://schemas.microsoft.com/office/drawing/2014/main" id="{14A26946-9CBD-3E4A-76F3-20ACEBE9AA01}"/>
-              </a:ext>
-            </a:extLst>
-          </p:cNvPr>
-          <p:cNvCxnSpPr>
-            <a:cxnSpLocks/>
-          </p:cNvCxnSpPr>
-          <p:nvPr/>
-        </p:nvCxnSpPr>
-        <p:spPr>
-          <a:xfrm>
-            <a:off x="10658264" y="4790144"/>
-            <a:ext cx="0" cy="211667"/>
-          </a:xfrm>
-          <a:prstGeom prst="line">
-            <a:avLst/>
-          </a:prstGeom>
-          <a:ln w="19050">
-            <a:solidFill>
-              <a:schemeClr val="tx1"/>
-            </a:solidFill>
-          </a:ln>
-        </p:spPr>
-        <p:style>
-          <a:lnRef idx="1">
-            <a:schemeClr val="accent1"/>
-          </a:lnRef>
-          <a:fillRef idx="0">
-            <a:schemeClr val="accent1"/>
-          </a:fillRef>
-          <a:effectRef idx="0">
-            <a:schemeClr val="accent1"/>
-          </a:effectRef>
-          <a:fontRef idx="minor">
-            <a:schemeClr val="tx1"/>
-          </a:fontRef>
-        </p:style>
-      </p:cxnSp>
-      <p:cxnSp>
-        <p:nvCxnSpPr>
-          <p:cNvPr id="162" name="直接连接符 161">
-            <a:extLst>
-              <a:ext uri="{FF2B5EF4-FFF2-40B4-BE49-F238E27FC236}">
-                <a16:creationId xmlns:a16="http://schemas.microsoft.com/office/drawing/2014/main" id="{5A2928D3-357A-A9DD-B079-5C121C7BF927}"/>
-              </a:ext>
-            </a:extLst>
-          </p:cNvPr>
-          <p:cNvCxnSpPr>
-            <a:cxnSpLocks/>
-          </p:cNvCxnSpPr>
-          <p:nvPr/>
-        </p:nvCxnSpPr>
-        <p:spPr>
-          <a:xfrm>
-            <a:off x="10666732" y="4798189"/>
-            <a:ext cx="254000" cy="0"/>
+            <a:off x="9518573" y="5097603"/>
+            <a:ext cx="253155" cy="0"/>
           </a:xfrm>
           <a:prstGeom prst="line">
             <a:avLst/>
@@ -7900,8 +7038,8 @@
         </p:nvCxnSpPr>
         <p:spPr>
           <a:xfrm>
-            <a:off x="8655898" y="5334551"/>
-            <a:ext cx="1504527" cy="0"/>
+            <a:off x="8019974" y="5436691"/>
+            <a:ext cx="758612" cy="0"/>
           </a:xfrm>
           <a:prstGeom prst="line">
             <a:avLst/>
@@ -7943,7 +7081,7 @@
         </p:nvCxnSpPr>
         <p:spPr>
           <a:xfrm>
-            <a:off x="10162118" y="5127964"/>
+            <a:off x="8778586" y="5225024"/>
             <a:ext cx="0" cy="211667"/>
           </a:xfrm>
           <a:prstGeom prst="line">
@@ -7986,7 +7124,7 @@
         </p:nvCxnSpPr>
         <p:spPr>
           <a:xfrm>
-            <a:off x="10153652" y="5127964"/>
+            <a:off x="8770120" y="5225024"/>
             <a:ext cx="254000" cy="0"/>
           </a:xfrm>
           <a:prstGeom prst="line">
@@ -8013,94 +7151,8 @@
           </a:fontRef>
         </p:style>
       </p:cxnSp>
-      <p:cxnSp>
-        <p:nvCxnSpPr>
-          <p:cNvPr id="170" name="直接连接符 169">
-            <a:extLst>
-              <a:ext uri="{FF2B5EF4-FFF2-40B4-BE49-F238E27FC236}">
-                <a16:creationId xmlns:a16="http://schemas.microsoft.com/office/drawing/2014/main" id="{0A5C17DE-40F1-18B1-6A77-CFB156814C3C}"/>
-              </a:ext>
-            </a:extLst>
-          </p:cNvPr>
-          <p:cNvCxnSpPr>
-            <a:cxnSpLocks/>
-          </p:cNvCxnSpPr>
-          <p:nvPr/>
-        </p:nvCxnSpPr>
-        <p:spPr>
-          <a:xfrm>
-            <a:off x="10404266" y="5122884"/>
-            <a:ext cx="0" cy="211667"/>
-          </a:xfrm>
-          <a:prstGeom prst="line">
-            <a:avLst/>
-          </a:prstGeom>
-          <a:ln w="19050">
-            <a:solidFill>
-              <a:schemeClr val="tx1"/>
-            </a:solidFill>
-          </a:ln>
-        </p:spPr>
-        <p:style>
-          <a:lnRef idx="1">
-            <a:schemeClr val="accent1"/>
-          </a:lnRef>
-          <a:fillRef idx="0">
-            <a:schemeClr val="accent1"/>
-          </a:fillRef>
-          <a:effectRef idx="0">
-            <a:schemeClr val="accent1"/>
-          </a:effectRef>
-          <a:fontRef idx="minor">
-            <a:schemeClr val="tx1"/>
-          </a:fontRef>
-        </p:style>
-      </p:cxnSp>
-      <p:cxnSp>
-        <p:nvCxnSpPr>
-          <p:cNvPr id="171" name="直接连接符 170">
-            <a:extLst>
-              <a:ext uri="{FF2B5EF4-FFF2-40B4-BE49-F238E27FC236}">
-                <a16:creationId xmlns:a16="http://schemas.microsoft.com/office/drawing/2014/main" id="{EBD32F5E-5F79-EF3C-CAA1-F31129257642}"/>
-              </a:ext>
-            </a:extLst>
-          </p:cNvPr>
-          <p:cNvCxnSpPr>
-            <a:cxnSpLocks/>
-          </p:cNvCxnSpPr>
-          <p:nvPr/>
-        </p:nvCxnSpPr>
-        <p:spPr>
-          <a:xfrm>
-            <a:off x="10404266" y="5334551"/>
-            <a:ext cx="512231" cy="0"/>
-          </a:xfrm>
-          <a:prstGeom prst="line">
-            <a:avLst/>
-          </a:prstGeom>
-          <a:ln w="19050">
-            <a:solidFill>
-              <a:schemeClr val="tx1"/>
-            </a:solidFill>
-          </a:ln>
-        </p:spPr>
-        <p:style>
-          <a:lnRef idx="1">
-            <a:schemeClr val="accent1"/>
-          </a:lnRef>
-          <a:fillRef idx="0">
-            <a:schemeClr val="accent1"/>
-          </a:fillRef>
-          <a:effectRef idx="0">
-            <a:schemeClr val="accent1"/>
-          </a:effectRef>
-          <a:fontRef idx="minor">
-            <a:schemeClr val="tx1"/>
-          </a:fontRef>
-        </p:style>
-      </p:cxnSp>
-      <mc:AlternateContent xmlns:mc="http://schemas.openxmlformats.org/markup-compatibility/2006" xmlns:a14="http://schemas.microsoft.com/office/drawing/2010/main">
-        <mc:Choice Requires="a14">
+      <mc:AlternateContent xmlns:mc="http://schemas.openxmlformats.org/markup-compatibility/2006">
+        <mc:Choice xmlns:a14="http://schemas.microsoft.com/office/drawing/2010/main" Requires="a14">
           <p:sp>
             <p:nvSpPr>
               <p:cNvPr id="210" name="文本框 209">
@@ -8115,8 +7167,8 @@
             </p:nvSpPr>
             <p:spPr>
               <a:xfrm>
-                <a:off x="9298462" y="2460850"/>
-                <a:ext cx="962773" cy="369332"/>
+                <a:off x="8435997" y="2467746"/>
+                <a:ext cx="962773" cy="307777"/>
               </a:xfrm>
               <a:prstGeom prst="rect">
                 <a:avLst/>
@@ -8131,25 +7183,25 @@
               <a:p>
                 <a:pPr algn="ctr"/>
                 <a:r>
-                  <a:rPr lang="zh-CN" altLang="en-US" dirty="0"/>
+                  <a:rPr lang="zh-CN" altLang="en-US" sz="1400" dirty="0"/>
                   <a:t>波形 </a:t>
                 </a:r>
                 <a14:m>
                   <m:oMath xmlns:m="http://schemas.openxmlformats.org/officeDocument/2006/math">
                     <m:r>
-                      <a:rPr lang="en-US" altLang="zh-CN" i="1" dirty="0" smtClean="0">
+                      <a:rPr lang="en-US" altLang="zh-CN" sz="1400" b="1" i="1" dirty="0" smtClean="0">
                         <a:latin typeface="Cambria Math" panose="02040503050406030204" pitchFamily="18" charset="0"/>
                       </a:rPr>
-                      <m:t>𝑊</m:t>
+                      <m:t>𝑾</m:t>
                     </m:r>
                   </m:oMath>
                 </a14:m>
-                <a:endParaRPr lang="zh-CN" altLang="en-US" dirty="0"/>
+                <a:endParaRPr lang="zh-CN" altLang="en-US" sz="1400" b="1" dirty="0"/>
               </a:p>
             </p:txBody>
           </p:sp>
         </mc:Choice>
-        <mc:Fallback xmlns="">
+        <mc:Fallback>
           <p:sp>
             <p:nvSpPr>
               <p:cNvPr id="210" name="文本框 209">
@@ -8166,8 +7218,8 @@
             </p:nvSpPr>
             <p:spPr>
               <a:xfrm>
-                <a:off x="9298462" y="2460850"/>
-                <a:ext cx="962773" cy="369332"/>
+                <a:off x="8435997" y="2467746"/>
+                <a:ext cx="962773" cy="307777"/>
               </a:xfrm>
               <a:prstGeom prst="rect">
                 <a:avLst/>
@@ -8175,7 +7227,7 @@
               <a:blipFill>
                 <a:blip r:embed="rId3"/>
                 <a:stretch>
-                  <a:fillRect l="-3165" t="-10000" b="-26667"/>
+                  <a:fillRect t="-4000" b="-20000"/>
                 </a:stretch>
               </a:blipFill>
             </p:spPr>
@@ -8203,13 +7255,15 @@
               </a:ext>
             </a:extLst>
           </p:cNvPr>
-          <p:cNvCxnSpPr/>
+          <p:cNvCxnSpPr>
+            <a:cxnSpLocks/>
+          </p:cNvCxnSpPr>
           <p:nvPr/>
         </p:nvCxnSpPr>
         <p:spPr>
-          <a:xfrm>
-            <a:off x="7973896" y="1765724"/>
-            <a:ext cx="535957" cy="0"/>
+          <a:xfrm flipV="1">
+            <a:off x="7701826" y="1836645"/>
+            <a:ext cx="247522" cy="5925"/>
           </a:xfrm>
           <a:prstGeom prst="straightConnector1">
             <a:avLst/>
@@ -8245,13 +7299,15 @@
               </a:ext>
             </a:extLst>
           </p:cNvPr>
-          <p:cNvCxnSpPr/>
+          <p:cNvCxnSpPr>
+            <a:cxnSpLocks/>
+          </p:cNvCxnSpPr>
           <p:nvPr/>
         </p:nvCxnSpPr>
         <p:spPr>
           <a:xfrm>
-            <a:off x="7973896" y="4910548"/>
-            <a:ext cx="535957" cy="0"/>
+            <a:off x="7701826" y="4981469"/>
+            <a:ext cx="265933" cy="0"/>
           </a:xfrm>
           <a:prstGeom prst="straightConnector1">
             <a:avLst/>
@@ -8278,8 +7334,8 @@
           </a:fontRef>
         </p:style>
       </p:cxnSp>
-      <mc:AlternateContent xmlns:mc="http://schemas.openxmlformats.org/markup-compatibility/2006" xmlns:a14="http://schemas.microsoft.com/office/drawing/2010/main">
-        <mc:Choice Requires="a14">
+      <mc:AlternateContent xmlns:mc="http://schemas.openxmlformats.org/markup-compatibility/2006">
+        <mc:Choice xmlns:a14="http://schemas.microsoft.com/office/drawing/2010/main" Requires="a14">
           <p:sp>
             <p:nvSpPr>
               <p:cNvPr id="214" name="文本框 213">
@@ -8294,8 +7350,8 @@
             </p:nvSpPr>
             <p:spPr>
               <a:xfrm>
-                <a:off x="541864" y="1616034"/>
-                <a:ext cx="729404" cy="461665"/>
+                <a:off x="3954941" y="527969"/>
+                <a:ext cx="729404" cy="507832"/>
               </a:xfrm>
               <a:prstGeom prst="rect">
                 <a:avLst/>
@@ -8329,7 +7385,7 @@
             </p:txBody>
           </p:sp>
         </mc:Choice>
-        <mc:Fallback xmlns="">
+        <mc:Fallback>
           <p:sp>
             <p:nvSpPr>
               <p:cNvPr id="214" name="文本框 213">
@@ -8346,8 +7402,8 @@
             </p:nvSpPr>
             <p:spPr>
               <a:xfrm>
-                <a:off x="541864" y="1616034"/>
-                <a:ext cx="729404" cy="461665"/>
+                <a:off x="3954941" y="527969"/>
+                <a:ext cx="729404" cy="507832"/>
               </a:xfrm>
               <a:prstGeom prst="rect">
                 <a:avLst/>
@@ -8374,8 +7430,8 @@
           </p:sp>
         </mc:Fallback>
       </mc:AlternateContent>
-      <mc:AlternateContent xmlns:mc="http://schemas.openxmlformats.org/markup-compatibility/2006" xmlns:a14="http://schemas.microsoft.com/office/drawing/2010/main">
-        <mc:Choice Requires="a14">
+      <mc:AlternateContent xmlns:mc="http://schemas.openxmlformats.org/markup-compatibility/2006">
+        <mc:Choice xmlns:a14="http://schemas.microsoft.com/office/drawing/2010/main" Requires="a14">
           <p:sp>
             <p:nvSpPr>
               <p:cNvPr id="215" name="文本框 214">
@@ -8390,7 +7446,7 @@
             </p:nvSpPr>
             <p:spPr>
               <a:xfrm>
-                <a:off x="572242" y="4742963"/>
+                <a:off x="3930873" y="3441700"/>
                 <a:ext cx="729404" cy="461665"/>
               </a:xfrm>
               <a:prstGeom prst="rect">
@@ -8431,7 +7487,7 @@
             </p:txBody>
           </p:sp>
         </mc:Choice>
-        <mc:Fallback xmlns="">
+        <mc:Fallback>
           <p:sp>
             <p:nvSpPr>
               <p:cNvPr id="215" name="文本框 214">
@@ -8448,7 +7504,7 @@
             </p:nvSpPr>
             <p:spPr>
               <a:xfrm>
-                <a:off x="572242" y="4742963"/>
+                <a:off x="3930873" y="3441700"/>
                 <a:ext cx="729404" cy="461665"/>
               </a:xfrm>
               <a:prstGeom prst="rect">
@@ -8490,8 +7546,8 @@
         </p:nvSpPr>
         <p:spPr>
           <a:xfrm>
-            <a:off x="1156046" y="6246437"/>
-            <a:ext cx="2738584" cy="369332"/>
+            <a:off x="3170917" y="5857286"/>
+            <a:ext cx="2161633" cy="307777"/>
           </a:xfrm>
           <a:prstGeom prst="rect">
             <a:avLst/>
@@ -8506,14 +7562,14 @@
           <a:p>
             <a:pPr algn="ctr"/>
             <a:r>
-              <a:rPr lang="zh-CN" altLang="en-US" dirty="0"/>
+              <a:rPr lang="zh-CN" altLang="en-US" sz="1400" dirty="0"/>
               <a:t>微架构状态设置程序变体</a:t>
             </a:r>
           </a:p>
         </p:txBody>
       </p:sp>
-      <mc:AlternateContent xmlns:mc="http://schemas.openxmlformats.org/markup-compatibility/2006" xmlns:a14="http://schemas.microsoft.com/office/drawing/2010/main">
-        <mc:Choice Requires="a14">
+      <mc:AlternateContent xmlns:mc="http://schemas.openxmlformats.org/markup-compatibility/2006">
+        <mc:Choice xmlns:a14="http://schemas.microsoft.com/office/drawing/2010/main" Requires="a14">
           <p:sp>
             <p:nvSpPr>
               <p:cNvPr id="217" name="文本框 216">
@@ -8528,8 +7584,8 @@
             </p:nvSpPr>
             <p:spPr>
               <a:xfrm>
-                <a:off x="9259149" y="5586165"/>
-                <a:ext cx="1041400" cy="369332"/>
+                <a:off x="8487206" y="5645836"/>
+                <a:ext cx="1041400" cy="307777"/>
               </a:xfrm>
               <a:prstGeom prst="rect">
                 <a:avLst/>
@@ -8544,31 +7600,31 @@
               <a:p>
                 <a:pPr algn="ctr"/>
                 <a:r>
-                  <a:rPr lang="zh-CN" altLang="en-US" dirty="0"/>
+                  <a:rPr lang="zh-CN" altLang="en-US" sz="1400" dirty="0"/>
                   <a:t>波形 </a:t>
                 </a:r>
                 <a14:m>
                   <m:oMath xmlns:m="http://schemas.openxmlformats.org/officeDocument/2006/math">
                     <m:r>
-                      <a:rPr lang="en-US" altLang="zh-CN" i="1" dirty="0" smtClean="0">
+                      <a:rPr lang="en-US" altLang="zh-CN" sz="1400" b="1" i="1" dirty="0" smtClean="0">
                         <a:latin typeface="Cambria Math" panose="02040503050406030204" pitchFamily="18" charset="0"/>
                       </a:rPr>
-                      <m:t>𝑊</m:t>
+                      <m:t>𝑾</m:t>
                     </m:r>
                     <m:r>
-                      <a:rPr lang="en-US" altLang="zh-CN" b="0" i="1" dirty="0" smtClean="0">
+                      <a:rPr lang="en-US" altLang="zh-CN" sz="1400" b="1" i="1" dirty="0" smtClean="0">
                         <a:latin typeface="Cambria Math" panose="02040503050406030204" pitchFamily="18" charset="0"/>
                       </a:rPr>
                       <m:t>′</m:t>
                     </m:r>
                   </m:oMath>
                 </a14:m>
-                <a:endParaRPr lang="zh-CN" altLang="en-US" dirty="0"/>
+                <a:endParaRPr lang="zh-CN" altLang="en-US" sz="1400" b="1" dirty="0"/>
               </a:p>
             </p:txBody>
           </p:sp>
         </mc:Choice>
-        <mc:Fallback xmlns="">
+        <mc:Fallback>
           <p:sp>
             <p:nvSpPr>
               <p:cNvPr id="217" name="文本框 216">
@@ -8585,8 +7641,8 @@
             </p:nvSpPr>
             <p:spPr>
               <a:xfrm>
-                <a:off x="9259149" y="5586165"/>
-                <a:ext cx="1041400" cy="369332"/>
+                <a:off x="8487206" y="5645836"/>
+                <a:ext cx="1041400" cy="307777"/>
               </a:xfrm>
               <a:prstGeom prst="rect">
                 <a:avLst/>
@@ -8594,7 +7650,7 @@
               <a:blipFill>
                 <a:blip r:embed="rId6"/>
                 <a:stretch>
-                  <a:fillRect l="-2339" t="-8197" b="-24590"/>
+                  <a:fillRect t="-3922" b="-19608"/>
                 </a:stretch>
               </a:blipFill>
             </p:spPr>
@@ -8627,8 +7683,8 @@
         </p:nvSpPr>
         <p:spPr>
           <a:xfrm>
-            <a:off x="1361628" y="3691893"/>
-            <a:ext cx="2301342" cy="2554545"/>
+            <a:off x="3381768" y="3944179"/>
+            <a:ext cx="1789925" cy="1892826"/>
           </a:xfrm>
           <a:prstGeom prst="rect">
             <a:avLst/>
@@ -8642,7 +7698,7 @@
           <a:lstStyle/>
           <a:p>
             <a:r>
-              <a:rPr lang="en-US" altLang="zh-CN" sz="1600" b="1" dirty="0">
+              <a:rPr lang="en-US" altLang="zh-CN" sz="1300" b="1" dirty="0">
                 <a:latin typeface="Cascadia Code Light" panose="020B0609020000020004" pitchFamily="49" charset="0"/>
                 <a:ea typeface="Cascadia Code Light" panose="020B0609020000020004" pitchFamily="49" charset="0"/>
                 <a:cs typeface="Cascadia Code Light" panose="020B0609020000020004" pitchFamily="49" charset="0"/>
@@ -8652,7 +7708,7 @@
           </a:p>
           <a:p>
             <a:r>
-              <a:rPr lang="en-US" altLang="zh-CN" sz="1600" dirty="0">
+              <a:rPr lang="en-US" altLang="zh-CN" sz="1300" dirty="0">
                 <a:latin typeface="Cascadia Code Light" panose="020B0609020000020004" pitchFamily="49" charset="0"/>
                 <a:ea typeface="Cascadia Code Light" panose="020B0609020000020004" pitchFamily="49" charset="0"/>
                 <a:cs typeface="Cascadia Code Light" panose="020B0609020000020004" pitchFamily="49" charset="0"/>
@@ -8660,7 +7716,7 @@
               <a:t>  </a:t>
             </a:r>
             <a:r>
-              <a:rPr lang="en-US" altLang="zh-CN" sz="1600" dirty="0" err="1">
+              <a:rPr lang="en-US" altLang="zh-CN" sz="1300" dirty="0" err="1">
                 <a:latin typeface="Cascadia Code Light" panose="020B0609020000020004" pitchFamily="49" charset="0"/>
                 <a:ea typeface="Cascadia Code Light" panose="020B0609020000020004" pitchFamily="49" charset="0"/>
                 <a:cs typeface="Cascadia Code Light" panose="020B0609020000020004" pitchFamily="49" charset="0"/>
@@ -8668,17 +7724,17 @@
               <a:t>addi</a:t>
             </a:r>
             <a:r>
-              <a:rPr lang="en-US" altLang="zh-CN" sz="1600" dirty="0">
+              <a:rPr lang="en-US" altLang="zh-CN" sz="1300" dirty="0">
                 <a:latin typeface="Cascadia Code Light" panose="020B0609020000020004" pitchFamily="49" charset="0"/>
                 <a:ea typeface="Cascadia Code Light" panose="020B0609020000020004" pitchFamily="49" charset="0"/>
                 <a:cs typeface="Cascadia Code Light" panose="020B0609020000020004" pitchFamily="49" charset="0"/>
               </a:rPr>
-              <a:t> t0, t0, 1</a:t>
+              <a:t> t0,t0,1</a:t>
             </a:r>
           </a:p>
           <a:p>
             <a:r>
-              <a:rPr lang="en-US" altLang="zh-CN" sz="1600" dirty="0">
+              <a:rPr lang="en-US" altLang="zh-CN" sz="1300" dirty="0">
                 <a:latin typeface="Cascadia Code Light" panose="020B0609020000020004" pitchFamily="49" charset="0"/>
                 <a:ea typeface="Cascadia Code Light" panose="020B0609020000020004" pitchFamily="49" charset="0"/>
                 <a:cs typeface="Cascadia Code Light" panose="020B0609020000020004" pitchFamily="49" charset="0"/>
@@ -8686,7 +7742,7 @@
               <a:t>  </a:t>
             </a:r>
             <a:r>
-              <a:rPr lang="en-US" altLang="zh-CN" sz="1600" dirty="0" err="1">
+              <a:rPr lang="en-US" altLang="zh-CN" sz="1300" dirty="0" err="1">
                 <a:latin typeface="Cascadia Code Light" panose="020B0609020000020004" pitchFamily="49" charset="0"/>
                 <a:ea typeface="Cascadia Code Light" panose="020B0609020000020004" pitchFamily="49" charset="0"/>
                 <a:cs typeface="Cascadia Code Light" panose="020B0609020000020004" pitchFamily="49" charset="0"/>
@@ -8694,17 +7750,17 @@
               <a:t>fdiv</a:t>
             </a:r>
             <a:r>
-              <a:rPr lang="en-US" altLang="zh-CN" sz="1600" dirty="0">
+              <a:rPr lang="en-US" altLang="zh-CN" sz="1300" dirty="0">
                 <a:latin typeface="Cascadia Code Light" panose="020B0609020000020004" pitchFamily="49" charset="0"/>
                 <a:ea typeface="Cascadia Code Light" panose="020B0609020000020004" pitchFamily="49" charset="0"/>
                 <a:cs typeface="Cascadia Code Light" panose="020B0609020000020004" pitchFamily="49" charset="0"/>
               </a:rPr>
-              <a:t> a0, a4, a5</a:t>
+              <a:t> a0,a4,a5</a:t>
             </a:r>
           </a:p>
           <a:p>
             <a:r>
-              <a:rPr lang="en-US" altLang="zh-CN" sz="1600" dirty="0">
+              <a:rPr lang="en-US" altLang="zh-CN" sz="1300" dirty="0">
                 <a:latin typeface="Cascadia Code Light" panose="020B0609020000020004" pitchFamily="49" charset="0"/>
                 <a:ea typeface="Cascadia Code Light" panose="020B0609020000020004" pitchFamily="49" charset="0"/>
                 <a:cs typeface="Cascadia Code Light" panose="020B0609020000020004" pitchFamily="49" charset="0"/>
@@ -8714,7 +7770,7 @@
           </a:p>
           <a:p>
             <a:r>
-              <a:rPr lang="en-US" altLang="zh-CN" sz="1600" dirty="0">
+              <a:rPr lang="en-US" altLang="zh-CN" sz="1300" dirty="0">
                 <a:latin typeface="Cascadia Code Light" panose="020B0609020000020004" pitchFamily="49" charset="0"/>
                 <a:ea typeface="Cascadia Code Light" panose="020B0609020000020004" pitchFamily="49" charset="0"/>
                 <a:cs typeface="Cascadia Code Light" panose="020B0609020000020004" pitchFamily="49" charset="0"/>
@@ -8722,14 +7778,14 @@
               <a:t>  j </a:t>
             </a:r>
             <a:r>
-              <a:rPr lang="en-US" altLang="zh-CN" sz="1600" dirty="0" err="1">
+              <a:rPr lang="en-US" altLang="zh-CN" sz="1300" dirty="0" err="1">
                 <a:latin typeface="Cascadia Code Light" panose="020B0609020000020004" pitchFamily="49" charset="0"/>
                 <a:ea typeface="Cascadia Code Light" panose="020B0609020000020004" pitchFamily="49" charset="0"/>
                 <a:cs typeface="Cascadia Code Light" panose="020B0609020000020004" pitchFamily="49" charset="0"/>
               </a:rPr>
               <a:t>formal_entry</a:t>
             </a:r>
-            <a:endParaRPr lang="en-US" altLang="zh-CN" sz="1600" dirty="0">
+            <a:endParaRPr lang="en-US" altLang="zh-CN" sz="1300" dirty="0">
               <a:latin typeface="Cascadia Code Light" panose="020B0609020000020004" pitchFamily="49" charset="0"/>
               <a:ea typeface="Cascadia Code Light" panose="020B0609020000020004" pitchFamily="49" charset="0"/>
               <a:cs typeface="Cascadia Code Light" panose="020B0609020000020004" pitchFamily="49" charset="0"/>
@@ -8737,17 +7793,17 @@
           </a:p>
           <a:p>
             <a:r>
-              <a:rPr lang="en-US" altLang="zh-CN" sz="1600" b="1" dirty="0">
+              <a:rPr lang="en-US" altLang="zh-CN" sz="1300" b="1" dirty="0">
                 <a:latin typeface="Cascadia Code Light" panose="020B0609020000020004" pitchFamily="49" charset="0"/>
                 <a:ea typeface="Cascadia Code Light" panose="020B0609020000020004" pitchFamily="49" charset="0"/>
                 <a:cs typeface="Cascadia Code Light" panose="020B0609020000020004" pitchFamily="49" charset="0"/>
               </a:rPr>
-              <a:t>data:</a:t>
+              <a:t>secret:</a:t>
             </a:r>
           </a:p>
           <a:p>
             <a:r>
-              <a:rPr lang="en-US" altLang="zh-CN" sz="1600" b="1" dirty="0">
+              <a:rPr lang="en-US" altLang="zh-CN" sz="1300" b="1" dirty="0">
                 <a:latin typeface="Cascadia Code Light" panose="020B0609020000020004" pitchFamily="49" charset="0"/>
                 <a:ea typeface="Cascadia Code Light" panose="020B0609020000020004" pitchFamily="49" charset="0"/>
                 <a:cs typeface="Cascadia Code Light" panose="020B0609020000020004" pitchFamily="49" charset="0"/>
@@ -8755,51 +7811,15 @@
               <a:t>  </a:t>
             </a:r>
             <a:r>
-              <a:rPr lang="en-US" altLang="zh-CN" sz="1600" dirty="0">
+              <a:rPr lang="en-US" altLang="zh-CN" sz="1300" dirty="0">
                 <a:latin typeface="Cascadia Code Light" panose="020B0609020000020004" pitchFamily="49" charset="0"/>
                 <a:ea typeface="Cascadia Code Light" panose="020B0609020000020004" pitchFamily="49" charset="0"/>
                 <a:cs typeface="Cascadia Code Light" panose="020B0609020000020004" pitchFamily="49" charset="0"/>
               </a:rPr>
-              <a:t>...</a:t>
-            </a:r>
-          </a:p>
-          <a:p>
-            <a:r>
-              <a:rPr lang="en-US" altLang="zh-CN" sz="1600" b="1" dirty="0">
-                <a:latin typeface="Cascadia Code Light" panose="020B0609020000020004" pitchFamily="49" charset="0"/>
-                <a:ea typeface="Cascadia Code Light" panose="020B0609020000020004" pitchFamily="49" charset="0"/>
-                <a:cs typeface="Cascadia Code Light" panose="020B0609020000020004" pitchFamily="49" charset="0"/>
-              </a:rPr>
-              <a:t>secret:</a:t>
-            </a:r>
-          </a:p>
-          <a:p>
-            <a:r>
-              <a:rPr lang="en-US" altLang="zh-CN" sz="1600" b="1" dirty="0">
-                <a:latin typeface="Cascadia Code Light" panose="020B0609020000020004" pitchFamily="49" charset="0"/>
-                <a:ea typeface="Cascadia Code Light" panose="020B0609020000020004" pitchFamily="49" charset="0"/>
-                <a:cs typeface="Cascadia Code Light" panose="020B0609020000020004" pitchFamily="49" charset="0"/>
-              </a:rPr>
-              <a:t>  </a:t>
+              <a:t>.byte </a:t>
             </a:r>
             <a:r>
-              <a:rPr lang="en-US" altLang="zh-CN" sz="1600" dirty="0">
-                <a:latin typeface="Cascadia Code Light" panose="020B0609020000020004" pitchFamily="49" charset="0"/>
-                <a:ea typeface="Cascadia Code Light" panose="020B0609020000020004" pitchFamily="49" charset="0"/>
-                <a:cs typeface="Cascadia Code Light" panose="020B0609020000020004" pitchFamily="49" charset="0"/>
-              </a:rPr>
-              <a:t>.</a:t>
-            </a:r>
-            <a:r>
-              <a:rPr lang="en-US" altLang="zh-CN" sz="1600">
-                <a:latin typeface="Cascadia Code Light" panose="020B0609020000020004" pitchFamily="49" charset="0"/>
-                <a:ea typeface="Cascadia Code Light" panose="020B0609020000020004" pitchFamily="49" charset="0"/>
-                <a:cs typeface="Cascadia Code Light" panose="020B0609020000020004" pitchFamily="49" charset="0"/>
-              </a:rPr>
-              <a:t>byte </a:t>
-            </a:r>
-            <a:r>
-              <a:rPr lang="en-US" altLang="zh-CN" sz="1600" b="1">
+              <a:rPr lang="en-US" altLang="zh-CN" sz="1300" b="1" dirty="0">
                 <a:solidFill>
                   <a:srgbClr val="FF0000"/>
                 </a:solidFill>
@@ -8809,7 +7829,9 @@
               </a:rPr>
               <a:t>0x1</a:t>
             </a:r>
-            <a:endParaRPr lang="en-US" altLang="zh-CN" sz="1600" b="1" dirty="0">
+          </a:p>
+          <a:p>
+            <a:endParaRPr lang="en-US" altLang="zh-CN" sz="1300" b="1" dirty="0">
               <a:solidFill>
                 <a:srgbClr val="FF0000"/>
               </a:solidFill>
@@ -8820,7 +7842,7 @@
           </a:p>
           <a:p>
             <a:r>
-              <a:rPr lang="en-US" altLang="zh-CN" sz="1600" b="1" dirty="0" err="1">
+              <a:rPr lang="en-US" altLang="zh-CN" sz="1300" b="1" dirty="0" err="1">
                 <a:latin typeface="Cascadia Code Light" panose="020B0609020000020004" pitchFamily="49" charset="0"/>
                 <a:ea typeface="Cascadia Code Light" panose="020B0609020000020004" pitchFamily="49" charset="0"/>
                 <a:cs typeface="Cascadia Code Light" panose="020B0609020000020004" pitchFamily="49" charset="0"/>
@@ -8828,20 +7850,4008 @@
               <a:t>formal_entry</a:t>
             </a:r>
             <a:r>
-              <a:rPr lang="en-US" altLang="zh-CN" sz="1600" b="1" dirty="0">
+              <a:rPr lang="en-US" altLang="zh-CN" sz="1300" b="1" dirty="0">
                 <a:latin typeface="Cascadia Code Light" panose="020B0609020000020004" pitchFamily="49" charset="0"/>
                 <a:ea typeface="Cascadia Code Light" panose="020B0609020000020004" pitchFamily="49" charset="0"/>
                 <a:cs typeface="Cascadia Code Light" panose="020B0609020000020004" pitchFamily="49" charset="0"/>
               </a:rPr>
               <a:t>:</a:t>
             </a:r>
-            <a:endParaRPr lang="zh-CN" altLang="en-US" sz="1600" b="1" dirty="0">
+            <a:endParaRPr lang="zh-CN" altLang="en-US" sz="1300" b="1" dirty="0">
               <a:latin typeface="Cascadia Code Light" panose="020B0609020000020004" pitchFamily="49" charset="0"/>
               <a:cs typeface="Cascadia Code Light" panose="020B0609020000020004" pitchFamily="49" charset="0"/>
             </a:endParaRPr>
           </a:p>
         </p:txBody>
       </p:sp>
+      <p:pic>
+        <p:nvPicPr>
+          <p:cNvPr id="1042" name="Picture 18" descr="数据库免抠元素_数据库_模板免费下载_svg格式_512像素_编号54245681-千图网">
+            <a:extLst>
+              <a:ext uri="{FF2B5EF4-FFF2-40B4-BE49-F238E27FC236}">
+                <a16:creationId xmlns:a16="http://schemas.microsoft.com/office/drawing/2014/main" id="{499DA764-375D-1E2C-4755-275D61CF3547}"/>
+              </a:ext>
+            </a:extLst>
+          </p:cNvPr>
+          <p:cNvPicPr>
+            <a:picLocks noChangeAspect="1" noChangeArrowheads="1"/>
+          </p:cNvPicPr>
+          <p:nvPr/>
+        </p:nvPicPr>
+        <p:blipFill>
+          <a:blip r:embed="rId7">
+            <a:extLst>
+              <a:ext uri="{28A0092B-C50C-407E-A947-70E740481C1C}">
+                <a14:useLocalDpi xmlns:a14="http://schemas.microsoft.com/office/drawing/2010/main" val="0"/>
+              </a:ext>
+            </a:extLst>
+          </a:blip>
+          <a:srcRect/>
+          <a:stretch>
+            <a:fillRect/>
+          </a:stretch>
+        </p:blipFill>
+        <p:spPr bwMode="auto">
+          <a:xfrm>
+            <a:off x="1830912" y="2849433"/>
+            <a:ext cx="1000477" cy="1000477"/>
+          </a:xfrm>
+          <a:prstGeom prst="rect">
+            <a:avLst/>
+          </a:prstGeom>
+          <a:noFill/>
+          <a:extLst>
+            <a:ext uri="{909E8E84-426E-40DD-AFC4-6F175D3DCCD1}">
+              <a14:hiddenFill xmlns:a14="http://schemas.microsoft.com/office/drawing/2010/main">
+                <a:solidFill>
+                  <a:srgbClr val="FFFFFF"/>
+                </a:solidFill>
+              </a14:hiddenFill>
+            </a:ext>
+          </a:extLst>
+        </p:spPr>
+      </p:pic>
+      <p:sp>
+        <p:nvSpPr>
+          <p:cNvPr id="47" name="矩形: 折角 46">
+            <a:extLst>
+              <a:ext uri="{FF2B5EF4-FFF2-40B4-BE49-F238E27FC236}">
+                <a16:creationId xmlns:a16="http://schemas.microsoft.com/office/drawing/2014/main" id="{E29D572D-B2D4-7B15-155D-3FC283575D31}"/>
+              </a:ext>
+            </a:extLst>
+          </p:cNvPr>
+          <p:cNvSpPr/>
+          <p:nvPr/>
+        </p:nvSpPr>
+        <p:spPr>
+          <a:xfrm>
+            <a:off x="3386572" y="919269"/>
+            <a:ext cx="1712623" cy="1928409"/>
+          </a:xfrm>
+          <a:prstGeom prst="foldedCorner">
+            <a:avLst/>
+          </a:prstGeom>
+          <a:solidFill>
+            <a:schemeClr val="accent4">
+              <a:lumMod val="20000"/>
+              <a:lumOff val="80000"/>
+            </a:schemeClr>
+          </a:solidFill>
+          <a:ln w="28575">
+            <a:solidFill>
+              <a:schemeClr val="tx1"/>
+            </a:solidFill>
+          </a:ln>
+        </p:spPr>
+        <p:style>
+          <a:lnRef idx="2">
+            <a:schemeClr val="accent1">
+              <a:shade val="15000"/>
+            </a:schemeClr>
+          </a:lnRef>
+          <a:fillRef idx="1">
+            <a:schemeClr val="accent1"/>
+          </a:fillRef>
+          <a:effectRef idx="0">
+            <a:schemeClr val="accent1"/>
+          </a:effectRef>
+          <a:fontRef idx="minor">
+            <a:schemeClr val="lt1"/>
+          </a:fontRef>
+        </p:style>
+        <p:txBody>
+          <a:bodyPr rtlCol="0" anchor="ctr"/>
+          <a:lstStyle/>
+          <a:p>
+            <a:pPr algn="ctr"/>
+            <a:endParaRPr lang="zh-CN" altLang="en-US" dirty="0"/>
+          </a:p>
+        </p:txBody>
+      </p:sp>
+      <p:sp>
+        <p:nvSpPr>
+          <p:cNvPr id="62" name="文本框 61">
+            <a:extLst>
+              <a:ext uri="{FF2B5EF4-FFF2-40B4-BE49-F238E27FC236}">
+                <a16:creationId xmlns:a16="http://schemas.microsoft.com/office/drawing/2014/main" id="{18775523-C7BA-9900-1938-F4126FDA4ED0}"/>
+              </a:ext>
+            </a:extLst>
+          </p:cNvPr>
+          <p:cNvSpPr txBox="1"/>
+          <p:nvPr/>
+        </p:nvSpPr>
+        <p:spPr>
+          <a:xfrm>
+            <a:off x="3365355" y="915523"/>
+            <a:ext cx="1789050" cy="1892826"/>
+          </a:xfrm>
+          <a:prstGeom prst="rect">
+            <a:avLst/>
+          </a:prstGeom>
+          <a:noFill/>
+        </p:spPr>
+        <p:txBody>
+          <a:bodyPr wrap="square" rtlCol="0">
+            <a:spAutoFit/>
+          </a:bodyPr>
+          <a:lstStyle/>
+          <a:p>
+            <a:r>
+              <a:rPr lang="en-US" altLang="zh-CN" sz="1300" b="1" dirty="0">
+                <a:latin typeface="Cascadia Code Light" panose="020B0609020000020004" pitchFamily="49" charset="0"/>
+                <a:ea typeface="Cascadia Code Light" panose="020B0609020000020004" pitchFamily="49" charset="0"/>
+                <a:cs typeface="Cascadia Code Light" panose="020B0609020000020004" pitchFamily="49" charset="0"/>
+              </a:rPr>
+              <a:t>text:</a:t>
+            </a:r>
+          </a:p>
+          <a:p>
+            <a:r>
+              <a:rPr lang="en-US" altLang="zh-CN" sz="1300" dirty="0">
+                <a:latin typeface="Cascadia Code Light" panose="020B0609020000020004" pitchFamily="49" charset="0"/>
+                <a:ea typeface="Cascadia Code Light" panose="020B0609020000020004" pitchFamily="49" charset="0"/>
+                <a:cs typeface="Cascadia Code Light" panose="020B0609020000020004" pitchFamily="49" charset="0"/>
+              </a:rPr>
+              <a:t>  </a:t>
+            </a:r>
+            <a:r>
+              <a:rPr lang="en-US" altLang="zh-CN" sz="1300" dirty="0" err="1">
+                <a:latin typeface="Cascadia Code Light" panose="020B0609020000020004" pitchFamily="49" charset="0"/>
+                <a:ea typeface="Cascadia Code Light" panose="020B0609020000020004" pitchFamily="49" charset="0"/>
+                <a:cs typeface="Cascadia Code Light" panose="020B0609020000020004" pitchFamily="49" charset="0"/>
+              </a:rPr>
+              <a:t>addi</a:t>
+            </a:r>
+            <a:r>
+              <a:rPr lang="en-US" altLang="zh-CN" sz="1300" dirty="0">
+                <a:latin typeface="Cascadia Code Light" panose="020B0609020000020004" pitchFamily="49" charset="0"/>
+                <a:ea typeface="Cascadia Code Light" panose="020B0609020000020004" pitchFamily="49" charset="0"/>
+                <a:cs typeface="Cascadia Code Light" panose="020B0609020000020004" pitchFamily="49" charset="0"/>
+              </a:rPr>
+              <a:t> t0,t0,1</a:t>
+            </a:r>
+          </a:p>
+          <a:p>
+            <a:r>
+              <a:rPr lang="en-US" altLang="zh-CN" sz="1300" dirty="0">
+                <a:latin typeface="Cascadia Code Light" panose="020B0609020000020004" pitchFamily="49" charset="0"/>
+                <a:ea typeface="Cascadia Code Light" panose="020B0609020000020004" pitchFamily="49" charset="0"/>
+                <a:cs typeface="Cascadia Code Light" panose="020B0609020000020004" pitchFamily="49" charset="0"/>
+              </a:rPr>
+              <a:t>  </a:t>
+            </a:r>
+            <a:r>
+              <a:rPr lang="en-US" altLang="zh-CN" sz="1300" dirty="0" err="1">
+                <a:latin typeface="Cascadia Code Light" panose="020B0609020000020004" pitchFamily="49" charset="0"/>
+                <a:ea typeface="Cascadia Code Light" panose="020B0609020000020004" pitchFamily="49" charset="0"/>
+                <a:cs typeface="Cascadia Code Light" panose="020B0609020000020004" pitchFamily="49" charset="0"/>
+              </a:rPr>
+              <a:t>fdiv</a:t>
+            </a:r>
+            <a:r>
+              <a:rPr lang="en-US" altLang="zh-CN" sz="1300" dirty="0">
+                <a:latin typeface="Cascadia Code Light" panose="020B0609020000020004" pitchFamily="49" charset="0"/>
+                <a:ea typeface="Cascadia Code Light" panose="020B0609020000020004" pitchFamily="49" charset="0"/>
+                <a:cs typeface="Cascadia Code Light" panose="020B0609020000020004" pitchFamily="49" charset="0"/>
+              </a:rPr>
+              <a:t> a0,a4,a5</a:t>
+            </a:r>
+          </a:p>
+          <a:p>
+            <a:r>
+              <a:rPr lang="en-US" altLang="zh-CN" sz="1300" dirty="0">
+                <a:latin typeface="Cascadia Code Light" panose="020B0609020000020004" pitchFamily="49" charset="0"/>
+                <a:ea typeface="Cascadia Code Light" panose="020B0609020000020004" pitchFamily="49" charset="0"/>
+                <a:cs typeface="Cascadia Code Light" panose="020B0609020000020004" pitchFamily="49" charset="0"/>
+              </a:rPr>
+              <a:t>  ...</a:t>
+            </a:r>
+          </a:p>
+          <a:p>
+            <a:r>
+              <a:rPr lang="en-US" altLang="zh-CN" sz="1300" dirty="0">
+                <a:latin typeface="Cascadia Code Light" panose="020B0609020000020004" pitchFamily="49" charset="0"/>
+                <a:ea typeface="Cascadia Code Light" panose="020B0609020000020004" pitchFamily="49" charset="0"/>
+                <a:cs typeface="Cascadia Code Light" panose="020B0609020000020004" pitchFamily="49" charset="0"/>
+              </a:rPr>
+              <a:t>  j </a:t>
+            </a:r>
+            <a:r>
+              <a:rPr lang="en-US" altLang="zh-CN" sz="1300" dirty="0" err="1">
+                <a:latin typeface="Cascadia Code Light" panose="020B0609020000020004" pitchFamily="49" charset="0"/>
+                <a:ea typeface="Cascadia Code Light" panose="020B0609020000020004" pitchFamily="49" charset="0"/>
+                <a:cs typeface="Cascadia Code Light" panose="020B0609020000020004" pitchFamily="49" charset="0"/>
+              </a:rPr>
+              <a:t>formal_entry</a:t>
+            </a:r>
+            <a:endParaRPr lang="en-US" altLang="zh-CN" sz="1300" dirty="0">
+              <a:latin typeface="Cascadia Code Light" panose="020B0609020000020004" pitchFamily="49" charset="0"/>
+              <a:ea typeface="Cascadia Code Light" panose="020B0609020000020004" pitchFamily="49" charset="0"/>
+              <a:cs typeface="Cascadia Code Light" panose="020B0609020000020004" pitchFamily="49" charset="0"/>
+            </a:endParaRPr>
+          </a:p>
+          <a:p>
+            <a:r>
+              <a:rPr lang="en-US" altLang="zh-CN" sz="1300" b="1" dirty="0">
+                <a:latin typeface="Cascadia Code Light" panose="020B0609020000020004" pitchFamily="49" charset="0"/>
+                <a:ea typeface="Cascadia Code Light" panose="020B0609020000020004" pitchFamily="49" charset="0"/>
+                <a:cs typeface="Cascadia Code Light" panose="020B0609020000020004" pitchFamily="49" charset="0"/>
+              </a:rPr>
+              <a:t>secret:</a:t>
+            </a:r>
+          </a:p>
+          <a:p>
+            <a:r>
+              <a:rPr lang="en-US" altLang="zh-CN" sz="1300" b="1" dirty="0">
+                <a:latin typeface="Cascadia Code Light" panose="020B0609020000020004" pitchFamily="49" charset="0"/>
+                <a:ea typeface="Cascadia Code Light" panose="020B0609020000020004" pitchFamily="49" charset="0"/>
+                <a:cs typeface="Cascadia Code Light" panose="020B0609020000020004" pitchFamily="49" charset="0"/>
+              </a:rPr>
+              <a:t>  </a:t>
+            </a:r>
+            <a:r>
+              <a:rPr lang="en-US" altLang="zh-CN" sz="1300" dirty="0">
+                <a:latin typeface="Cascadia Code Light" panose="020B0609020000020004" pitchFamily="49" charset="0"/>
+                <a:ea typeface="Cascadia Code Light" panose="020B0609020000020004" pitchFamily="49" charset="0"/>
+                <a:cs typeface="Cascadia Code Light" panose="020B0609020000020004" pitchFamily="49" charset="0"/>
+              </a:rPr>
+              <a:t>.byte </a:t>
+            </a:r>
+            <a:r>
+              <a:rPr lang="en-US" altLang="zh-CN" sz="1300" b="1" dirty="0">
+                <a:solidFill>
+                  <a:srgbClr val="FF0000"/>
+                </a:solidFill>
+                <a:latin typeface="Cascadia Code Light" panose="020B0609020000020004" pitchFamily="49" charset="0"/>
+                <a:ea typeface="Cascadia Code Light" panose="020B0609020000020004" pitchFamily="49" charset="0"/>
+                <a:cs typeface="Cascadia Code Light" panose="020B0609020000020004" pitchFamily="49" charset="0"/>
+              </a:rPr>
+              <a:t>0x0</a:t>
+            </a:r>
+          </a:p>
+          <a:p>
+            <a:endParaRPr lang="en-US" altLang="zh-CN" sz="1300" b="1" dirty="0">
+              <a:solidFill>
+                <a:srgbClr val="FF0000"/>
+              </a:solidFill>
+              <a:latin typeface="Cascadia Code Light" panose="020B0609020000020004" pitchFamily="49" charset="0"/>
+              <a:ea typeface="Cascadia Code Light" panose="020B0609020000020004" pitchFamily="49" charset="0"/>
+              <a:cs typeface="Cascadia Code Light" panose="020B0609020000020004" pitchFamily="49" charset="0"/>
+            </a:endParaRPr>
+          </a:p>
+          <a:p>
+            <a:r>
+              <a:rPr lang="en-US" altLang="zh-CN" sz="1300" b="1" dirty="0" err="1">
+                <a:latin typeface="Cascadia Code Light" panose="020B0609020000020004" pitchFamily="49" charset="0"/>
+                <a:ea typeface="Cascadia Code Light" panose="020B0609020000020004" pitchFamily="49" charset="0"/>
+                <a:cs typeface="Cascadia Code Light" panose="020B0609020000020004" pitchFamily="49" charset="0"/>
+              </a:rPr>
+              <a:t>formal_entry</a:t>
+            </a:r>
+            <a:r>
+              <a:rPr lang="en-US" altLang="zh-CN" sz="1300" b="1" dirty="0">
+                <a:latin typeface="Cascadia Code Light" panose="020B0609020000020004" pitchFamily="49" charset="0"/>
+                <a:ea typeface="Cascadia Code Light" panose="020B0609020000020004" pitchFamily="49" charset="0"/>
+                <a:cs typeface="Cascadia Code Light" panose="020B0609020000020004" pitchFamily="49" charset="0"/>
+              </a:rPr>
+              <a:t>:</a:t>
+            </a:r>
+          </a:p>
+        </p:txBody>
+      </p:sp>
+      <p:sp>
+        <p:nvSpPr>
+          <p:cNvPr id="64" name="矩形: 折角 63">
+            <a:extLst>
+              <a:ext uri="{FF2B5EF4-FFF2-40B4-BE49-F238E27FC236}">
+                <a16:creationId xmlns:a16="http://schemas.microsoft.com/office/drawing/2014/main" id="{7FA44E77-0622-EBD0-5A55-D691913515D7}"/>
+              </a:ext>
+            </a:extLst>
+          </p:cNvPr>
+          <p:cNvSpPr/>
+          <p:nvPr/>
+        </p:nvSpPr>
+        <p:spPr>
+          <a:xfrm>
+            <a:off x="41088" y="767223"/>
+            <a:ext cx="590362" cy="693731"/>
+          </a:xfrm>
+          <a:prstGeom prst="foldedCorner">
+            <a:avLst>
+              <a:gd name="adj" fmla="val 26079"/>
+            </a:avLst>
+          </a:prstGeom>
+          <a:solidFill>
+            <a:schemeClr val="accent3">
+              <a:lumMod val="20000"/>
+              <a:lumOff val="80000"/>
+            </a:schemeClr>
+          </a:solidFill>
+          <a:ln w="28575">
+            <a:solidFill>
+              <a:schemeClr val="tx1"/>
+            </a:solidFill>
+          </a:ln>
+        </p:spPr>
+        <p:style>
+          <a:lnRef idx="2">
+            <a:schemeClr val="accent1">
+              <a:shade val="15000"/>
+            </a:schemeClr>
+          </a:lnRef>
+          <a:fillRef idx="1">
+            <a:schemeClr val="accent1"/>
+          </a:fillRef>
+          <a:effectRef idx="0">
+            <a:schemeClr val="accent1"/>
+          </a:effectRef>
+          <a:fontRef idx="minor">
+            <a:schemeClr val="lt1"/>
+          </a:fontRef>
+        </p:style>
+        <p:txBody>
+          <a:bodyPr rtlCol="0" anchor="ctr"/>
+          <a:lstStyle/>
+          <a:p>
+            <a:pPr algn="ctr"/>
+            <a:endParaRPr lang="zh-CN" altLang="en-US"/>
+          </a:p>
+        </p:txBody>
+      </p:sp>
+      <p:sp>
+        <p:nvSpPr>
+          <p:cNvPr id="66" name="矩形: 折角 65">
+            <a:extLst>
+              <a:ext uri="{FF2B5EF4-FFF2-40B4-BE49-F238E27FC236}">
+                <a16:creationId xmlns:a16="http://schemas.microsoft.com/office/drawing/2014/main" id="{8D81F980-1EEA-9F94-7489-19E5E9D84336}"/>
+              </a:ext>
+            </a:extLst>
+          </p:cNvPr>
+          <p:cNvSpPr/>
+          <p:nvPr/>
+        </p:nvSpPr>
+        <p:spPr>
+          <a:xfrm>
+            <a:off x="715153" y="767223"/>
+            <a:ext cx="590362" cy="693731"/>
+          </a:xfrm>
+          <a:prstGeom prst="foldedCorner">
+            <a:avLst>
+              <a:gd name="adj" fmla="val 26079"/>
+            </a:avLst>
+          </a:prstGeom>
+          <a:solidFill>
+            <a:schemeClr val="accent3">
+              <a:lumMod val="20000"/>
+              <a:lumOff val="80000"/>
+            </a:schemeClr>
+          </a:solidFill>
+          <a:ln w="28575">
+            <a:solidFill>
+              <a:schemeClr val="tx1"/>
+            </a:solidFill>
+          </a:ln>
+        </p:spPr>
+        <p:style>
+          <a:lnRef idx="2">
+            <a:schemeClr val="accent1">
+              <a:shade val="15000"/>
+            </a:schemeClr>
+          </a:lnRef>
+          <a:fillRef idx="1">
+            <a:schemeClr val="accent1"/>
+          </a:fillRef>
+          <a:effectRef idx="0">
+            <a:schemeClr val="accent1"/>
+          </a:effectRef>
+          <a:fontRef idx="minor">
+            <a:schemeClr val="lt1"/>
+          </a:fontRef>
+        </p:style>
+        <p:txBody>
+          <a:bodyPr rtlCol="0" anchor="ctr"/>
+          <a:lstStyle/>
+          <a:p>
+            <a:pPr algn="ctr"/>
+            <a:endParaRPr lang="zh-CN" altLang="en-US"/>
+          </a:p>
+        </p:txBody>
+      </p:sp>
+      <p:sp>
+        <p:nvSpPr>
+          <p:cNvPr id="78" name="矩形: 折角 77">
+            <a:extLst>
+              <a:ext uri="{FF2B5EF4-FFF2-40B4-BE49-F238E27FC236}">
+                <a16:creationId xmlns:a16="http://schemas.microsoft.com/office/drawing/2014/main" id="{44339624-D877-E3E9-8A0E-7423B1AEDA53}"/>
+              </a:ext>
+            </a:extLst>
+          </p:cNvPr>
+          <p:cNvSpPr/>
+          <p:nvPr/>
+        </p:nvSpPr>
+        <p:spPr>
+          <a:xfrm>
+            <a:off x="36009" y="1619884"/>
+            <a:ext cx="590362" cy="693731"/>
+          </a:xfrm>
+          <a:prstGeom prst="foldedCorner">
+            <a:avLst>
+              <a:gd name="adj" fmla="val 26079"/>
+            </a:avLst>
+          </a:prstGeom>
+          <a:solidFill>
+            <a:schemeClr val="accent3">
+              <a:lumMod val="20000"/>
+              <a:lumOff val="80000"/>
+            </a:schemeClr>
+          </a:solidFill>
+          <a:ln w="28575">
+            <a:solidFill>
+              <a:schemeClr val="tx1"/>
+            </a:solidFill>
+          </a:ln>
+        </p:spPr>
+        <p:style>
+          <a:lnRef idx="2">
+            <a:schemeClr val="accent1">
+              <a:shade val="15000"/>
+            </a:schemeClr>
+          </a:lnRef>
+          <a:fillRef idx="1">
+            <a:schemeClr val="accent1"/>
+          </a:fillRef>
+          <a:effectRef idx="0">
+            <a:schemeClr val="accent1"/>
+          </a:effectRef>
+          <a:fontRef idx="minor">
+            <a:schemeClr val="lt1"/>
+          </a:fontRef>
+        </p:style>
+        <p:txBody>
+          <a:bodyPr rtlCol="0" anchor="ctr"/>
+          <a:lstStyle/>
+          <a:p>
+            <a:pPr algn="ctr"/>
+            <a:endParaRPr lang="zh-CN" altLang="en-US"/>
+          </a:p>
+        </p:txBody>
+      </p:sp>
+      <p:sp>
+        <p:nvSpPr>
+          <p:cNvPr id="83" name="矩形: 折角 82">
+            <a:extLst>
+              <a:ext uri="{FF2B5EF4-FFF2-40B4-BE49-F238E27FC236}">
+                <a16:creationId xmlns:a16="http://schemas.microsoft.com/office/drawing/2014/main" id="{40CD70B9-8B45-6996-C199-886FE63B9C1C}"/>
+              </a:ext>
+            </a:extLst>
+          </p:cNvPr>
+          <p:cNvSpPr/>
+          <p:nvPr/>
+        </p:nvSpPr>
+        <p:spPr>
+          <a:xfrm>
+            <a:off x="710074" y="1619884"/>
+            <a:ext cx="590362" cy="693731"/>
+          </a:xfrm>
+          <a:prstGeom prst="foldedCorner">
+            <a:avLst>
+              <a:gd name="adj" fmla="val 26079"/>
+            </a:avLst>
+          </a:prstGeom>
+          <a:solidFill>
+            <a:schemeClr val="accent3">
+              <a:lumMod val="20000"/>
+              <a:lumOff val="80000"/>
+            </a:schemeClr>
+          </a:solidFill>
+          <a:ln w="28575">
+            <a:solidFill>
+              <a:schemeClr val="tx1"/>
+            </a:solidFill>
+          </a:ln>
+        </p:spPr>
+        <p:style>
+          <a:lnRef idx="2">
+            <a:schemeClr val="accent1">
+              <a:shade val="15000"/>
+            </a:schemeClr>
+          </a:lnRef>
+          <a:fillRef idx="1">
+            <a:schemeClr val="accent1"/>
+          </a:fillRef>
+          <a:effectRef idx="0">
+            <a:schemeClr val="accent1"/>
+          </a:effectRef>
+          <a:fontRef idx="minor">
+            <a:schemeClr val="lt1"/>
+          </a:fontRef>
+        </p:style>
+        <p:txBody>
+          <a:bodyPr rtlCol="0" anchor="ctr"/>
+          <a:lstStyle/>
+          <a:p>
+            <a:pPr algn="ctr"/>
+            <a:endParaRPr lang="zh-CN" altLang="en-US"/>
+          </a:p>
+        </p:txBody>
+      </p:sp>
+      <p:sp>
+        <p:nvSpPr>
+          <p:cNvPr id="84" name="矩形: 折角 83">
+            <a:extLst>
+              <a:ext uri="{FF2B5EF4-FFF2-40B4-BE49-F238E27FC236}">
+                <a16:creationId xmlns:a16="http://schemas.microsoft.com/office/drawing/2014/main" id="{E23E0BB6-587E-81E7-3420-D2534256DEA8}"/>
+              </a:ext>
+            </a:extLst>
+          </p:cNvPr>
+          <p:cNvSpPr/>
+          <p:nvPr/>
+        </p:nvSpPr>
+        <p:spPr>
+          <a:xfrm>
+            <a:off x="34951" y="3655014"/>
+            <a:ext cx="590362" cy="693731"/>
+          </a:xfrm>
+          <a:prstGeom prst="foldedCorner">
+            <a:avLst>
+              <a:gd name="adj" fmla="val 26079"/>
+            </a:avLst>
+          </a:prstGeom>
+          <a:solidFill>
+            <a:schemeClr val="accent3">
+              <a:lumMod val="20000"/>
+              <a:lumOff val="80000"/>
+            </a:schemeClr>
+          </a:solidFill>
+          <a:ln w="28575">
+            <a:solidFill>
+              <a:schemeClr val="tx1"/>
+            </a:solidFill>
+          </a:ln>
+        </p:spPr>
+        <p:style>
+          <a:lnRef idx="2">
+            <a:schemeClr val="accent1">
+              <a:shade val="15000"/>
+            </a:schemeClr>
+          </a:lnRef>
+          <a:fillRef idx="1">
+            <a:schemeClr val="accent1"/>
+          </a:fillRef>
+          <a:effectRef idx="0">
+            <a:schemeClr val="accent1"/>
+          </a:effectRef>
+          <a:fontRef idx="minor">
+            <a:schemeClr val="lt1"/>
+          </a:fontRef>
+        </p:style>
+        <p:txBody>
+          <a:bodyPr rtlCol="0" anchor="ctr"/>
+          <a:lstStyle/>
+          <a:p>
+            <a:pPr algn="ctr"/>
+            <a:endParaRPr lang="zh-CN" altLang="en-US"/>
+          </a:p>
+        </p:txBody>
+      </p:sp>
+      <p:sp>
+        <p:nvSpPr>
+          <p:cNvPr id="85" name="矩形: 折角 84">
+            <a:extLst>
+              <a:ext uri="{FF2B5EF4-FFF2-40B4-BE49-F238E27FC236}">
+                <a16:creationId xmlns:a16="http://schemas.microsoft.com/office/drawing/2014/main" id="{51310456-8F84-94D0-488D-18D500D9C3A8}"/>
+              </a:ext>
+            </a:extLst>
+          </p:cNvPr>
+          <p:cNvSpPr/>
+          <p:nvPr/>
+        </p:nvSpPr>
+        <p:spPr>
+          <a:xfrm>
+            <a:off x="709016" y="3655014"/>
+            <a:ext cx="590362" cy="693731"/>
+          </a:xfrm>
+          <a:prstGeom prst="foldedCorner">
+            <a:avLst>
+              <a:gd name="adj" fmla="val 26079"/>
+            </a:avLst>
+          </a:prstGeom>
+          <a:solidFill>
+            <a:schemeClr val="accent3">
+              <a:lumMod val="20000"/>
+              <a:lumOff val="80000"/>
+            </a:schemeClr>
+          </a:solidFill>
+          <a:ln w="28575">
+            <a:solidFill>
+              <a:schemeClr val="tx1"/>
+            </a:solidFill>
+          </a:ln>
+        </p:spPr>
+        <p:style>
+          <a:lnRef idx="2">
+            <a:schemeClr val="accent1">
+              <a:shade val="15000"/>
+            </a:schemeClr>
+          </a:lnRef>
+          <a:fillRef idx="1">
+            <a:schemeClr val="accent1"/>
+          </a:fillRef>
+          <a:effectRef idx="0">
+            <a:schemeClr val="accent1"/>
+          </a:effectRef>
+          <a:fontRef idx="minor">
+            <a:schemeClr val="lt1"/>
+          </a:fontRef>
+        </p:style>
+        <p:txBody>
+          <a:bodyPr rtlCol="0" anchor="ctr"/>
+          <a:lstStyle/>
+          <a:p>
+            <a:pPr algn="ctr"/>
+            <a:endParaRPr lang="zh-CN" altLang="en-US"/>
+          </a:p>
+        </p:txBody>
+      </p:sp>
+      <p:sp>
+        <p:nvSpPr>
+          <p:cNvPr id="89" name="矩形: 折角 88">
+            <a:extLst>
+              <a:ext uri="{FF2B5EF4-FFF2-40B4-BE49-F238E27FC236}">
+                <a16:creationId xmlns:a16="http://schemas.microsoft.com/office/drawing/2014/main" id="{AB01FF55-0E1B-706D-D57C-407D5110D04C}"/>
+              </a:ext>
+            </a:extLst>
+          </p:cNvPr>
+          <p:cNvSpPr/>
+          <p:nvPr/>
+        </p:nvSpPr>
+        <p:spPr>
+          <a:xfrm>
+            <a:off x="29872" y="4507675"/>
+            <a:ext cx="590362" cy="693731"/>
+          </a:xfrm>
+          <a:prstGeom prst="foldedCorner">
+            <a:avLst>
+              <a:gd name="adj" fmla="val 26079"/>
+            </a:avLst>
+          </a:prstGeom>
+          <a:solidFill>
+            <a:schemeClr val="accent3">
+              <a:lumMod val="20000"/>
+              <a:lumOff val="80000"/>
+            </a:schemeClr>
+          </a:solidFill>
+          <a:ln w="28575">
+            <a:solidFill>
+              <a:schemeClr val="tx1"/>
+            </a:solidFill>
+          </a:ln>
+        </p:spPr>
+        <p:style>
+          <a:lnRef idx="2">
+            <a:schemeClr val="accent1">
+              <a:shade val="15000"/>
+            </a:schemeClr>
+          </a:lnRef>
+          <a:fillRef idx="1">
+            <a:schemeClr val="accent1"/>
+          </a:fillRef>
+          <a:effectRef idx="0">
+            <a:schemeClr val="accent1"/>
+          </a:effectRef>
+          <a:fontRef idx="minor">
+            <a:schemeClr val="lt1"/>
+          </a:fontRef>
+        </p:style>
+        <p:txBody>
+          <a:bodyPr rtlCol="0" anchor="ctr"/>
+          <a:lstStyle/>
+          <a:p>
+            <a:pPr algn="ctr"/>
+            <a:endParaRPr lang="zh-CN" altLang="en-US"/>
+          </a:p>
+        </p:txBody>
+      </p:sp>
+      <p:sp>
+        <p:nvSpPr>
+          <p:cNvPr id="90" name="矩形: 折角 89">
+            <a:extLst>
+              <a:ext uri="{FF2B5EF4-FFF2-40B4-BE49-F238E27FC236}">
+                <a16:creationId xmlns:a16="http://schemas.microsoft.com/office/drawing/2014/main" id="{E5BEDEF3-E77F-A492-549A-B2F23330B0F4}"/>
+              </a:ext>
+            </a:extLst>
+          </p:cNvPr>
+          <p:cNvSpPr/>
+          <p:nvPr/>
+        </p:nvSpPr>
+        <p:spPr>
+          <a:xfrm>
+            <a:off x="703937" y="4507675"/>
+            <a:ext cx="590362" cy="693731"/>
+          </a:xfrm>
+          <a:prstGeom prst="foldedCorner">
+            <a:avLst>
+              <a:gd name="adj" fmla="val 26079"/>
+            </a:avLst>
+          </a:prstGeom>
+          <a:solidFill>
+            <a:schemeClr val="accent3">
+              <a:lumMod val="20000"/>
+              <a:lumOff val="80000"/>
+            </a:schemeClr>
+          </a:solidFill>
+          <a:ln w="28575">
+            <a:solidFill>
+              <a:schemeClr val="tx1"/>
+            </a:solidFill>
+          </a:ln>
+        </p:spPr>
+        <p:style>
+          <a:lnRef idx="2">
+            <a:schemeClr val="accent1">
+              <a:shade val="15000"/>
+            </a:schemeClr>
+          </a:lnRef>
+          <a:fillRef idx="1">
+            <a:schemeClr val="accent1"/>
+          </a:fillRef>
+          <a:effectRef idx="0">
+            <a:schemeClr val="accent1"/>
+          </a:effectRef>
+          <a:fontRef idx="minor">
+            <a:schemeClr val="lt1"/>
+          </a:fontRef>
+        </p:style>
+        <p:txBody>
+          <a:bodyPr rtlCol="0" anchor="ctr"/>
+          <a:lstStyle/>
+          <a:p>
+            <a:pPr algn="ctr"/>
+            <a:endParaRPr lang="zh-CN" altLang="en-US"/>
+          </a:p>
+        </p:txBody>
+      </p:sp>
+      <p:sp>
+        <p:nvSpPr>
+          <p:cNvPr id="92" name="矩形: 折角 91">
+            <a:extLst>
+              <a:ext uri="{FF2B5EF4-FFF2-40B4-BE49-F238E27FC236}">
+                <a16:creationId xmlns:a16="http://schemas.microsoft.com/office/drawing/2014/main" id="{9DBD5D72-501B-6B4B-EA7A-53C94313DD2D}"/>
+              </a:ext>
+            </a:extLst>
+          </p:cNvPr>
+          <p:cNvSpPr/>
+          <p:nvPr/>
+        </p:nvSpPr>
+        <p:spPr>
+          <a:xfrm>
+            <a:off x="34986" y="2483726"/>
+            <a:ext cx="590362" cy="693731"/>
+          </a:xfrm>
+          <a:prstGeom prst="foldedCorner">
+            <a:avLst>
+              <a:gd name="adj" fmla="val 26079"/>
+            </a:avLst>
+          </a:prstGeom>
+          <a:solidFill>
+            <a:schemeClr val="accent3">
+              <a:lumMod val="20000"/>
+              <a:lumOff val="80000"/>
+            </a:schemeClr>
+          </a:solidFill>
+          <a:ln w="28575">
+            <a:solidFill>
+              <a:schemeClr val="tx1"/>
+            </a:solidFill>
+          </a:ln>
+        </p:spPr>
+        <p:style>
+          <a:lnRef idx="2">
+            <a:schemeClr val="accent1">
+              <a:shade val="15000"/>
+            </a:schemeClr>
+          </a:lnRef>
+          <a:fillRef idx="1">
+            <a:schemeClr val="accent1"/>
+          </a:fillRef>
+          <a:effectRef idx="0">
+            <a:schemeClr val="accent1"/>
+          </a:effectRef>
+          <a:fontRef idx="minor">
+            <a:schemeClr val="lt1"/>
+          </a:fontRef>
+        </p:style>
+        <p:txBody>
+          <a:bodyPr rtlCol="0" anchor="ctr"/>
+          <a:lstStyle/>
+          <a:p>
+            <a:pPr algn="ctr"/>
+            <a:endParaRPr lang="zh-CN" altLang="en-US"/>
+          </a:p>
+        </p:txBody>
+      </p:sp>
+      <p:sp>
+        <p:nvSpPr>
+          <p:cNvPr id="93" name="矩形: 折角 92">
+            <a:extLst>
+              <a:ext uri="{FF2B5EF4-FFF2-40B4-BE49-F238E27FC236}">
+                <a16:creationId xmlns:a16="http://schemas.microsoft.com/office/drawing/2014/main" id="{6745E9F5-4670-79BE-22FA-876B3DC4F1D7}"/>
+              </a:ext>
+            </a:extLst>
+          </p:cNvPr>
+          <p:cNvSpPr/>
+          <p:nvPr/>
+        </p:nvSpPr>
+        <p:spPr>
+          <a:xfrm>
+            <a:off x="709051" y="2483726"/>
+            <a:ext cx="590362" cy="693731"/>
+          </a:xfrm>
+          <a:prstGeom prst="foldedCorner">
+            <a:avLst>
+              <a:gd name="adj" fmla="val 26079"/>
+            </a:avLst>
+          </a:prstGeom>
+          <a:solidFill>
+            <a:schemeClr val="accent3">
+              <a:lumMod val="20000"/>
+              <a:lumOff val="80000"/>
+            </a:schemeClr>
+          </a:solidFill>
+          <a:ln w="28575">
+            <a:solidFill>
+              <a:schemeClr val="tx1"/>
+            </a:solidFill>
+          </a:ln>
+        </p:spPr>
+        <p:style>
+          <a:lnRef idx="2">
+            <a:schemeClr val="accent1">
+              <a:shade val="15000"/>
+            </a:schemeClr>
+          </a:lnRef>
+          <a:fillRef idx="1">
+            <a:schemeClr val="accent1"/>
+          </a:fillRef>
+          <a:effectRef idx="0">
+            <a:schemeClr val="accent1"/>
+          </a:effectRef>
+          <a:fontRef idx="minor">
+            <a:schemeClr val="lt1"/>
+          </a:fontRef>
+        </p:style>
+        <p:txBody>
+          <a:bodyPr rtlCol="0" anchor="ctr"/>
+          <a:lstStyle/>
+          <a:p>
+            <a:pPr algn="ctr"/>
+            <a:endParaRPr lang="zh-CN" altLang="en-US"/>
+          </a:p>
+        </p:txBody>
+      </p:sp>
+      <p:sp>
+        <p:nvSpPr>
+          <p:cNvPr id="94" name="矩形: 折角 93">
+            <a:extLst>
+              <a:ext uri="{FF2B5EF4-FFF2-40B4-BE49-F238E27FC236}">
+                <a16:creationId xmlns:a16="http://schemas.microsoft.com/office/drawing/2014/main" id="{8DC58A5F-5473-F763-8DA7-D59CC8C2D25E}"/>
+              </a:ext>
+            </a:extLst>
+          </p:cNvPr>
+          <p:cNvSpPr/>
+          <p:nvPr/>
+        </p:nvSpPr>
+        <p:spPr>
+          <a:xfrm>
+            <a:off x="28849" y="5340906"/>
+            <a:ext cx="590362" cy="693731"/>
+          </a:xfrm>
+          <a:prstGeom prst="foldedCorner">
+            <a:avLst>
+              <a:gd name="adj" fmla="val 26079"/>
+            </a:avLst>
+          </a:prstGeom>
+          <a:solidFill>
+            <a:schemeClr val="accent3">
+              <a:lumMod val="20000"/>
+              <a:lumOff val="80000"/>
+            </a:schemeClr>
+          </a:solidFill>
+          <a:ln w="28575">
+            <a:solidFill>
+              <a:schemeClr val="tx1"/>
+            </a:solidFill>
+          </a:ln>
+        </p:spPr>
+        <p:style>
+          <a:lnRef idx="2">
+            <a:schemeClr val="accent1">
+              <a:shade val="15000"/>
+            </a:schemeClr>
+          </a:lnRef>
+          <a:fillRef idx="1">
+            <a:schemeClr val="accent1"/>
+          </a:fillRef>
+          <a:effectRef idx="0">
+            <a:schemeClr val="accent1"/>
+          </a:effectRef>
+          <a:fontRef idx="minor">
+            <a:schemeClr val="lt1"/>
+          </a:fontRef>
+        </p:style>
+        <p:txBody>
+          <a:bodyPr rtlCol="0" anchor="ctr"/>
+          <a:lstStyle/>
+          <a:p>
+            <a:pPr algn="ctr"/>
+            <a:endParaRPr lang="zh-CN" altLang="en-US"/>
+          </a:p>
+        </p:txBody>
+      </p:sp>
+      <p:sp>
+        <p:nvSpPr>
+          <p:cNvPr id="95" name="矩形: 折角 94">
+            <a:extLst>
+              <a:ext uri="{FF2B5EF4-FFF2-40B4-BE49-F238E27FC236}">
+                <a16:creationId xmlns:a16="http://schemas.microsoft.com/office/drawing/2014/main" id="{097BDF7E-13F5-08CA-7B40-6D3895601E17}"/>
+              </a:ext>
+            </a:extLst>
+          </p:cNvPr>
+          <p:cNvSpPr/>
+          <p:nvPr/>
+        </p:nvSpPr>
+        <p:spPr>
+          <a:xfrm>
+            <a:off x="702914" y="5340906"/>
+            <a:ext cx="590362" cy="693731"/>
+          </a:xfrm>
+          <a:prstGeom prst="foldedCorner">
+            <a:avLst>
+              <a:gd name="adj" fmla="val 26079"/>
+            </a:avLst>
+          </a:prstGeom>
+          <a:solidFill>
+            <a:schemeClr val="accent3">
+              <a:lumMod val="20000"/>
+              <a:lumOff val="80000"/>
+            </a:schemeClr>
+          </a:solidFill>
+          <a:ln w="28575">
+            <a:solidFill>
+              <a:schemeClr val="tx1"/>
+            </a:solidFill>
+          </a:ln>
+        </p:spPr>
+        <p:style>
+          <a:lnRef idx="2">
+            <a:schemeClr val="accent1">
+              <a:shade val="15000"/>
+            </a:schemeClr>
+          </a:lnRef>
+          <a:fillRef idx="1">
+            <a:schemeClr val="accent1"/>
+          </a:fillRef>
+          <a:effectRef idx="0">
+            <a:schemeClr val="accent1"/>
+          </a:effectRef>
+          <a:fontRef idx="minor">
+            <a:schemeClr val="lt1"/>
+          </a:fontRef>
+        </p:style>
+        <p:txBody>
+          <a:bodyPr rtlCol="0" anchor="ctr"/>
+          <a:lstStyle/>
+          <a:p>
+            <a:pPr algn="ctr"/>
+            <a:endParaRPr lang="zh-CN" altLang="en-US"/>
+          </a:p>
+        </p:txBody>
+      </p:sp>
+      <p:sp>
+        <p:nvSpPr>
+          <p:cNvPr id="96" name="文本框 95">
+            <a:extLst>
+              <a:ext uri="{FF2B5EF4-FFF2-40B4-BE49-F238E27FC236}">
+                <a16:creationId xmlns:a16="http://schemas.microsoft.com/office/drawing/2014/main" id="{9FD039E5-1919-3A09-03BC-280965499511}"/>
+              </a:ext>
+            </a:extLst>
+          </p:cNvPr>
+          <p:cNvSpPr txBox="1"/>
+          <p:nvPr/>
+        </p:nvSpPr>
+        <p:spPr>
+          <a:xfrm>
+            <a:off x="467215" y="3164524"/>
+            <a:ext cx="490953" cy="523220"/>
+          </a:xfrm>
+          <a:prstGeom prst="rect">
+            <a:avLst/>
+          </a:prstGeom>
+          <a:noFill/>
+          <a:ln w="28575">
+            <a:noFill/>
+          </a:ln>
+        </p:spPr>
+        <p:txBody>
+          <a:bodyPr wrap="square" rtlCol="0">
+            <a:spAutoFit/>
+          </a:bodyPr>
+          <a:lstStyle/>
+          <a:p>
+            <a:pPr algn="ctr"/>
+            <a:r>
+              <a:rPr lang="en-US" altLang="zh-CN" sz="2800" b="1" dirty="0"/>
+              <a:t>…</a:t>
+            </a:r>
+            <a:endParaRPr lang="zh-CN" altLang="en-US" sz="2800" b="1" dirty="0"/>
+          </a:p>
+        </p:txBody>
+      </p:sp>
+      <p:sp>
+        <p:nvSpPr>
+          <p:cNvPr id="97" name="右大括号 96">
+            <a:extLst>
+              <a:ext uri="{FF2B5EF4-FFF2-40B4-BE49-F238E27FC236}">
+                <a16:creationId xmlns:a16="http://schemas.microsoft.com/office/drawing/2014/main" id="{7E3DAF63-9F46-E7B2-F3FB-8E900F93C2E6}"/>
+              </a:ext>
+            </a:extLst>
+          </p:cNvPr>
+          <p:cNvSpPr/>
+          <p:nvPr/>
+        </p:nvSpPr>
+        <p:spPr>
+          <a:xfrm>
+            <a:off x="1391715" y="712307"/>
+            <a:ext cx="225224" cy="5277743"/>
+          </a:xfrm>
+          <a:prstGeom prst="rightBrace">
+            <a:avLst/>
+          </a:prstGeom>
+          <a:ln w="28575">
+            <a:solidFill>
+              <a:schemeClr val="tx1"/>
+            </a:solidFill>
+          </a:ln>
+        </p:spPr>
+        <p:style>
+          <a:lnRef idx="1">
+            <a:schemeClr val="accent1"/>
+          </a:lnRef>
+          <a:fillRef idx="0">
+            <a:schemeClr val="accent1"/>
+          </a:fillRef>
+          <a:effectRef idx="0">
+            <a:schemeClr val="accent1"/>
+          </a:effectRef>
+          <a:fontRef idx="minor">
+            <a:schemeClr val="tx1"/>
+          </a:fontRef>
+        </p:style>
+        <p:txBody>
+          <a:bodyPr rtlCol="0" anchor="ctr"/>
+          <a:lstStyle/>
+          <a:p>
+            <a:pPr algn="ctr"/>
+            <a:endParaRPr lang="zh-CN" altLang="en-US" dirty="0"/>
+          </a:p>
+        </p:txBody>
+      </p:sp>
+      <p:cxnSp>
+        <p:nvCxnSpPr>
+          <p:cNvPr id="99" name="直接箭头连接符 98">
+            <a:extLst>
+              <a:ext uri="{FF2B5EF4-FFF2-40B4-BE49-F238E27FC236}">
+                <a16:creationId xmlns:a16="http://schemas.microsoft.com/office/drawing/2014/main" id="{6B292C35-7EEB-C2CF-7505-A1F45531C725}"/>
+              </a:ext>
+            </a:extLst>
+          </p:cNvPr>
+          <p:cNvCxnSpPr>
+            <a:cxnSpLocks/>
+            <a:stCxn id="97" idx="1"/>
+            <a:endCxn id="1042" idx="1"/>
+          </p:cNvCxnSpPr>
+          <p:nvPr/>
+        </p:nvCxnSpPr>
+        <p:spPr>
+          <a:xfrm flipV="1">
+            <a:off x="1616939" y="3349672"/>
+            <a:ext cx="213973" cy="1507"/>
+          </a:xfrm>
+          <a:prstGeom prst="straightConnector1">
+            <a:avLst/>
+          </a:prstGeom>
+          <a:ln w="28575">
+            <a:solidFill>
+              <a:schemeClr val="tx1"/>
+            </a:solidFill>
+            <a:tailEnd type="triangle"/>
+          </a:ln>
+        </p:spPr>
+        <p:style>
+          <a:lnRef idx="1">
+            <a:schemeClr val="accent1"/>
+          </a:lnRef>
+          <a:fillRef idx="0">
+            <a:schemeClr val="accent1"/>
+          </a:fillRef>
+          <a:effectRef idx="0">
+            <a:schemeClr val="accent1"/>
+          </a:effectRef>
+          <a:fontRef idx="minor">
+            <a:schemeClr val="tx1"/>
+          </a:fontRef>
+        </p:style>
+      </p:cxnSp>
+      <p:sp>
+        <p:nvSpPr>
+          <p:cNvPr id="101" name="文本框 100">
+            <a:extLst>
+              <a:ext uri="{FF2B5EF4-FFF2-40B4-BE49-F238E27FC236}">
+                <a16:creationId xmlns:a16="http://schemas.microsoft.com/office/drawing/2014/main" id="{599ADE9A-2A18-8E77-99D4-B201F8B3BB79}"/>
+              </a:ext>
+            </a:extLst>
+          </p:cNvPr>
+          <p:cNvSpPr txBox="1"/>
+          <p:nvPr/>
+        </p:nvSpPr>
+        <p:spPr>
+          <a:xfrm>
+            <a:off x="1657311" y="3846445"/>
+            <a:ext cx="1368442" cy="338554"/>
+          </a:xfrm>
+          <a:prstGeom prst="rect">
+            <a:avLst/>
+          </a:prstGeom>
+          <a:noFill/>
+        </p:spPr>
+        <p:txBody>
+          <a:bodyPr wrap="square" rtlCol="0">
+            <a:spAutoFit/>
+          </a:bodyPr>
+          <a:lstStyle/>
+          <a:p>
+            <a:pPr algn="ctr"/>
+            <a:r>
+              <a:rPr lang="zh-CN" altLang="en-US" sz="1600" dirty="0"/>
+              <a:t>代码种子库</a:t>
+            </a:r>
+          </a:p>
+        </p:txBody>
+      </p:sp>
+      <p:sp>
+        <p:nvSpPr>
+          <p:cNvPr id="102" name="文本框 101">
+            <a:extLst>
+              <a:ext uri="{FF2B5EF4-FFF2-40B4-BE49-F238E27FC236}">
+                <a16:creationId xmlns:a16="http://schemas.microsoft.com/office/drawing/2014/main" id="{D7C0D1CF-5E5B-C2D6-BCCE-F093E3C0804F}"/>
+              </a:ext>
+            </a:extLst>
+          </p:cNvPr>
+          <p:cNvSpPr txBox="1"/>
+          <p:nvPr/>
+        </p:nvSpPr>
+        <p:spPr>
+          <a:xfrm>
+            <a:off x="6946" y="6120494"/>
+            <a:ext cx="1417627" cy="338554"/>
+          </a:xfrm>
+          <a:prstGeom prst="rect">
+            <a:avLst/>
+          </a:prstGeom>
+          <a:noFill/>
+        </p:spPr>
+        <p:txBody>
+          <a:bodyPr wrap="square" rtlCol="0">
+            <a:spAutoFit/>
+          </a:bodyPr>
+          <a:lstStyle/>
+          <a:p>
+            <a:pPr algn="ctr"/>
+            <a:r>
+              <a:rPr lang="zh-CN" altLang="en-US" sz="1600" dirty="0"/>
+              <a:t>源代码采样</a:t>
+            </a:r>
+          </a:p>
+        </p:txBody>
+      </p:sp>
+      <p:cxnSp>
+        <p:nvCxnSpPr>
+          <p:cNvPr id="127" name="直接连接符 126">
+            <a:extLst>
+              <a:ext uri="{FF2B5EF4-FFF2-40B4-BE49-F238E27FC236}">
+                <a16:creationId xmlns:a16="http://schemas.microsoft.com/office/drawing/2014/main" id="{89B0E6EB-5AED-C7BA-A048-932FB86F49E2}"/>
+              </a:ext>
+            </a:extLst>
+          </p:cNvPr>
+          <p:cNvCxnSpPr>
+            <a:cxnSpLocks/>
+          </p:cNvCxnSpPr>
+          <p:nvPr/>
+        </p:nvCxnSpPr>
+        <p:spPr>
+          <a:xfrm>
+            <a:off x="2914521" y="3369965"/>
+            <a:ext cx="218883" cy="0"/>
+          </a:xfrm>
+          <a:prstGeom prst="line">
+            <a:avLst/>
+          </a:prstGeom>
+          <a:ln w="28575">
+            <a:solidFill>
+              <a:schemeClr val="tx1"/>
+            </a:solidFill>
+          </a:ln>
+        </p:spPr>
+        <p:style>
+          <a:lnRef idx="1">
+            <a:schemeClr val="accent1"/>
+          </a:lnRef>
+          <a:fillRef idx="0">
+            <a:schemeClr val="accent1"/>
+          </a:fillRef>
+          <a:effectRef idx="0">
+            <a:schemeClr val="accent1"/>
+          </a:effectRef>
+          <a:fontRef idx="minor">
+            <a:schemeClr val="tx1"/>
+          </a:fontRef>
+        </p:style>
+      </p:cxnSp>
+      <p:cxnSp>
+        <p:nvCxnSpPr>
+          <p:cNvPr id="128" name="直接连接符 127">
+            <a:extLst>
+              <a:ext uri="{FF2B5EF4-FFF2-40B4-BE49-F238E27FC236}">
+                <a16:creationId xmlns:a16="http://schemas.microsoft.com/office/drawing/2014/main" id="{B90503D2-3009-4400-CFEF-3F294B03E778}"/>
+              </a:ext>
+            </a:extLst>
+          </p:cNvPr>
+          <p:cNvCxnSpPr>
+            <a:cxnSpLocks/>
+          </p:cNvCxnSpPr>
+          <p:nvPr/>
+        </p:nvCxnSpPr>
+        <p:spPr>
+          <a:xfrm>
+            <a:off x="3133404" y="1874866"/>
+            <a:ext cx="0" cy="3144824"/>
+          </a:xfrm>
+          <a:prstGeom prst="line">
+            <a:avLst/>
+          </a:prstGeom>
+          <a:ln w="28575">
+            <a:solidFill>
+              <a:schemeClr val="tx1"/>
+            </a:solidFill>
+          </a:ln>
+        </p:spPr>
+        <p:style>
+          <a:lnRef idx="1">
+            <a:schemeClr val="accent1"/>
+          </a:lnRef>
+          <a:fillRef idx="0">
+            <a:schemeClr val="accent1"/>
+          </a:fillRef>
+          <a:effectRef idx="0">
+            <a:schemeClr val="accent1"/>
+          </a:effectRef>
+          <a:fontRef idx="minor">
+            <a:schemeClr val="tx1"/>
+          </a:fontRef>
+        </p:style>
+      </p:cxnSp>
+      <p:cxnSp>
+        <p:nvCxnSpPr>
+          <p:cNvPr id="129" name="直接箭头连接符 128">
+            <a:extLst>
+              <a:ext uri="{FF2B5EF4-FFF2-40B4-BE49-F238E27FC236}">
+                <a16:creationId xmlns:a16="http://schemas.microsoft.com/office/drawing/2014/main" id="{193B0360-691F-F81A-545A-3863D8BC36BB}"/>
+              </a:ext>
+            </a:extLst>
+          </p:cNvPr>
+          <p:cNvCxnSpPr>
+            <a:cxnSpLocks/>
+          </p:cNvCxnSpPr>
+          <p:nvPr/>
+        </p:nvCxnSpPr>
+        <p:spPr>
+          <a:xfrm>
+            <a:off x="3148236" y="1887638"/>
+            <a:ext cx="251261" cy="0"/>
+          </a:xfrm>
+          <a:prstGeom prst="straightConnector1">
+            <a:avLst/>
+          </a:prstGeom>
+          <a:ln w="28575">
+            <a:solidFill>
+              <a:schemeClr val="tx1"/>
+            </a:solidFill>
+            <a:tailEnd type="triangle" w="lg" len="med"/>
+          </a:ln>
+        </p:spPr>
+        <p:style>
+          <a:lnRef idx="1">
+            <a:schemeClr val="accent1"/>
+          </a:lnRef>
+          <a:fillRef idx="0">
+            <a:schemeClr val="accent1"/>
+          </a:fillRef>
+          <a:effectRef idx="0">
+            <a:schemeClr val="accent1"/>
+          </a:effectRef>
+          <a:fontRef idx="minor">
+            <a:schemeClr val="tx1"/>
+          </a:fontRef>
+        </p:style>
+      </p:cxnSp>
+      <p:cxnSp>
+        <p:nvCxnSpPr>
+          <p:cNvPr id="130" name="直接箭头连接符 129">
+            <a:extLst>
+              <a:ext uri="{FF2B5EF4-FFF2-40B4-BE49-F238E27FC236}">
+                <a16:creationId xmlns:a16="http://schemas.microsoft.com/office/drawing/2014/main" id="{2DE9646B-F792-F4B3-233D-CE58DCB5748A}"/>
+              </a:ext>
+            </a:extLst>
+          </p:cNvPr>
+          <p:cNvCxnSpPr>
+            <a:cxnSpLocks/>
+          </p:cNvCxnSpPr>
+          <p:nvPr/>
+        </p:nvCxnSpPr>
+        <p:spPr>
+          <a:xfrm>
+            <a:off x="3142099" y="5019690"/>
+            <a:ext cx="257238" cy="0"/>
+          </a:xfrm>
+          <a:prstGeom prst="straightConnector1">
+            <a:avLst/>
+          </a:prstGeom>
+          <a:ln w="28575">
+            <a:solidFill>
+              <a:schemeClr val="tx1"/>
+            </a:solidFill>
+            <a:tailEnd type="triangle" w="lg" len="med"/>
+          </a:ln>
+        </p:spPr>
+        <p:style>
+          <a:lnRef idx="1">
+            <a:schemeClr val="accent1"/>
+          </a:lnRef>
+          <a:fillRef idx="0">
+            <a:schemeClr val="accent1"/>
+          </a:fillRef>
+          <a:effectRef idx="0">
+            <a:schemeClr val="accent1"/>
+          </a:effectRef>
+          <a:fontRef idx="minor">
+            <a:schemeClr val="tx1"/>
+          </a:fontRef>
+        </p:style>
+      </p:cxnSp>
+      <p:cxnSp>
+        <p:nvCxnSpPr>
+          <p:cNvPr id="167" name="直接连接符 166">
+            <a:extLst>
+              <a:ext uri="{FF2B5EF4-FFF2-40B4-BE49-F238E27FC236}">
+                <a16:creationId xmlns:a16="http://schemas.microsoft.com/office/drawing/2014/main" id="{960BB92A-5AE1-0EB5-E63A-CA2610E087A1}"/>
+              </a:ext>
+            </a:extLst>
+          </p:cNvPr>
+          <p:cNvCxnSpPr>
+            <a:cxnSpLocks/>
+          </p:cNvCxnSpPr>
+          <p:nvPr/>
+        </p:nvCxnSpPr>
+        <p:spPr>
+          <a:xfrm>
+            <a:off x="9020734" y="5225024"/>
+            <a:ext cx="0" cy="211667"/>
+          </a:xfrm>
+          <a:prstGeom prst="line">
+            <a:avLst/>
+          </a:prstGeom>
+          <a:ln w="19050">
+            <a:solidFill>
+              <a:schemeClr val="tx1"/>
+            </a:solidFill>
+          </a:ln>
+        </p:spPr>
+        <p:style>
+          <a:lnRef idx="1">
+            <a:schemeClr val="accent1"/>
+          </a:lnRef>
+          <a:fillRef idx="0">
+            <a:schemeClr val="accent1"/>
+          </a:fillRef>
+          <a:effectRef idx="0">
+            <a:schemeClr val="accent1"/>
+          </a:effectRef>
+          <a:fontRef idx="minor">
+            <a:schemeClr val="tx1"/>
+          </a:fontRef>
+        </p:style>
+      </p:cxnSp>
+      <p:cxnSp>
+        <p:nvCxnSpPr>
+          <p:cNvPr id="176" name="直接连接符 175">
+            <a:extLst>
+              <a:ext uri="{FF2B5EF4-FFF2-40B4-BE49-F238E27FC236}">
+                <a16:creationId xmlns:a16="http://schemas.microsoft.com/office/drawing/2014/main" id="{FA755134-C794-6F7A-9324-8A327E2ABE34}"/>
+              </a:ext>
+            </a:extLst>
+          </p:cNvPr>
+          <p:cNvCxnSpPr>
+            <a:cxnSpLocks/>
+          </p:cNvCxnSpPr>
+          <p:nvPr/>
+        </p:nvCxnSpPr>
+        <p:spPr>
+          <a:xfrm>
+            <a:off x="9019042" y="5433852"/>
+            <a:ext cx="263311" cy="0"/>
+          </a:xfrm>
+          <a:prstGeom prst="line">
+            <a:avLst/>
+          </a:prstGeom>
+          <a:ln w="19050">
+            <a:solidFill>
+              <a:schemeClr val="tx1"/>
+            </a:solidFill>
+          </a:ln>
+        </p:spPr>
+        <p:style>
+          <a:lnRef idx="1">
+            <a:schemeClr val="accent1"/>
+          </a:lnRef>
+          <a:fillRef idx="0">
+            <a:schemeClr val="accent1"/>
+          </a:fillRef>
+          <a:effectRef idx="0">
+            <a:schemeClr val="accent1"/>
+          </a:effectRef>
+          <a:fontRef idx="minor">
+            <a:schemeClr val="tx1"/>
+          </a:fontRef>
+        </p:style>
+      </p:cxnSp>
+      <p:cxnSp>
+        <p:nvCxnSpPr>
+          <p:cNvPr id="177" name="直接连接符 176">
+            <a:extLst>
+              <a:ext uri="{FF2B5EF4-FFF2-40B4-BE49-F238E27FC236}">
+                <a16:creationId xmlns:a16="http://schemas.microsoft.com/office/drawing/2014/main" id="{198B58DF-8F87-8BE4-4393-4E9132E6F4EC}"/>
+              </a:ext>
+            </a:extLst>
+          </p:cNvPr>
+          <p:cNvCxnSpPr>
+            <a:cxnSpLocks/>
+          </p:cNvCxnSpPr>
+          <p:nvPr/>
+        </p:nvCxnSpPr>
+        <p:spPr>
+          <a:xfrm>
+            <a:off x="9290819" y="5229350"/>
+            <a:ext cx="0" cy="211667"/>
+          </a:xfrm>
+          <a:prstGeom prst="line">
+            <a:avLst/>
+          </a:prstGeom>
+          <a:ln w="19050">
+            <a:solidFill>
+              <a:schemeClr val="tx1"/>
+            </a:solidFill>
+          </a:ln>
+        </p:spPr>
+        <p:style>
+          <a:lnRef idx="1">
+            <a:schemeClr val="accent1"/>
+          </a:lnRef>
+          <a:fillRef idx="0">
+            <a:schemeClr val="accent1"/>
+          </a:fillRef>
+          <a:effectRef idx="0">
+            <a:schemeClr val="accent1"/>
+          </a:effectRef>
+          <a:fontRef idx="minor">
+            <a:schemeClr val="tx1"/>
+          </a:fontRef>
+        </p:style>
+      </p:cxnSp>
+      <p:cxnSp>
+        <p:nvCxnSpPr>
+          <p:cNvPr id="178" name="直接连接符 177">
+            <a:extLst>
+              <a:ext uri="{FF2B5EF4-FFF2-40B4-BE49-F238E27FC236}">
+                <a16:creationId xmlns:a16="http://schemas.microsoft.com/office/drawing/2014/main" id="{8DD7843B-68D5-A9FC-1E4D-C6275C3B77D0}"/>
+              </a:ext>
+            </a:extLst>
+          </p:cNvPr>
+          <p:cNvCxnSpPr>
+            <a:cxnSpLocks/>
+          </p:cNvCxnSpPr>
+          <p:nvPr/>
+        </p:nvCxnSpPr>
+        <p:spPr>
+          <a:xfrm>
+            <a:off x="9282353" y="5229350"/>
+            <a:ext cx="254000" cy="0"/>
+          </a:xfrm>
+          <a:prstGeom prst="line">
+            <a:avLst/>
+          </a:prstGeom>
+          <a:ln w="19050">
+            <a:solidFill>
+              <a:schemeClr val="tx1"/>
+            </a:solidFill>
+          </a:ln>
+        </p:spPr>
+        <p:style>
+          <a:lnRef idx="1">
+            <a:schemeClr val="accent1"/>
+          </a:lnRef>
+          <a:fillRef idx="0">
+            <a:schemeClr val="accent1"/>
+          </a:fillRef>
+          <a:effectRef idx="0">
+            <a:schemeClr val="accent1"/>
+          </a:effectRef>
+          <a:fontRef idx="minor">
+            <a:schemeClr val="tx1"/>
+          </a:fontRef>
+        </p:style>
+      </p:cxnSp>
+      <p:cxnSp>
+        <p:nvCxnSpPr>
+          <p:cNvPr id="184" name="直接连接符 183">
+            <a:extLst>
+              <a:ext uri="{FF2B5EF4-FFF2-40B4-BE49-F238E27FC236}">
+                <a16:creationId xmlns:a16="http://schemas.microsoft.com/office/drawing/2014/main" id="{3AE4866F-E4E8-51A2-D6E1-0BAA1E84D406}"/>
+              </a:ext>
+            </a:extLst>
+          </p:cNvPr>
+          <p:cNvCxnSpPr>
+            <a:cxnSpLocks/>
+          </p:cNvCxnSpPr>
+          <p:nvPr/>
+        </p:nvCxnSpPr>
+        <p:spPr>
+          <a:xfrm>
+            <a:off x="9537202" y="5222974"/>
+            <a:ext cx="0" cy="211667"/>
+          </a:xfrm>
+          <a:prstGeom prst="line">
+            <a:avLst/>
+          </a:prstGeom>
+          <a:ln w="19050">
+            <a:solidFill>
+              <a:schemeClr val="tx1"/>
+            </a:solidFill>
+          </a:ln>
+        </p:spPr>
+        <p:style>
+          <a:lnRef idx="1">
+            <a:schemeClr val="accent1"/>
+          </a:lnRef>
+          <a:fillRef idx="0">
+            <a:schemeClr val="accent1"/>
+          </a:fillRef>
+          <a:effectRef idx="0">
+            <a:schemeClr val="accent1"/>
+          </a:effectRef>
+          <a:fontRef idx="minor">
+            <a:schemeClr val="tx1"/>
+          </a:fontRef>
+        </p:style>
+      </p:cxnSp>
+      <p:cxnSp>
+        <p:nvCxnSpPr>
+          <p:cNvPr id="185" name="直接连接符 184">
+            <a:extLst>
+              <a:ext uri="{FF2B5EF4-FFF2-40B4-BE49-F238E27FC236}">
+                <a16:creationId xmlns:a16="http://schemas.microsoft.com/office/drawing/2014/main" id="{F482FC32-05E5-8444-CC39-4FE4B722144F}"/>
+              </a:ext>
+            </a:extLst>
+          </p:cNvPr>
+          <p:cNvCxnSpPr>
+            <a:cxnSpLocks/>
+          </p:cNvCxnSpPr>
+          <p:nvPr/>
+        </p:nvCxnSpPr>
+        <p:spPr>
+          <a:xfrm>
+            <a:off x="9531274" y="5429985"/>
+            <a:ext cx="240454" cy="0"/>
+          </a:xfrm>
+          <a:prstGeom prst="line">
+            <a:avLst/>
+          </a:prstGeom>
+          <a:ln w="19050">
+            <a:solidFill>
+              <a:schemeClr val="tx1"/>
+            </a:solidFill>
+          </a:ln>
+        </p:spPr>
+        <p:style>
+          <a:lnRef idx="1">
+            <a:schemeClr val="accent1"/>
+          </a:lnRef>
+          <a:fillRef idx="0">
+            <a:schemeClr val="accent1"/>
+          </a:fillRef>
+          <a:effectRef idx="0">
+            <a:schemeClr val="accent1"/>
+          </a:effectRef>
+          <a:fontRef idx="minor">
+            <a:schemeClr val="tx1"/>
+          </a:fontRef>
+        </p:style>
+      </p:cxnSp>
+      <p:sp>
+        <p:nvSpPr>
+          <p:cNvPr id="187" name="矩形 186">
+            <a:extLst>
+              <a:ext uri="{FF2B5EF4-FFF2-40B4-BE49-F238E27FC236}">
+                <a16:creationId xmlns:a16="http://schemas.microsoft.com/office/drawing/2014/main" id="{3D8EC453-B4FB-1F6A-4DE7-93983818F754}"/>
+              </a:ext>
+            </a:extLst>
+          </p:cNvPr>
+          <p:cNvSpPr/>
+          <p:nvPr/>
+        </p:nvSpPr>
+        <p:spPr>
+          <a:xfrm>
+            <a:off x="9497483" y="1155700"/>
+            <a:ext cx="309023" cy="1351217"/>
+          </a:xfrm>
+          <a:prstGeom prst="rect">
+            <a:avLst/>
+          </a:prstGeom>
+          <a:noFill/>
+          <a:ln w="19050">
+            <a:solidFill>
+              <a:srgbClr val="FF0000"/>
+            </a:solidFill>
+            <a:prstDash val="dash"/>
+          </a:ln>
+        </p:spPr>
+        <p:style>
+          <a:lnRef idx="2">
+            <a:schemeClr val="accent1">
+              <a:shade val="15000"/>
+            </a:schemeClr>
+          </a:lnRef>
+          <a:fillRef idx="1">
+            <a:schemeClr val="accent1"/>
+          </a:fillRef>
+          <a:effectRef idx="0">
+            <a:schemeClr val="accent1"/>
+          </a:effectRef>
+          <a:fontRef idx="minor">
+            <a:schemeClr val="lt1"/>
+          </a:fontRef>
+        </p:style>
+        <p:txBody>
+          <a:bodyPr rtlCol="0" anchor="ctr"/>
+          <a:lstStyle/>
+          <a:p>
+            <a:pPr algn="ctr"/>
+            <a:endParaRPr lang="zh-CN" altLang="en-US"/>
+          </a:p>
+        </p:txBody>
+      </p:sp>
+      <p:sp>
+        <p:nvSpPr>
+          <p:cNvPr id="189" name="矩形 188">
+            <a:extLst>
+              <a:ext uri="{FF2B5EF4-FFF2-40B4-BE49-F238E27FC236}">
+                <a16:creationId xmlns:a16="http://schemas.microsoft.com/office/drawing/2014/main" id="{7B0995FF-3447-4C3A-EBF0-86BF217DF569}"/>
+              </a:ext>
+            </a:extLst>
+          </p:cNvPr>
+          <p:cNvSpPr/>
+          <p:nvPr/>
+        </p:nvSpPr>
+        <p:spPr>
+          <a:xfrm>
+            <a:off x="9251879" y="4327588"/>
+            <a:ext cx="309023" cy="1351217"/>
+          </a:xfrm>
+          <a:prstGeom prst="rect">
+            <a:avLst/>
+          </a:prstGeom>
+          <a:noFill/>
+          <a:ln w="19050">
+            <a:solidFill>
+              <a:srgbClr val="FF0000"/>
+            </a:solidFill>
+            <a:prstDash val="dash"/>
+          </a:ln>
+        </p:spPr>
+        <p:style>
+          <a:lnRef idx="2">
+            <a:schemeClr val="accent1">
+              <a:shade val="15000"/>
+            </a:schemeClr>
+          </a:lnRef>
+          <a:fillRef idx="1">
+            <a:schemeClr val="accent1"/>
+          </a:fillRef>
+          <a:effectRef idx="0">
+            <a:schemeClr val="accent1"/>
+          </a:effectRef>
+          <a:fontRef idx="minor">
+            <a:schemeClr val="lt1"/>
+          </a:fontRef>
+        </p:style>
+        <p:txBody>
+          <a:bodyPr rtlCol="0" anchor="ctr"/>
+          <a:lstStyle/>
+          <a:p>
+            <a:pPr algn="ctr"/>
+            <a:endParaRPr lang="zh-CN" altLang="en-US"/>
+          </a:p>
+        </p:txBody>
+      </p:sp>
+      <p:cxnSp>
+        <p:nvCxnSpPr>
+          <p:cNvPr id="1024" name="直接箭头连接符 1023">
+            <a:extLst>
+              <a:ext uri="{FF2B5EF4-FFF2-40B4-BE49-F238E27FC236}">
+                <a16:creationId xmlns:a16="http://schemas.microsoft.com/office/drawing/2014/main" id="{98DE35F0-C7C7-9573-9C18-E49347B35EB5}"/>
+              </a:ext>
+            </a:extLst>
+          </p:cNvPr>
+          <p:cNvCxnSpPr>
+            <a:cxnSpLocks/>
+          </p:cNvCxnSpPr>
+          <p:nvPr/>
+        </p:nvCxnSpPr>
+        <p:spPr>
+          <a:xfrm>
+            <a:off x="9671045" y="2503742"/>
+            <a:ext cx="0" cy="680783"/>
+          </a:xfrm>
+          <a:prstGeom prst="straightConnector1">
+            <a:avLst/>
+          </a:prstGeom>
+          <a:ln w="19050">
+            <a:solidFill>
+              <a:srgbClr val="FF0000"/>
+            </a:solidFill>
+            <a:tailEnd type="triangle"/>
+          </a:ln>
+        </p:spPr>
+        <p:style>
+          <a:lnRef idx="1">
+            <a:schemeClr val="accent1"/>
+          </a:lnRef>
+          <a:fillRef idx="0">
+            <a:schemeClr val="accent1"/>
+          </a:fillRef>
+          <a:effectRef idx="0">
+            <a:schemeClr val="accent1"/>
+          </a:effectRef>
+          <a:fontRef idx="minor">
+            <a:schemeClr val="tx1"/>
+          </a:fontRef>
+        </p:style>
+      </p:cxnSp>
+      <p:cxnSp>
+        <p:nvCxnSpPr>
+          <p:cNvPr id="1029" name="直接箭头连接符 1028">
+            <a:extLst>
+              <a:ext uri="{FF2B5EF4-FFF2-40B4-BE49-F238E27FC236}">
+                <a16:creationId xmlns:a16="http://schemas.microsoft.com/office/drawing/2014/main" id="{7DBC64F2-C1BA-55C9-505D-285084A3ABEA}"/>
+              </a:ext>
+            </a:extLst>
+          </p:cNvPr>
+          <p:cNvCxnSpPr>
+            <a:cxnSpLocks/>
+            <a:stCxn id="189" idx="0"/>
+          </p:cNvCxnSpPr>
+          <p:nvPr/>
+        </p:nvCxnSpPr>
+        <p:spPr>
+          <a:xfrm flipH="1" flipV="1">
+            <a:off x="9405120" y="3467100"/>
+            <a:ext cx="1271" cy="860488"/>
+          </a:xfrm>
+          <a:prstGeom prst="straightConnector1">
+            <a:avLst/>
+          </a:prstGeom>
+          <a:ln w="19050">
+            <a:solidFill>
+              <a:srgbClr val="FF0000"/>
+            </a:solidFill>
+            <a:tailEnd type="triangle"/>
+          </a:ln>
+        </p:spPr>
+        <p:style>
+          <a:lnRef idx="1">
+            <a:schemeClr val="accent1"/>
+          </a:lnRef>
+          <a:fillRef idx="0">
+            <a:schemeClr val="accent1"/>
+          </a:fillRef>
+          <a:effectRef idx="0">
+            <a:schemeClr val="accent1"/>
+          </a:effectRef>
+          <a:fontRef idx="minor">
+            <a:schemeClr val="tx1"/>
+          </a:fontRef>
+        </p:style>
+      </p:cxnSp>
+      <p:sp>
+        <p:nvSpPr>
+          <p:cNvPr id="1035" name="矩形 1034">
+            <a:extLst>
+              <a:ext uri="{FF2B5EF4-FFF2-40B4-BE49-F238E27FC236}">
+                <a16:creationId xmlns:a16="http://schemas.microsoft.com/office/drawing/2014/main" id="{5A25972A-CC86-1C51-5793-22EA583B039F}"/>
+              </a:ext>
+            </a:extLst>
+          </p:cNvPr>
+          <p:cNvSpPr/>
+          <p:nvPr/>
+        </p:nvSpPr>
+        <p:spPr>
+          <a:xfrm>
+            <a:off x="9178426" y="3188330"/>
+            <a:ext cx="692150" cy="273050"/>
+          </a:xfrm>
+          <a:prstGeom prst="rect">
+            <a:avLst/>
+          </a:prstGeom>
+          <a:solidFill>
+            <a:schemeClr val="accent3">
+              <a:lumMod val="20000"/>
+              <a:lumOff val="80000"/>
+            </a:schemeClr>
+          </a:solidFill>
+          <a:ln w="19050">
+            <a:solidFill>
+              <a:schemeClr val="tx1"/>
+            </a:solidFill>
+          </a:ln>
+        </p:spPr>
+        <p:style>
+          <a:lnRef idx="2">
+            <a:schemeClr val="accent1">
+              <a:shade val="15000"/>
+            </a:schemeClr>
+          </a:lnRef>
+          <a:fillRef idx="1">
+            <a:schemeClr val="accent1"/>
+          </a:fillRef>
+          <a:effectRef idx="0">
+            <a:schemeClr val="accent1"/>
+          </a:effectRef>
+          <a:fontRef idx="minor">
+            <a:schemeClr val="lt1"/>
+          </a:fontRef>
+        </p:style>
+        <p:txBody>
+          <a:bodyPr rtlCol="0" anchor="ctr"/>
+          <a:lstStyle/>
+          <a:p>
+            <a:pPr algn="ctr"/>
+            <a:r>
+              <a:rPr lang="zh-CN" altLang="en-US" dirty="0">
+                <a:solidFill>
+                  <a:schemeClr val="tx1"/>
+                </a:solidFill>
+              </a:rPr>
+              <a:t>同步</a:t>
+            </a:r>
+          </a:p>
+        </p:txBody>
+      </p:sp>
+      <p:sp>
+        <p:nvSpPr>
+          <p:cNvPr id="1041" name="矩形: 折角 1040">
+            <a:extLst>
+              <a:ext uri="{FF2B5EF4-FFF2-40B4-BE49-F238E27FC236}">
+                <a16:creationId xmlns:a16="http://schemas.microsoft.com/office/drawing/2014/main" id="{DD7D37AC-5882-7310-1EE5-5D6667D3B4DB}"/>
+              </a:ext>
+            </a:extLst>
+          </p:cNvPr>
+          <p:cNvSpPr/>
+          <p:nvPr/>
+        </p:nvSpPr>
+        <p:spPr>
+          <a:xfrm>
+            <a:off x="10252807" y="1491170"/>
+            <a:ext cx="673328" cy="690950"/>
+          </a:xfrm>
+          <a:prstGeom prst="foldedCorner">
+            <a:avLst/>
+          </a:prstGeom>
+          <a:solidFill>
+            <a:schemeClr val="accent2">
+              <a:lumMod val="20000"/>
+              <a:lumOff val="80000"/>
+            </a:schemeClr>
+          </a:solidFill>
+          <a:ln w="19050">
+            <a:solidFill>
+              <a:schemeClr val="tx1"/>
+            </a:solidFill>
+          </a:ln>
+        </p:spPr>
+        <p:style>
+          <a:lnRef idx="2">
+            <a:schemeClr val="accent1">
+              <a:shade val="15000"/>
+            </a:schemeClr>
+          </a:lnRef>
+          <a:fillRef idx="1">
+            <a:schemeClr val="accent1"/>
+          </a:fillRef>
+          <a:effectRef idx="0">
+            <a:schemeClr val="accent1"/>
+          </a:effectRef>
+          <a:fontRef idx="minor">
+            <a:schemeClr val="lt1"/>
+          </a:fontRef>
+        </p:style>
+        <p:txBody>
+          <a:bodyPr rtlCol="0" anchor="ctr"/>
+          <a:lstStyle/>
+          <a:p>
+            <a:pPr algn="ctr"/>
+            <a:endParaRPr lang="zh-CN" altLang="en-US"/>
+          </a:p>
+        </p:txBody>
+      </p:sp>
+      <p:cxnSp>
+        <p:nvCxnSpPr>
+          <p:cNvPr id="1043" name="直接连接符 1042">
+            <a:extLst>
+              <a:ext uri="{FF2B5EF4-FFF2-40B4-BE49-F238E27FC236}">
+                <a16:creationId xmlns:a16="http://schemas.microsoft.com/office/drawing/2014/main" id="{389BEA05-67E2-3FED-0043-616A5158B182}"/>
+              </a:ext>
+            </a:extLst>
+          </p:cNvPr>
+          <p:cNvCxnSpPr>
+            <a:cxnSpLocks/>
+          </p:cNvCxnSpPr>
+          <p:nvPr/>
+        </p:nvCxnSpPr>
+        <p:spPr>
+          <a:xfrm>
+            <a:off x="10291345" y="1571492"/>
+            <a:ext cx="558590" cy="0"/>
+          </a:xfrm>
+          <a:prstGeom prst="line">
+            <a:avLst/>
+          </a:prstGeom>
+          <a:ln w="9525">
+            <a:solidFill>
+              <a:schemeClr val="tx1"/>
+            </a:solidFill>
+          </a:ln>
+        </p:spPr>
+        <p:style>
+          <a:lnRef idx="1">
+            <a:schemeClr val="accent1"/>
+          </a:lnRef>
+          <a:fillRef idx="0">
+            <a:schemeClr val="accent1"/>
+          </a:fillRef>
+          <a:effectRef idx="0">
+            <a:schemeClr val="accent1"/>
+          </a:effectRef>
+          <a:fontRef idx="minor">
+            <a:schemeClr val="tx1"/>
+          </a:fontRef>
+        </p:style>
+      </p:cxnSp>
+      <p:cxnSp>
+        <p:nvCxnSpPr>
+          <p:cNvPr id="1044" name="直接连接符 1043">
+            <a:extLst>
+              <a:ext uri="{FF2B5EF4-FFF2-40B4-BE49-F238E27FC236}">
+                <a16:creationId xmlns:a16="http://schemas.microsoft.com/office/drawing/2014/main" id="{A3EB67BD-0C01-FDF3-931C-1D37DE10975B}"/>
+              </a:ext>
+            </a:extLst>
+          </p:cNvPr>
+          <p:cNvCxnSpPr>
+            <a:cxnSpLocks/>
+          </p:cNvCxnSpPr>
+          <p:nvPr/>
+        </p:nvCxnSpPr>
+        <p:spPr>
+          <a:xfrm>
+            <a:off x="10289665" y="1640806"/>
+            <a:ext cx="525984" cy="0"/>
+          </a:xfrm>
+          <a:prstGeom prst="line">
+            <a:avLst/>
+          </a:prstGeom>
+          <a:ln w="9525">
+            <a:solidFill>
+              <a:schemeClr val="tx1"/>
+            </a:solidFill>
+          </a:ln>
+        </p:spPr>
+        <p:style>
+          <a:lnRef idx="1">
+            <a:schemeClr val="accent1"/>
+          </a:lnRef>
+          <a:fillRef idx="0">
+            <a:schemeClr val="accent1"/>
+          </a:fillRef>
+          <a:effectRef idx="0">
+            <a:schemeClr val="accent1"/>
+          </a:effectRef>
+          <a:fontRef idx="minor">
+            <a:schemeClr val="tx1"/>
+          </a:fontRef>
+        </p:style>
+      </p:cxnSp>
+      <p:cxnSp>
+        <p:nvCxnSpPr>
+          <p:cNvPr id="1045" name="直接连接符 1044">
+            <a:extLst>
+              <a:ext uri="{FF2B5EF4-FFF2-40B4-BE49-F238E27FC236}">
+                <a16:creationId xmlns:a16="http://schemas.microsoft.com/office/drawing/2014/main" id="{63C43A74-49F8-027A-EF29-88AA91D37CFA}"/>
+              </a:ext>
+            </a:extLst>
+          </p:cNvPr>
+          <p:cNvCxnSpPr>
+            <a:cxnSpLocks/>
+          </p:cNvCxnSpPr>
+          <p:nvPr/>
+        </p:nvCxnSpPr>
+        <p:spPr>
+          <a:xfrm>
+            <a:off x="10286288" y="1714361"/>
+            <a:ext cx="460460" cy="0"/>
+          </a:xfrm>
+          <a:prstGeom prst="line">
+            <a:avLst/>
+          </a:prstGeom>
+          <a:ln w="9525">
+            <a:solidFill>
+              <a:schemeClr val="tx1"/>
+            </a:solidFill>
+          </a:ln>
+        </p:spPr>
+        <p:style>
+          <a:lnRef idx="1">
+            <a:schemeClr val="accent1"/>
+          </a:lnRef>
+          <a:fillRef idx="0">
+            <a:schemeClr val="accent1"/>
+          </a:fillRef>
+          <a:effectRef idx="0">
+            <a:schemeClr val="accent1"/>
+          </a:effectRef>
+          <a:fontRef idx="minor">
+            <a:schemeClr val="tx1"/>
+          </a:fontRef>
+        </p:style>
+      </p:cxnSp>
+      <p:cxnSp>
+        <p:nvCxnSpPr>
+          <p:cNvPr id="1046" name="直接连接符 1045">
+            <a:extLst>
+              <a:ext uri="{FF2B5EF4-FFF2-40B4-BE49-F238E27FC236}">
+                <a16:creationId xmlns:a16="http://schemas.microsoft.com/office/drawing/2014/main" id="{748232EE-3CC3-7744-6E7B-04D43DA7AA8A}"/>
+              </a:ext>
+            </a:extLst>
+          </p:cNvPr>
+          <p:cNvCxnSpPr>
+            <a:cxnSpLocks/>
+          </p:cNvCxnSpPr>
+          <p:nvPr/>
+        </p:nvCxnSpPr>
+        <p:spPr>
+          <a:xfrm>
+            <a:off x="10289665" y="1784214"/>
+            <a:ext cx="525984" cy="0"/>
+          </a:xfrm>
+          <a:prstGeom prst="line">
+            <a:avLst/>
+          </a:prstGeom>
+          <a:ln w="9525">
+            <a:solidFill>
+              <a:schemeClr val="tx1"/>
+            </a:solidFill>
+          </a:ln>
+        </p:spPr>
+        <p:style>
+          <a:lnRef idx="1">
+            <a:schemeClr val="accent1"/>
+          </a:lnRef>
+          <a:fillRef idx="0">
+            <a:schemeClr val="accent1"/>
+          </a:fillRef>
+          <a:effectRef idx="0">
+            <a:schemeClr val="accent1"/>
+          </a:effectRef>
+          <a:fontRef idx="minor">
+            <a:schemeClr val="tx1"/>
+          </a:fontRef>
+        </p:style>
+      </p:cxnSp>
+      <p:cxnSp>
+        <p:nvCxnSpPr>
+          <p:cNvPr id="1047" name="直接连接符 1046">
+            <a:extLst>
+              <a:ext uri="{FF2B5EF4-FFF2-40B4-BE49-F238E27FC236}">
+                <a16:creationId xmlns:a16="http://schemas.microsoft.com/office/drawing/2014/main" id="{B87E4647-AE9F-2DCF-F122-0A221065360F}"/>
+              </a:ext>
+            </a:extLst>
+          </p:cNvPr>
+          <p:cNvCxnSpPr>
+            <a:cxnSpLocks/>
+          </p:cNvCxnSpPr>
+          <p:nvPr/>
+        </p:nvCxnSpPr>
+        <p:spPr>
+          <a:xfrm>
+            <a:off x="10291890" y="1864647"/>
+            <a:ext cx="569158" cy="0"/>
+          </a:xfrm>
+          <a:prstGeom prst="line">
+            <a:avLst/>
+          </a:prstGeom>
+          <a:ln w="9525">
+            <a:solidFill>
+              <a:schemeClr val="tx1"/>
+            </a:solidFill>
+          </a:ln>
+        </p:spPr>
+        <p:style>
+          <a:lnRef idx="1">
+            <a:schemeClr val="accent1"/>
+          </a:lnRef>
+          <a:fillRef idx="0">
+            <a:schemeClr val="accent1"/>
+          </a:fillRef>
+          <a:effectRef idx="0">
+            <a:schemeClr val="accent1"/>
+          </a:effectRef>
+          <a:fontRef idx="minor">
+            <a:schemeClr val="tx1"/>
+          </a:fontRef>
+        </p:style>
+      </p:cxnSp>
+      <p:cxnSp>
+        <p:nvCxnSpPr>
+          <p:cNvPr id="1048" name="直接连接符 1047">
+            <a:extLst>
+              <a:ext uri="{FF2B5EF4-FFF2-40B4-BE49-F238E27FC236}">
+                <a16:creationId xmlns:a16="http://schemas.microsoft.com/office/drawing/2014/main" id="{DD969E4D-13F2-857E-B8CB-7B659F43E4A3}"/>
+              </a:ext>
+            </a:extLst>
+          </p:cNvPr>
+          <p:cNvCxnSpPr>
+            <a:cxnSpLocks/>
+          </p:cNvCxnSpPr>
+          <p:nvPr/>
+        </p:nvCxnSpPr>
+        <p:spPr>
+          <a:xfrm>
+            <a:off x="10284888" y="1939261"/>
+            <a:ext cx="433285" cy="0"/>
+          </a:xfrm>
+          <a:prstGeom prst="line">
+            <a:avLst/>
+          </a:prstGeom>
+          <a:ln w="9525">
+            <a:solidFill>
+              <a:schemeClr val="tx1"/>
+            </a:solidFill>
+          </a:ln>
+        </p:spPr>
+        <p:style>
+          <a:lnRef idx="1">
+            <a:schemeClr val="accent1"/>
+          </a:lnRef>
+          <a:fillRef idx="0">
+            <a:schemeClr val="accent1"/>
+          </a:fillRef>
+          <a:effectRef idx="0">
+            <a:schemeClr val="accent1"/>
+          </a:effectRef>
+          <a:fontRef idx="minor">
+            <a:schemeClr val="tx1"/>
+          </a:fontRef>
+        </p:style>
+      </p:cxnSp>
+      <p:cxnSp>
+        <p:nvCxnSpPr>
+          <p:cNvPr id="1049" name="直接连接符 1048">
+            <a:extLst>
+              <a:ext uri="{FF2B5EF4-FFF2-40B4-BE49-F238E27FC236}">
+                <a16:creationId xmlns:a16="http://schemas.microsoft.com/office/drawing/2014/main" id="{9F086388-B086-8FC6-865B-396F620F97C2}"/>
+              </a:ext>
+            </a:extLst>
+          </p:cNvPr>
+          <p:cNvCxnSpPr>
+            <a:cxnSpLocks/>
+          </p:cNvCxnSpPr>
+          <p:nvPr/>
+        </p:nvCxnSpPr>
+        <p:spPr>
+          <a:xfrm>
+            <a:off x="10287844" y="2012287"/>
+            <a:ext cx="490654" cy="0"/>
+          </a:xfrm>
+          <a:prstGeom prst="line">
+            <a:avLst/>
+          </a:prstGeom>
+          <a:ln w="9525">
+            <a:solidFill>
+              <a:schemeClr val="tx1"/>
+            </a:solidFill>
+          </a:ln>
+        </p:spPr>
+        <p:style>
+          <a:lnRef idx="1">
+            <a:schemeClr val="accent1"/>
+          </a:lnRef>
+          <a:fillRef idx="0">
+            <a:schemeClr val="accent1"/>
+          </a:fillRef>
+          <a:effectRef idx="0">
+            <a:schemeClr val="accent1"/>
+          </a:effectRef>
+          <a:fontRef idx="minor">
+            <a:schemeClr val="tx1"/>
+          </a:fontRef>
+        </p:style>
+      </p:cxnSp>
+      <p:cxnSp>
+        <p:nvCxnSpPr>
+          <p:cNvPr id="1050" name="直接连接符 1049">
+            <a:extLst>
+              <a:ext uri="{FF2B5EF4-FFF2-40B4-BE49-F238E27FC236}">
+                <a16:creationId xmlns:a16="http://schemas.microsoft.com/office/drawing/2014/main" id="{EC9B2D29-445E-007C-1729-953229BD4A81}"/>
+              </a:ext>
+            </a:extLst>
+          </p:cNvPr>
+          <p:cNvCxnSpPr>
+            <a:cxnSpLocks/>
+          </p:cNvCxnSpPr>
+          <p:nvPr/>
+        </p:nvCxnSpPr>
+        <p:spPr>
+          <a:xfrm>
+            <a:off x="10284888" y="2091661"/>
+            <a:ext cx="433285" cy="0"/>
+          </a:xfrm>
+          <a:prstGeom prst="line">
+            <a:avLst/>
+          </a:prstGeom>
+          <a:ln w="9525">
+            <a:solidFill>
+              <a:schemeClr val="tx1"/>
+            </a:solidFill>
+          </a:ln>
+        </p:spPr>
+        <p:style>
+          <a:lnRef idx="1">
+            <a:schemeClr val="accent1"/>
+          </a:lnRef>
+          <a:fillRef idx="0">
+            <a:schemeClr val="accent1"/>
+          </a:fillRef>
+          <a:effectRef idx="0">
+            <a:schemeClr val="accent1"/>
+          </a:effectRef>
+          <a:fontRef idx="minor">
+            <a:schemeClr val="tx1"/>
+          </a:fontRef>
+        </p:style>
+      </p:cxnSp>
+      <p:sp>
+        <p:nvSpPr>
+          <p:cNvPr id="1051" name="加号 1050">
+            <a:extLst>
+              <a:ext uri="{FF2B5EF4-FFF2-40B4-BE49-F238E27FC236}">
+                <a16:creationId xmlns:a16="http://schemas.microsoft.com/office/drawing/2014/main" id="{5C4C5D5C-5762-E658-789F-E70C8C78F1B5}"/>
+              </a:ext>
+            </a:extLst>
+          </p:cNvPr>
+          <p:cNvSpPr/>
+          <p:nvPr/>
+        </p:nvSpPr>
+        <p:spPr>
+          <a:xfrm>
+            <a:off x="9913685" y="1730812"/>
+            <a:ext cx="284401" cy="262821"/>
+          </a:xfrm>
+          <a:prstGeom prst="mathPlus">
+            <a:avLst/>
+          </a:prstGeom>
+          <a:solidFill>
+            <a:schemeClr val="bg2"/>
+          </a:solidFill>
+          <a:ln w="19050">
+            <a:solidFill>
+              <a:schemeClr val="tx1"/>
+            </a:solidFill>
+          </a:ln>
+        </p:spPr>
+        <p:style>
+          <a:lnRef idx="2">
+            <a:schemeClr val="accent1">
+              <a:shade val="15000"/>
+            </a:schemeClr>
+          </a:lnRef>
+          <a:fillRef idx="1">
+            <a:schemeClr val="accent1"/>
+          </a:fillRef>
+          <a:effectRef idx="0">
+            <a:schemeClr val="accent1"/>
+          </a:effectRef>
+          <a:fontRef idx="minor">
+            <a:schemeClr val="lt1"/>
+          </a:fontRef>
+        </p:style>
+        <p:txBody>
+          <a:bodyPr rtlCol="0" anchor="ctr"/>
+          <a:lstStyle/>
+          <a:p>
+            <a:pPr algn="ctr"/>
+            <a:endParaRPr lang="zh-CN" altLang="en-US" dirty="0"/>
+          </a:p>
+        </p:txBody>
+      </p:sp>
+      <p:sp>
+        <p:nvSpPr>
+          <p:cNvPr id="1052" name="矩形: 折角 1051">
+            <a:extLst>
+              <a:ext uri="{FF2B5EF4-FFF2-40B4-BE49-F238E27FC236}">
+                <a16:creationId xmlns:a16="http://schemas.microsoft.com/office/drawing/2014/main" id="{6706D59D-5C6B-4330-39EE-A4B1C54AB4D4}"/>
+              </a:ext>
+            </a:extLst>
+          </p:cNvPr>
+          <p:cNvSpPr/>
+          <p:nvPr/>
+        </p:nvSpPr>
+        <p:spPr>
+          <a:xfrm>
+            <a:off x="10252807" y="4745741"/>
+            <a:ext cx="673328" cy="690950"/>
+          </a:xfrm>
+          <a:prstGeom prst="foldedCorner">
+            <a:avLst/>
+          </a:prstGeom>
+          <a:solidFill>
+            <a:schemeClr val="accent2">
+              <a:lumMod val="20000"/>
+              <a:lumOff val="80000"/>
+            </a:schemeClr>
+          </a:solidFill>
+          <a:ln w="19050">
+            <a:solidFill>
+              <a:schemeClr val="tx1"/>
+            </a:solidFill>
+          </a:ln>
+        </p:spPr>
+        <p:style>
+          <a:lnRef idx="2">
+            <a:schemeClr val="accent1">
+              <a:shade val="15000"/>
+            </a:schemeClr>
+          </a:lnRef>
+          <a:fillRef idx="1">
+            <a:schemeClr val="accent1"/>
+          </a:fillRef>
+          <a:effectRef idx="0">
+            <a:schemeClr val="accent1"/>
+          </a:effectRef>
+          <a:fontRef idx="minor">
+            <a:schemeClr val="lt1"/>
+          </a:fontRef>
+        </p:style>
+        <p:txBody>
+          <a:bodyPr rtlCol="0" anchor="ctr"/>
+          <a:lstStyle/>
+          <a:p>
+            <a:pPr algn="ctr"/>
+            <a:endParaRPr lang="zh-CN" altLang="en-US"/>
+          </a:p>
+        </p:txBody>
+      </p:sp>
+      <p:cxnSp>
+        <p:nvCxnSpPr>
+          <p:cNvPr id="1053" name="直接连接符 1052">
+            <a:extLst>
+              <a:ext uri="{FF2B5EF4-FFF2-40B4-BE49-F238E27FC236}">
+                <a16:creationId xmlns:a16="http://schemas.microsoft.com/office/drawing/2014/main" id="{E6F8A855-D89C-C89B-CA58-E74623276F63}"/>
+              </a:ext>
+            </a:extLst>
+          </p:cNvPr>
+          <p:cNvCxnSpPr>
+            <a:cxnSpLocks/>
+          </p:cNvCxnSpPr>
+          <p:nvPr/>
+        </p:nvCxnSpPr>
+        <p:spPr>
+          <a:xfrm>
+            <a:off x="10291345" y="4826063"/>
+            <a:ext cx="558590" cy="0"/>
+          </a:xfrm>
+          <a:prstGeom prst="line">
+            <a:avLst/>
+          </a:prstGeom>
+          <a:ln w="9525">
+            <a:solidFill>
+              <a:schemeClr val="tx1"/>
+            </a:solidFill>
+          </a:ln>
+        </p:spPr>
+        <p:style>
+          <a:lnRef idx="1">
+            <a:schemeClr val="accent1"/>
+          </a:lnRef>
+          <a:fillRef idx="0">
+            <a:schemeClr val="accent1"/>
+          </a:fillRef>
+          <a:effectRef idx="0">
+            <a:schemeClr val="accent1"/>
+          </a:effectRef>
+          <a:fontRef idx="minor">
+            <a:schemeClr val="tx1"/>
+          </a:fontRef>
+        </p:style>
+      </p:cxnSp>
+      <p:cxnSp>
+        <p:nvCxnSpPr>
+          <p:cNvPr id="1054" name="直接连接符 1053">
+            <a:extLst>
+              <a:ext uri="{FF2B5EF4-FFF2-40B4-BE49-F238E27FC236}">
+                <a16:creationId xmlns:a16="http://schemas.microsoft.com/office/drawing/2014/main" id="{5DA251AF-2E2B-FD00-20A9-3F71171C5CFC}"/>
+              </a:ext>
+            </a:extLst>
+          </p:cNvPr>
+          <p:cNvCxnSpPr>
+            <a:cxnSpLocks/>
+          </p:cNvCxnSpPr>
+          <p:nvPr/>
+        </p:nvCxnSpPr>
+        <p:spPr>
+          <a:xfrm>
+            <a:off x="10289665" y="4895377"/>
+            <a:ext cx="525984" cy="0"/>
+          </a:xfrm>
+          <a:prstGeom prst="line">
+            <a:avLst/>
+          </a:prstGeom>
+          <a:ln w="9525">
+            <a:solidFill>
+              <a:schemeClr val="tx1"/>
+            </a:solidFill>
+          </a:ln>
+        </p:spPr>
+        <p:style>
+          <a:lnRef idx="1">
+            <a:schemeClr val="accent1"/>
+          </a:lnRef>
+          <a:fillRef idx="0">
+            <a:schemeClr val="accent1"/>
+          </a:fillRef>
+          <a:effectRef idx="0">
+            <a:schemeClr val="accent1"/>
+          </a:effectRef>
+          <a:fontRef idx="minor">
+            <a:schemeClr val="tx1"/>
+          </a:fontRef>
+        </p:style>
+      </p:cxnSp>
+      <p:cxnSp>
+        <p:nvCxnSpPr>
+          <p:cNvPr id="1055" name="直接连接符 1054">
+            <a:extLst>
+              <a:ext uri="{FF2B5EF4-FFF2-40B4-BE49-F238E27FC236}">
+                <a16:creationId xmlns:a16="http://schemas.microsoft.com/office/drawing/2014/main" id="{81CAB8DA-D7F7-0399-42A5-61F0BEA68DA7}"/>
+              </a:ext>
+            </a:extLst>
+          </p:cNvPr>
+          <p:cNvCxnSpPr>
+            <a:cxnSpLocks/>
+          </p:cNvCxnSpPr>
+          <p:nvPr/>
+        </p:nvCxnSpPr>
+        <p:spPr>
+          <a:xfrm>
+            <a:off x="10286288" y="4968932"/>
+            <a:ext cx="460460" cy="0"/>
+          </a:xfrm>
+          <a:prstGeom prst="line">
+            <a:avLst/>
+          </a:prstGeom>
+          <a:ln w="9525">
+            <a:solidFill>
+              <a:schemeClr val="tx1"/>
+            </a:solidFill>
+          </a:ln>
+        </p:spPr>
+        <p:style>
+          <a:lnRef idx="1">
+            <a:schemeClr val="accent1"/>
+          </a:lnRef>
+          <a:fillRef idx="0">
+            <a:schemeClr val="accent1"/>
+          </a:fillRef>
+          <a:effectRef idx="0">
+            <a:schemeClr val="accent1"/>
+          </a:effectRef>
+          <a:fontRef idx="minor">
+            <a:schemeClr val="tx1"/>
+          </a:fontRef>
+        </p:style>
+      </p:cxnSp>
+      <p:cxnSp>
+        <p:nvCxnSpPr>
+          <p:cNvPr id="1056" name="直接连接符 1055">
+            <a:extLst>
+              <a:ext uri="{FF2B5EF4-FFF2-40B4-BE49-F238E27FC236}">
+                <a16:creationId xmlns:a16="http://schemas.microsoft.com/office/drawing/2014/main" id="{5F21FB8A-CDB8-12AE-6463-FCA764981DCA}"/>
+              </a:ext>
+            </a:extLst>
+          </p:cNvPr>
+          <p:cNvCxnSpPr>
+            <a:cxnSpLocks/>
+          </p:cNvCxnSpPr>
+          <p:nvPr/>
+        </p:nvCxnSpPr>
+        <p:spPr>
+          <a:xfrm>
+            <a:off x="10289665" y="5038785"/>
+            <a:ext cx="525984" cy="0"/>
+          </a:xfrm>
+          <a:prstGeom prst="line">
+            <a:avLst/>
+          </a:prstGeom>
+          <a:ln w="9525">
+            <a:solidFill>
+              <a:schemeClr val="tx1"/>
+            </a:solidFill>
+          </a:ln>
+        </p:spPr>
+        <p:style>
+          <a:lnRef idx="1">
+            <a:schemeClr val="accent1"/>
+          </a:lnRef>
+          <a:fillRef idx="0">
+            <a:schemeClr val="accent1"/>
+          </a:fillRef>
+          <a:effectRef idx="0">
+            <a:schemeClr val="accent1"/>
+          </a:effectRef>
+          <a:fontRef idx="minor">
+            <a:schemeClr val="tx1"/>
+          </a:fontRef>
+        </p:style>
+      </p:cxnSp>
+      <p:cxnSp>
+        <p:nvCxnSpPr>
+          <p:cNvPr id="1057" name="直接连接符 1056">
+            <a:extLst>
+              <a:ext uri="{FF2B5EF4-FFF2-40B4-BE49-F238E27FC236}">
+                <a16:creationId xmlns:a16="http://schemas.microsoft.com/office/drawing/2014/main" id="{A4B61DEA-9EB6-F829-6CE6-DB8D667D24B1}"/>
+              </a:ext>
+            </a:extLst>
+          </p:cNvPr>
+          <p:cNvCxnSpPr>
+            <a:cxnSpLocks/>
+          </p:cNvCxnSpPr>
+          <p:nvPr/>
+        </p:nvCxnSpPr>
+        <p:spPr>
+          <a:xfrm>
+            <a:off x="10291890" y="5119218"/>
+            <a:ext cx="569158" cy="0"/>
+          </a:xfrm>
+          <a:prstGeom prst="line">
+            <a:avLst/>
+          </a:prstGeom>
+          <a:ln w="9525">
+            <a:solidFill>
+              <a:schemeClr val="tx1"/>
+            </a:solidFill>
+          </a:ln>
+        </p:spPr>
+        <p:style>
+          <a:lnRef idx="1">
+            <a:schemeClr val="accent1"/>
+          </a:lnRef>
+          <a:fillRef idx="0">
+            <a:schemeClr val="accent1"/>
+          </a:fillRef>
+          <a:effectRef idx="0">
+            <a:schemeClr val="accent1"/>
+          </a:effectRef>
+          <a:fontRef idx="minor">
+            <a:schemeClr val="tx1"/>
+          </a:fontRef>
+        </p:style>
+      </p:cxnSp>
+      <p:cxnSp>
+        <p:nvCxnSpPr>
+          <p:cNvPr id="1058" name="直接连接符 1057">
+            <a:extLst>
+              <a:ext uri="{FF2B5EF4-FFF2-40B4-BE49-F238E27FC236}">
+                <a16:creationId xmlns:a16="http://schemas.microsoft.com/office/drawing/2014/main" id="{E2AACD39-44F3-FC7D-7172-554F3148E045}"/>
+              </a:ext>
+            </a:extLst>
+          </p:cNvPr>
+          <p:cNvCxnSpPr>
+            <a:cxnSpLocks/>
+          </p:cNvCxnSpPr>
+          <p:nvPr/>
+        </p:nvCxnSpPr>
+        <p:spPr>
+          <a:xfrm>
+            <a:off x="10284888" y="5193832"/>
+            <a:ext cx="433285" cy="0"/>
+          </a:xfrm>
+          <a:prstGeom prst="line">
+            <a:avLst/>
+          </a:prstGeom>
+          <a:ln w="9525">
+            <a:solidFill>
+              <a:schemeClr val="tx1"/>
+            </a:solidFill>
+          </a:ln>
+        </p:spPr>
+        <p:style>
+          <a:lnRef idx="1">
+            <a:schemeClr val="accent1"/>
+          </a:lnRef>
+          <a:fillRef idx="0">
+            <a:schemeClr val="accent1"/>
+          </a:fillRef>
+          <a:effectRef idx="0">
+            <a:schemeClr val="accent1"/>
+          </a:effectRef>
+          <a:fontRef idx="minor">
+            <a:schemeClr val="tx1"/>
+          </a:fontRef>
+        </p:style>
+      </p:cxnSp>
+      <p:cxnSp>
+        <p:nvCxnSpPr>
+          <p:cNvPr id="1059" name="直接连接符 1058">
+            <a:extLst>
+              <a:ext uri="{FF2B5EF4-FFF2-40B4-BE49-F238E27FC236}">
+                <a16:creationId xmlns:a16="http://schemas.microsoft.com/office/drawing/2014/main" id="{CAB0FB41-2F86-1E9A-7106-DAF5A55CA558}"/>
+              </a:ext>
+            </a:extLst>
+          </p:cNvPr>
+          <p:cNvCxnSpPr>
+            <a:cxnSpLocks/>
+          </p:cNvCxnSpPr>
+          <p:nvPr/>
+        </p:nvCxnSpPr>
+        <p:spPr>
+          <a:xfrm>
+            <a:off x="10287844" y="5266858"/>
+            <a:ext cx="490654" cy="0"/>
+          </a:xfrm>
+          <a:prstGeom prst="line">
+            <a:avLst/>
+          </a:prstGeom>
+          <a:ln w="9525">
+            <a:solidFill>
+              <a:schemeClr val="tx1"/>
+            </a:solidFill>
+          </a:ln>
+        </p:spPr>
+        <p:style>
+          <a:lnRef idx="1">
+            <a:schemeClr val="accent1"/>
+          </a:lnRef>
+          <a:fillRef idx="0">
+            <a:schemeClr val="accent1"/>
+          </a:fillRef>
+          <a:effectRef idx="0">
+            <a:schemeClr val="accent1"/>
+          </a:effectRef>
+          <a:fontRef idx="minor">
+            <a:schemeClr val="tx1"/>
+          </a:fontRef>
+        </p:style>
+      </p:cxnSp>
+      <p:cxnSp>
+        <p:nvCxnSpPr>
+          <p:cNvPr id="1060" name="直接连接符 1059">
+            <a:extLst>
+              <a:ext uri="{FF2B5EF4-FFF2-40B4-BE49-F238E27FC236}">
+                <a16:creationId xmlns:a16="http://schemas.microsoft.com/office/drawing/2014/main" id="{842FB4D9-129C-F6BD-C46C-4A614503685B}"/>
+              </a:ext>
+            </a:extLst>
+          </p:cNvPr>
+          <p:cNvCxnSpPr>
+            <a:cxnSpLocks/>
+          </p:cNvCxnSpPr>
+          <p:nvPr/>
+        </p:nvCxnSpPr>
+        <p:spPr>
+          <a:xfrm>
+            <a:off x="10284888" y="5346232"/>
+            <a:ext cx="433285" cy="0"/>
+          </a:xfrm>
+          <a:prstGeom prst="line">
+            <a:avLst/>
+          </a:prstGeom>
+          <a:ln w="9525">
+            <a:solidFill>
+              <a:schemeClr val="tx1"/>
+            </a:solidFill>
+          </a:ln>
+        </p:spPr>
+        <p:style>
+          <a:lnRef idx="1">
+            <a:schemeClr val="accent1"/>
+          </a:lnRef>
+          <a:fillRef idx="0">
+            <a:schemeClr val="accent1"/>
+          </a:fillRef>
+          <a:effectRef idx="0">
+            <a:schemeClr val="accent1"/>
+          </a:effectRef>
+          <a:fontRef idx="minor">
+            <a:schemeClr val="tx1"/>
+          </a:fontRef>
+        </p:style>
+      </p:cxnSp>
+      <p:sp>
+        <p:nvSpPr>
+          <p:cNvPr id="1061" name="加号 1060">
+            <a:extLst>
+              <a:ext uri="{FF2B5EF4-FFF2-40B4-BE49-F238E27FC236}">
+                <a16:creationId xmlns:a16="http://schemas.microsoft.com/office/drawing/2014/main" id="{E1AAE14C-EC2D-86BB-4684-8A6EDD6998C2}"/>
+              </a:ext>
+            </a:extLst>
+          </p:cNvPr>
+          <p:cNvSpPr/>
+          <p:nvPr/>
+        </p:nvSpPr>
+        <p:spPr>
+          <a:xfrm>
+            <a:off x="9913685" y="4985383"/>
+            <a:ext cx="284401" cy="262821"/>
+          </a:xfrm>
+          <a:prstGeom prst="mathPlus">
+            <a:avLst/>
+          </a:prstGeom>
+          <a:solidFill>
+            <a:schemeClr val="bg2"/>
+          </a:solidFill>
+          <a:ln w="19050">
+            <a:solidFill>
+              <a:schemeClr val="tx1"/>
+            </a:solidFill>
+          </a:ln>
+        </p:spPr>
+        <p:style>
+          <a:lnRef idx="2">
+            <a:schemeClr val="accent1">
+              <a:shade val="15000"/>
+            </a:schemeClr>
+          </a:lnRef>
+          <a:fillRef idx="1">
+            <a:schemeClr val="accent1"/>
+          </a:fillRef>
+          <a:effectRef idx="0">
+            <a:schemeClr val="accent1"/>
+          </a:effectRef>
+          <a:fontRef idx="minor">
+            <a:schemeClr val="lt1"/>
+          </a:fontRef>
+        </p:style>
+        <p:txBody>
+          <a:bodyPr rtlCol="0" anchor="ctr"/>
+          <a:lstStyle/>
+          <a:p>
+            <a:pPr algn="ctr"/>
+            <a:endParaRPr lang="zh-CN" altLang="en-US" dirty="0"/>
+          </a:p>
+        </p:txBody>
+      </p:sp>
+      <p:cxnSp>
+        <p:nvCxnSpPr>
+          <p:cNvPr id="1062" name="直接箭头连接符 1061">
+            <a:extLst>
+              <a:ext uri="{FF2B5EF4-FFF2-40B4-BE49-F238E27FC236}">
+                <a16:creationId xmlns:a16="http://schemas.microsoft.com/office/drawing/2014/main" id="{60328364-260A-49B7-3515-90FCF6696330}"/>
+              </a:ext>
+            </a:extLst>
+          </p:cNvPr>
+          <p:cNvCxnSpPr>
+            <a:cxnSpLocks/>
+          </p:cNvCxnSpPr>
+          <p:nvPr/>
+        </p:nvCxnSpPr>
+        <p:spPr>
+          <a:xfrm>
+            <a:off x="10987256" y="1849342"/>
+            <a:ext cx="294078" cy="0"/>
+          </a:xfrm>
+          <a:prstGeom prst="straightConnector1">
+            <a:avLst/>
+          </a:prstGeom>
+          <a:ln w="28575">
+            <a:solidFill>
+              <a:schemeClr val="tx1"/>
+            </a:solidFill>
+            <a:tailEnd type="triangle" w="lg" len="med"/>
+          </a:ln>
+        </p:spPr>
+        <p:style>
+          <a:lnRef idx="1">
+            <a:schemeClr val="accent1"/>
+          </a:lnRef>
+          <a:fillRef idx="0">
+            <a:schemeClr val="accent1"/>
+          </a:fillRef>
+          <a:effectRef idx="0">
+            <a:schemeClr val="accent1"/>
+          </a:effectRef>
+          <a:fontRef idx="minor">
+            <a:schemeClr val="tx1"/>
+          </a:fontRef>
+        </p:style>
+      </p:cxnSp>
+      <p:cxnSp>
+        <p:nvCxnSpPr>
+          <p:cNvPr id="1063" name="直接箭头连接符 1062">
+            <a:extLst>
+              <a:ext uri="{FF2B5EF4-FFF2-40B4-BE49-F238E27FC236}">
+                <a16:creationId xmlns:a16="http://schemas.microsoft.com/office/drawing/2014/main" id="{048F779E-3102-4332-3517-31B3BEE70EF5}"/>
+              </a:ext>
+            </a:extLst>
+          </p:cNvPr>
+          <p:cNvCxnSpPr>
+            <a:cxnSpLocks/>
+          </p:cNvCxnSpPr>
+          <p:nvPr/>
+        </p:nvCxnSpPr>
+        <p:spPr>
+          <a:xfrm>
+            <a:off x="10987256" y="5097603"/>
+            <a:ext cx="288998" cy="0"/>
+          </a:xfrm>
+          <a:prstGeom prst="straightConnector1">
+            <a:avLst/>
+          </a:prstGeom>
+          <a:ln w="28575">
+            <a:solidFill>
+              <a:schemeClr val="tx1"/>
+            </a:solidFill>
+            <a:tailEnd type="triangle" w="lg" len="med"/>
+          </a:ln>
+        </p:spPr>
+        <p:style>
+          <a:lnRef idx="1">
+            <a:schemeClr val="accent1"/>
+          </a:lnRef>
+          <a:fillRef idx="0">
+            <a:schemeClr val="accent1"/>
+          </a:fillRef>
+          <a:effectRef idx="0">
+            <a:schemeClr val="accent1"/>
+          </a:effectRef>
+          <a:fontRef idx="minor">
+            <a:schemeClr val="tx1"/>
+          </a:fontRef>
+        </p:style>
+      </p:cxnSp>
+      <p:sp>
+        <p:nvSpPr>
+          <p:cNvPr id="1066" name="文本框 1065">
+            <a:extLst>
+              <a:ext uri="{FF2B5EF4-FFF2-40B4-BE49-F238E27FC236}">
+                <a16:creationId xmlns:a16="http://schemas.microsoft.com/office/drawing/2014/main" id="{4ECD787B-74DF-FAC6-73DA-DEE764DBE4B7}"/>
+              </a:ext>
+            </a:extLst>
+          </p:cNvPr>
+          <p:cNvSpPr txBox="1"/>
+          <p:nvPr/>
+        </p:nvSpPr>
+        <p:spPr>
+          <a:xfrm>
+            <a:off x="10086936" y="2215279"/>
+            <a:ext cx="962772" cy="523220"/>
+          </a:xfrm>
+          <a:prstGeom prst="rect">
+            <a:avLst/>
+          </a:prstGeom>
+          <a:noFill/>
+        </p:spPr>
+        <p:txBody>
+          <a:bodyPr wrap="square" rtlCol="0">
+            <a:spAutoFit/>
+          </a:bodyPr>
+          <a:lstStyle/>
+          <a:p>
+            <a:pPr algn="ctr"/>
+            <a:r>
+              <a:rPr lang="zh-CN" altLang="en-US" sz="1400" dirty="0"/>
+              <a:t>时序单元</a:t>
+            </a:r>
+            <a:endParaRPr lang="en-US" altLang="zh-CN" sz="1400" dirty="0"/>
+          </a:p>
+          <a:p>
+            <a:pPr algn="ctr"/>
+            <a:r>
+              <a:rPr lang="zh-CN" altLang="en-US" sz="1400" dirty="0"/>
+              <a:t>列表</a:t>
+            </a:r>
+          </a:p>
+        </p:txBody>
+      </p:sp>
+      <p:sp>
+        <p:nvSpPr>
+          <p:cNvPr id="1067" name="文本框 1066">
+            <a:extLst>
+              <a:ext uri="{FF2B5EF4-FFF2-40B4-BE49-F238E27FC236}">
+                <a16:creationId xmlns:a16="http://schemas.microsoft.com/office/drawing/2014/main" id="{0D42C64E-6042-1126-71C9-7D7C632BE9DE}"/>
+              </a:ext>
+            </a:extLst>
+          </p:cNvPr>
+          <p:cNvSpPr txBox="1"/>
+          <p:nvPr/>
+        </p:nvSpPr>
+        <p:spPr>
+          <a:xfrm>
+            <a:off x="10098405" y="5436691"/>
+            <a:ext cx="962772" cy="523220"/>
+          </a:xfrm>
+          <a:prstGeom prst="rect">
+            <a:avLst/>
+          </a:prstGeom>
+          <a:noFill/>
+        </p:spPr>
+        <p:txBody>
+          <a:bodyPr wrap="square" rtlCol="0">
+            <a:spAutoFit/>
+          </a:bodyPr>
+          <a:lstStyle/>
+          <a:p>
+            <a:pPr algn="ctr"/>
+            <a:r>
+              <a:rPr lang="zh-CN" altLang="en-US" sz="1400" dirty="0"/>
+              <a:t>时序单元</a:t>
+            </a:r>
+            <a:endParaRPr lang="en-US" altLang="zh-CN" sz="1400" dirty="0"/>
+          </a:p>
+          <a:p>
+            <a:pPr algn="ctr"/>
+            <a:r>
+              <a:rPr lang="zh-CN" altLang="en-US" sz="1400" dirty="0"/>
+              <a:t>列表</a:t>
+            </a:r>
+          </a:p>
+        </p:txBody>
+      </p:sp>
+      <p:sp>
+        <p:nvSpPr>
+          <p:cNvPr id="1077" name="矩形: 折角 1076">
+            <a:extLst>
+              <a:ext uri="{FF2B5EF4-FFF2-40B4-BE49-F238E27FC236}">
+                <a16:creationId xmlns:a16="http://schemas.microsoft.com/office/drawing/2014/main" id="{9A545C59-F5C7-EC7A-C91C-23292F444DEB}"/>
+              </a:ext>
+            </a:extLst>
+          </p:cNvPr>
+          <p:cNvSpPr/>
+          <p:nvPr/>
+        </p:nvSpPr>
+        <p:spPr>
+          <a:xfrm>
+            <a:off x="11353165" y="1491170"/>
+            <a:ext cx="673328" cy="690950"/>
+          </a:xfrm>
+          <a:prstGeom prst="foldedCorner">
+            <a:avLst/>
+          </a:prstGeom>
+          <a:solidFill>
+            <a:schemeClr val="accent5">
+              <a:lumMod val="20000"/>
+              <a:lumOff val="80000"/>
+            </a:schemeClr>
+          </a:solidFill>
+          <a:ln w="19050">
+            <a:solidFill>
+              <a:schemeClr val="tx1"/>
+            </a:solidFill>
+          </a:ln>
+        </p:spPr>
+        <p:style>
+          <a:lnRef idx="2">
+            <a:schemeClr val="accent1">
+              <a:shade val="15000"/>
+            </a:schemeClr>
+          </a:lnRef>
+          <a:fillRef idx="1">
+            <a:schemeClr val="accent1"/>
+          </a:fillRef>
+          <a:effectRef idx="0">
+            <a:schemeClr val="accent1"/>
+          </a:effectRef>
+          <a:fontRef idx="minor">
+            <a:schemeClr val="lt1"/>
+          </a:fontRef>
+        </p:style>
+        <p:txBody>
+          <a:bodyPr rtlCol="0" anchor="ctr"/>
+          <a:lstStyle/>
+          <a:p>
+            <a:pPr algn="ctr"/>
+            <a:endParaRPr lang="zh-CN" altLang="en-US"/>
+          </a:p>
+        </p:txBody>
+      </p:sp>
+      <p:cxnSp>
+        <p:nvCxnSpPr>
+          <p:cNvPr id="1078" name="直接连接符 1077">
+            <a:extLst>
+              <a:ext uri="{FF2B5EF4-FFF2-40B4-BE49-F238E27FC236}">
+                <a16:creationId xmlns:a16="http://schemas.microsoft.com/office/drawing/2014/main" id="{AC34CBF1-CE46-700C-A900-1FD171BB10B5}"/>
+              </a:ext>
+            </a:extLst>
+          </p:cNvPr>
+          <p:cNvCxnSpPr>
+            <a:cxnSpLocks/>
+          </p:cNvCxnSpPr>
+          <p:nvPr/>
+        </p:nvCxnSpPr>
+        <p:spPr>
+          <a:xfrm>
+            <a:off x="11391703" y="1571492"/>
+            <a:ext cx="558590" cy="0"/>
+          </a:xfrm>
+          <a:prstGeom prst="line">
+            <a:avLst/>
+          </a:prstGeom>
+          <a:ln w="9525">
+            <a:solidFill>
+              <a:schemeClr val="tx1"/>
+            </a:solidFill>
+          </a:ln>
+        </p:spPr>
+        <p:style>
+          <a:lnRef idx="1">
+            <a:schemeClr val="accent1"/>
+          </a:lnRef>
+          <a:fillRef idx="0">
+            <a:schemeClr val="accent1"/>
+          </a:fillRef>
+          <a:effectRef idx="0">
+            <a:schemeClr val="accent1"/>
+          </a:effectRef>
+          <a:fontRef idx="minor">
+            <a:schemeClr val="tx1"/>
+          </a:fontRef>
+        </p:style>
+      </p:cxnSp>
+      <p:cxnSp>
+        <p:nvCxnSpPr>
+          <p:cNvPr id="1079" name="直接连接符 1078">
+            <a:extLst>
+              <a:ext uri="{FF2B5EF4-FFF2-40B4-BE49-F238E27FC236}">
+                <a16:creationId xmlns:a16="http://schemas.microsoft.com/office/drawing/2014/main" id="{3193B762-2872-B620-6359-E097396EDBA0}"/>
+              </a:ext>
+            </a:extLst>
+          </p:cNvPr>
+          <p:cNvCxnSpPr>
+            <a:cxnSpLocks/>
+          </p:cNvCxnSpPr>
+          <p:nvPr/>
+        </p:nvCxnSpPr>
+        <p:spPr>
+          <a:xfrm>
+            <a:off x="11390023" y="1640806"/>
+            <a:ext cx="525984" cy="0"/>
+          </a:xfrm>
+          <a:prstGeom prst="line">
+            <a:avLst/>
+          </a:prstGeom>
+          <a:ln w="9525">
+            <a:solidFill>
+              <a:schemeClr val="tx1"/>
+            </a:solidFill>
+          </a:ln>
+        </p:spPr>
+        <p:style>
+          <a:lnRef idx="1">
+            <a:schemeClr val="accent1"/>
+          </a:lnRef>
+          <a:fillRef idx="0">
+            <a:schemeClr val="accent1"/>
+          </a:fillRef>
+          <a:effectRef idx="0">
+            <a:schemeClr val="accent1"/>
+          </a:effectRef>
+          <a:fontRef idx="minor">
+            <a:schemeClr val="tx1"/>
+          </a:fontRef>
+        </p:style>
+      </p:cxnSp>
+      <p:cxnSp>
+        <p:nvCxnSpPr>
+          <p:cNvPr id="1080" name="直接连接符 1079">
+            <a:extLst>
+              <a:ext uri="{FF2B5EF4-FFF2-40B4-BE49-F238E27FC236}">
+                <a16:creationId xmlns:a16="http://schemas.microsoft.com/office/drawing/2014/main" id="{B662FB48-D87A-B466-AEA9-C34C5BCF9BD2}"/>
+              </a:ext>
+            </a:extLst>
+          </p:cNvPr>
+          <p:cNvCxnSpPr>
+            <a:cxnSpLocks/>
+          </p:cNvCxnSpPr>
+          <p:nvPr/>
+        </p:nvCxnSpPr>
+        <p:spPr>
+          <a:xfrm>
+            <a:off x="11386646" y="1714361"/>
+            <a:ext cx="460460" cy="0"/>
+          </a:xfrm>
+          <a:prstGeom prst="line">
+            <a:avLst/>
+          </a:prstGeom>
+          <a:ln w="9525">
+            <a:solidFill>
+              <a:schemeClr val="tx1"/>
+            </a:solidFill>
+          </a:ln>
+        </p:spPr>
+        <p:style>
+          <a:lnRef idx="1">
+            <a:schemeClr val="accent1"/>
+          </a:lnRef>
+          <a:fillRef idx="0">
+            <a:schemeClr val="accent1"/>
+          </a:fillRef>
+          <a:effectRef idx="0">
+            <a:schemeClr val="accent1"/>
+          </a:effectRef>
+          <a:fontRef idx="minor">
+            <a:schemeClr val="tx1"/>
+          </a:fontRef>
+        </p:style>
+      </p:cxnSp>
+      <p:cxnSp>
+        <p:nvCxnSpPr>
+          <p:cNvPr id="1081" name="直接连接符 1080">
+            <a:extLst>
+              <a:ext uri="{FF2B5EF4-FFF2-40B4-BE49-F238E27FC236}">
+                <a16:creationId xmlns:a16="http://schemas.microsoft.com/office/drawing/2014/main" id="{9AE4A14F-4438-DB04-6614-0ED8CD2A2694}"/>
+              </a:ext>
+            </a:extLst>
+          </p:cNvPr>
+          <p:cNvCxnSpPr>
+            <a:cxnSpLocks/>
+          </p:cNvCxnSpPr>
+          <p:nvPr/>
+        </p:nvCxnSpPr>
+        <p:spPr>
+          <a:xfrm>
+            <a:off x="11390023" y="1784214"/>
+            <a:ext cx="525984" cy="0"/>
+          </a:xfrm>
+          <a:prstGeom prst="line">
+            <a:avLst/>
+          </a:prstGeom>
+          <a:ln w="9525">
+            <a:solidFill>
+              <a:schemeClr val="tx1"/>
+            </a:solidFill>
+          </a:ln>
+        </p:spPr>
+        <p:style>
+          <a:lnRef idx="1">
+            <a:schemeClr val="accent1"/>
+          </a:lnRef>
+          <a:fillRef idx="0">
+            <a:schemeClr val="accent1"/>
+          </a:fillRef>
+          <a:effectRef idx="0">
+            <a:schemeClr val="accent1"/>
+          </a:effectRef>
+          <a:fontRef idx="minor">
+            <a:schemeClr val="tx1"/>
+          </a:fontRef>
+        </p:style>
+      </p:cxnSp>
+      <p:cxnSp>
+        <p:nvCxnSpPr>
+          <p:cNvPr id="1082" name="直接连接符 1081">
+            <a:extLst>
+              <a:ext uri="{FF2B5EF4-FFF2-40B4-BE49-F238E27FC236}">
+                <a16:creationId xmlns:a16="http://schemas.microsoft.com/office/drawing/2014/main" id="{95287C4C-8EBF-12D8-15F4-3FEF70219069}"/>
+              </a:ext>
+            </a:extLst>
+          </p:cNvPr>
+          <p:cNvCxnSpPr>
+            <a:cxnSpLocks/>
+          </p:cNvCxnSpPr>
+          <p:nvPr/>
+        </p:nvCxnSpPr>
+        <p:spPr>
+          <a:xfrm>
+            <a:off x="11392248" y="1864647"/>
+            <a:ext cx="569158" cy="0"/>
+          </a:xfrm>
+          <a:prstGeom prst="line">
+            <a:avLst/>
+          </a:prstGeom>
+          <a:ln w="9525">
+            <a:solidFill>
+              <a:schemeClr val="tx1"/>
+            </a:solidFill>
+          </a:ln>
+        </p:spPr>
+        <p:style>
+          <a:lnRef idx="1">
+            <a:schemeClr val="accent1"/>
+          </a:lnRef>
+          <a:fillRef idx="0">
+            <a:schemeClr val="accent1"/>
+          </a:fillRef>
+          <a:effectRef idx="0">
+            <a:schemeClr val="accent1"/>
+          </a:effectRef>
+          <a:fontRef idx="minor">
+            <a:schemeClr val="tx1"/>
+          </a:fontRef>
+        </p:style>
+      </p:cxnSp>
+      <p:cxnSp>
+        <p:nvCxnSpPr>
+          <p:cNvPr id="1083" name="直接连接符 1082">
+            <a:extLst>
+              <a:ext uri="{FF2B5EF4-FFF2-40B4-BE49-F238E27FC236}">
+                <a16:creationId xmlns:a16="http://schemas.microsoft.com/office/drawing/2014/main" id="{92B9A1F1-CB99-A2F4-BCA8-5447AA5824CE}"/>
+              </a:ext>
+            </a:extLst>
+          </p:cNvPr>
+          <p:cNvCxnSpPr>
+            <a:cxnSpLocks/>
+          </p:cNvCxnSpPr>
+          <p:nvPr/>
+        </p:nvCxnSpPr>
+        <p:spPr>
+          <a:xfrm>
+            <a:off x="11385246" y="1939261"/>
+            <a:ext cx="433285" cy="0"/>
+          </a:xfrm>
+          <a:prstGeom prst="line">
+            <a:avLst/>
+          </a:prstGeom>
+          <a:ln w="9525">
+            <a:solidFill>
+              <a:schemeClr val="tx1"/>
+            </a:solidFill>
+          </a:ln>
+        </p:spPr>
+        <p:style>
+          <a:lnRef idx="1">
+            <a:schemeClr val="accent1"/>
+          </a:lnRef>
+          <a:fillRef idx="0">
+            <a:schemeClr val="accent1"/>
+          </a:fillRef>
+          <a:effectRef idx="0">
+            <a:schemeClr val="accent1"/>
+          </a:effectRef>
+          <a:fontRef idx="minor">
+            <a:schemeClr val="tx1"/>
+          </a:fontRef>
+        </p:style>
+      </p:cxnSp>
+      <p:cxnSp>
+        <p:nvCxnSpPr>
+          <p:cNvPr id="1084" name="直接连接符 1083">
+            <a:extLst>
+              <a:ext uri="{FF2B5EF4-FFF2-40B4-BE49-F238E27FC236}">
+                <a16:creationId xmlns:a16="http://schemas.microsoft.com/office/drawing/2014/main" id="{8D8E7591-886E-7107-763B-6898558A3AAF}"/>
+              </a:ext>
+            </a:extLst>
+          </p:cNvPr>
+          <p:cNvCxnSpPr>
+            <a:cxnSpLocks/>
+          </p:cNvCxnSpPr>
+          <p:nvPr/>
+        </p:nvCxnSpPr>
+        <p:spPr>
+          <a:xfrm>
+            <a:off x="11388202" y="2012287"/>
+            <a:ext cx="490654" cy="0"/>
+          </a:xfrm>
+          <a:prstGeom prst="line">
+            <a:avLst/>
+          </a:prstGeom>
+          <a:ln w="9525">
+            <a:solidFill>
+              <a:schemeClr val="tx1"/>
+            </a:solidFill>
+          </a:ln>
+        </p:spPr>
+        <p:style>
+          <a:lnRef idx="1">
+            <a:schemeClr val="accent1"/>
+          </a:lnRef>
+          <a:fillRef idx="0">
+            <a:schemeClr val="accent1"/>
+          </a:fillRef>
+          <a:effectRef idx="0">
+            <a:schemeClr val="accent1"/>
+          </a:effectRef>
+          <a:fontRef idx="minor">
+            <a:schemeClr val="tx1"/>
+          </a:fontRef>
+        </p:style>
+      </p:cxnSp>
+      <p:cxnSp>
+        <p:nvCxnSpPr>
+          <p:cNvPr id="1085" name="直接连接符 1084">
+            <a:extLst>
+              <a:ext uri="{FF2B5EF4-FFF2-40B4-BE49-F238E27FC236}">
+                <a16:creationId xmlns:a16="http://schemas.microsoft.com/office/drawing/2014/main" id="{6C65FF2A-8DCF-4639-36B4-EB3CF7B4E09E}"/>
+              </a:ext>
+            </a:extLst>
+          </p:cNvPr>
+          <p:cNvCxnSpPr>
+            <a:cxnSpLocks/>
+          </p:cNvCxnSpPr>
+          <p:nvPr/>
+        </p:nvCxnSpPr>
+        <p:spPr>
+          <a:xfrm>
+            <a:off x="11385246" y="2091661"/>
+            <a:ext cx="433285" cy="0"/>
+          </a:xfrm>
+          <a:prstGeom prst="line">
+            <a:avLst/>
+          </a:prstGeom>
+          <a:ln w="9525">
+            <a:solidFill>
+              <a:schemeClr val="tx1"/>
+            </a:solidFill>
+          </a:ln>
+        </p:spPr>
+        <p:style>
+          <a:lnRef idx="1">
+            <a:schemeClr val="accent1"/>
+          </a:lnRef>
+          <a:fillRef idx="0">
+            <a:schemeClr val="accent1"/>
+          </a:fillRef>
+          <a:effectRef idx="0">
+            <a:schemeClr val="accent1"/>
+          </a:effectRef>
+          <a:fontRef idx="minor">
+            <a:schemeClr val="tx1"/>
+          </a:fontRef>
+        </p:style>
+      </p:cxnSp>
+      <p:sp>
+        <p:nvSpPr>
+          <p:cNvPr id="1086" name="矩形: 折角 1085">
+            <a:extLst>
+              <a:ext uri="{FF2B5EF4-FFF2-40B4-BE49-F238E27FC236}">
+                <a16:creationId xmlns:a16="http://schemas.microsoft.com/office/drawing/2014/main" id="{9E291B62-46D4-4098-DBAC-0872D47FF620}"/>
+              </a:ext>
+            </a:extLst>
+          </p:cNvPr>
+          <p:cNvSpPr/>
+          <p:nvPr/>
+        </p:nvSpPr>
+        <p:spPr>
+          <a:xfrm>
+            <a:off x="11353165" y="4742083"/>
+            <a:ext cx="673328" cy="690950"/>
+          </a:xfrm>
+          <a:prstGeom prst="foldedCorner">
+            <a:avLst/>
+          </a:prstGeom>
+          <a:solidFill>
+            <a:schemeClr val="accent5">
+              <a:lumMod val="20000"/>
+              <a:lumOff val="80000"/>
+            </a:schemeClr>
+          </a:solidFill>
+          <a:ln w="19050">
+            <a:solidFill>
+              <a:schemeClr val="tx1"/>
+            </a:solidFill>
+          </a:ln>
+        </p:spPr>
+        <p:style>
+          <a:lnRef idx="2">
+            <a:schemeClr val="accent1">
+              <a:shade val="15000"/>
+            </a:schemeClr>
+          </a:lnRef>
+          <a:fillRef idx="1">
+            <a:schemeClr val="accent1"/>
+          </a:fillRef>
+          <a:effectRef idx="0">
+            <a:schemeClr val="accent1"/>
+          </a:effectRef>
+          <a:fontRef idx="minor">
+            <a:schemeClr val="lt1"/>
+          </a:fontRef>
+        </p:style>
+        <p:txBody>
+          <a:bodyPr rtlCol="0" anchor="ctr"/>
+          <a:lstStyle/>
+          <a:p>
+            <a:pPr algn="ctr"/>
+            <a:endParaRPr lang="zh-CN" altLang="en-US"/>
+          </a:p>
+        </p:txBody>
+      </p:sp>
+      <p:cxnSp>
+        <p:nvCxnSpPr>
+          <p:cNvPr id="1087" name="直接连接符 1086">
+            <a:extLst>
+              <a:ext uri="{FF2B5EF4-FFF2-40B4-BE49-F238E27FC236}">
+                <a16:creationId xmlns:a16="http://schemas.microsoft.com/office/drawing/2014/main" id="{7E99B253-EA53-DEA8-427B-1BA39091C223}"/>
+              </a:ext>
+            </a:extLst>
+          </p:cNvPr>
+          <p:cNvCxnSpPr>
+            <a:cxnSpLocks/>
+          </p:cNvCxnSpPr>
+          <p:nvPr/>
+        </p:nvCxnSpPr>
+        <p:spPr>
+          <a:xfrm>
+            <a:off x="11391703" y="4822405"/>
+            <a:ext cx="558590" cy="0"/>
+          </a:xfrm>
+          <a:prstGeom prst="line">
+            <a:avLst/>
+          </a:prstGeom>
+          <a:ln w="9525">
+            <a:solidFill>
+              <a:schemeClr val="tx1"/>
+            </a:solidFill>
+          </a:ln>
+        </p:spPr>
+        <p:style>
+          <a:lnRef idx="1">
+            <a:schemeClr val="accent1"/>
+          </a:lnRef>
+          <a:fillRef idx="0">
+            <a:schemeClr val="accent1"/>
+          </a:fillRef>
+          <a:effectRef idx="0">
+            <a:schemeClr val="accent1"/>
+          </a:effectRef>
+          <a:fontRef idx="minor">
+            <a:schemeClr val="tx1"/>
+          </a:fontRef>
+        </p:style>
+      </p:cxnSp>
+      <p:cxnSp>
+        <p:nvCxnSpPr>
+          <p:cNvPr id="192" name="直接连接符 191">
+            <a:extLst>
+              <a:ext uri="{FF2B5EF4-FFF2-40B4-BE49-F238E27FC236}">
+                <a16:creationId xmlns:a16="http://schemas.microsoft.com/office/drawing/2014/main" id="{1A5F7215-2447-85E7-2AC7-B79C57E6D821}"/>
+              </a:ext>
+            </a:extLst>
+          </p:cNvPr>
+          <p:cNvCxnSpPr>
+            <a:cxnSpLocks/>
+          </p:cNvCxnSpPr>
+          <p:nvPr/>
+        </p:nvCxnSpPr>
+        <p:spPr>
+          <a:xfrm>
+            <a:off x="11390023" y="4891719"/>
+            <a:ext cx="525984" cy="0"/>
+          </a:xfrm>
+          <a:prstGeom prst="line">
+            <a:avLst/>
+          </a:prstGeom>
+          <a:ln w="9525">
+            <a:solidFill>
+              <a:schemeClr val="tx1"/>
+            </a:solidFill>
+          </a:ln>
+        </p:spPr>
+        <p:style>
+          <a:lnRef idx="1">
+            <a:schemeClr val="accent1"/>
+          </a:lnRef>
+          <a:fillRef idx="0">
+            <a:schemeClr val="accent1"/>
+          </a:fillRef>
+          <a:effectRef idx="0">
+            <a:schemeClr val="accent1"/>
+          </a:effectRef>
+          <a:fontRef idx="minor">
+            <a:schemeClr val="tx1"/>
+          </a:fontRef>
+        </p:style>
+      </p:cxnSp>
+      <p:cxnSp>
+        <p:nvCxnSpPr>
+          <p:cNvPr id="193" name="直接连接符 192">
+            <a:extLst>
+              <a:ext uri="{FF2B5EF4-FFF2-40B4-BE49-F238E27FC236}">
+                <a16:creationId xmlns:a16="http://schemas.microsoft.com/office/drawing/2014/main" id="{181E6EB1-BFDF-3086-DF58-A55912352057}"/>
+              </a:ext>
+            </a:extLst>
+          </p:cNvPr>
+          <p:cNvCxnSpPr>
+            <a:cxnSpLocks/>
+          </p:cNvCxnSpPr>
+          <p:nvPr/>
+        </p:nvCxnSpPr>
+        <p:spPr>
+          <a:xfrm>
+            <a:off x="11386646" y="4965274"/>
+            <a:ext cx="460460" cy="0"/>
+          </a:xfrm>
+          <a:prstGeom prst="line">
+            <a:avLst/>
+          </a:prstGeom>
+          <a:ln w="9525">
+            <a:solidFill>
+              <a:schemeClr val="tx1"/>
+            </a:solidFill>
+          </a:ln>
+        </p:spPr>
+        <p:style>
+          <a:lnRef idx="1">
+            <a:schemeClr val="accent1"/>
+          </a:lnRef>
+          <a:fillRef idx="0">
+            <a:schemeClr val="accent1"/>
+          </a:fillRef>
+          <a:effectRef idx="0">
+            <a:schemeClr val="accent1"/>
+          </a:effectRef>
+          <a:fontRef idx="minor">
+            <a:schemeClr val="tx1"/>
+          </a:fontRef>
+        </p:style>
+      </p:cxnSp>
+      <p:cxnSp>
+        <p:nvCxnSpPr>
+          <p:cNvPr id="194" name="直接连接符 193">
+            <a:extLst>
+              <a:ext uri="{FF2B5EF4-FFF2-40B4-BE49-F238E27FC236}">
+                <a16:creationId xmlns:a16="http://schemas.microsoft.com/office/drawing/2014/main" id="{05E0F4B5-50D1-954F-9507-2A1EF73903C8}"/>
+              </a:ext>
+            </a:extLst>
+          </p:cNvPr>
+          <p:cNvCxnSpPr>
+            <a:cxnSpLocks/>
+          </p:cNvCxnSpPr>
+          <p:nvPr/>
+        </p:nvCxnSpPr>
+        <p:spPr>
+          <a:xfrm>
+            <a:off x="11390023" y="5035127"/>
+            <a:ext cx="525984" cy="0"/>
+          </a:xfrm>
+          <a:prstGeom prst="line">
+            <a:avLst/>
+          </a:prstGeom>
+          <a:ln w="9525">
+            <a:solidFill>
+              <a:schemeClr val="tx1"/>
+            </a:solidFill>
+          </a:ln>
+        </p:spPr>
+        <p:style>
+          <a:lnRef idx="1">
+            <a:schemeClr val="accent1"/>
+          </a:lnRef>
+          <a:fillRef idx="0">
+            <a:schemeClr val="accent1"/>
+          </a:fillRef>
+          <a:effectRef idx="0">
+            <a:schemeClr val="accent1"/>
+          </a:effectRef>
+          <a:fontRef idx="minor">
+            <a:schemeClr val="tx1"/>
+          </a:fontRef>
+        </p:style>
+      </p:cxnSp>
+      <p:cxnSp>
+        <p:nvCxnSpPr>
+          <p:cNvPr id="195" name="直接连接符 194">
+            <a:extLst>
+              <a:ext uri="{FF2B5EF4-FFF2-40B4-BE49-F238E27FC236}">
+                <a16:creationId xmlns:a16="http://schemas.microsoft.com/office/drawing/2014/main" id="{92A83ADF-CFF0-3255-87B4-462C7575C925}"/>
+              </a:ext>
+            </a:extLst>
+          </p:cNvPr>
+          <p:cNvCxnSpPr>
+            <a:cxnSpLocks/>
+          </p:cNvCxnSpPr>
+          <p:nvPr/>
+        </p:nvCxnSpPr>
+        <p:spPr>
+          <a:xfrm>
+            <a:off x="11392248" y="5115560"/>
+            <a:ext cx="569158" cy="0"/>
+          </a:xfrm>
+          <a:prstGeom prst="line">
+            <a:avLst/>
+          </a:prstGeom>
+          <a:ln w="9525">
+            <a:solidFill>
+              <a:schemeClr val="tx1"/>
+            </a:solidFill>
+          </a:ln>
+        </p:spPr>
+        <p:style>
+          <a:lnRef idx="1">
+            <a:schemeClr val="accent1"/>
+          </a:lnRef>
+          <a:fillRef idx="0">
+            <a:schemeClr val="accent1"/>
+          </a:fillRef>
+          <a:effectRef idx="0">
+            <a:schemeClr val="accent1"/>
+          </a:effectRef>
+          <a:fontRef idx="minor">
+            <a:schemeClr val="tx1"/>
+          </a:fontRef>
+        </p:style>
+      </p:cxnSp>
+      <p:cxnSp>
+        <p:nvCxnSpPr>
+          <p:cNvPr id="196" name="直接连接符 195">
+            <a:extLst>
+              <a:ext uri="{FF2B5EF4-FFF2-40B4-BE49-F238E27FC236}">
+                <a16:creationId xmlns:a16="http://schemas.microsoft.com/office/drawing/2014/main" id="{3A210CC2-3F1E-1D88-5DEA-7CCA841CC438}"/>
+              </a:ext>
+            </a:extLst>
+          </p:cNvPr>
+          <p:cNvCxnSpPr>
+            <a:cxnSpLocks/>
+          </p:cNvCxnSpPr>
+          <p:nvPr/>
+        </p:nvCxnSpPr>
+        <p:spPr>
+          <a:xfrm>
+            <a:off x="11385246" y="5190174"/>
+            <a:ext cx="433285" cy="0"/>
+          </a:xfrm>
+          <a:prstGeom prst="line">
+            <a:avLst/>
+          </a:prstGeom>
+          <a:ln w="9525">
+            <a:solidFill>
+              <a:schemeClr val="tx1"/>
+            </a:solidFill>
+          </a:ln>
+        </p:spPr>
+        <p:style>
+          <a:lnRef idx="1">
+            <a:schemeClr val="accent1"/>
+          </a:lnRef>
+          <a:fillRef idx="0">
+            <a:schemeClr val="accent1"/>
+          </a:fillRef>
+          <a:effectRef idx="0">
+            <a:schemeClr val="accent1"/>
+          </a:effectRef>
+          <a:fontRef idx="minor">
+            <a:schemeClr val="tx1"/>
+          </a:fontRef>
+        </p:style>
+      </p:cxnSp>
+      <p:cxnSp>
+        <p:nvCxnSpPr>
+          <p:cNvPr id="197" name="直接连接符 196">
+            <a:extLst>
+              <a:ext uri="{FF2B5EF4-FFF2-40B4-BE49-F238E27FC236}">
+                <a16:creationId xmlns:a16="http://schemas.microsoft.com/office/drawing/2014/main" id="{169272C0-E95C-EF84-A631-CA9E1CAC5CAB}"/>
+              </a:ext>
+            </a:extLst>
+          </p:cNvPr>
+          <p:cNvCxnSpPr>
+            <a:cxnSpLocks/>
+          </p:cNvCxnSpPr>
+          <p:nvPr/>
+        </p:nvCxnSpPr>
+        <p:spPr>
+          <a:xfrm>
+            <a:off x="11388202" y="5263200"/>
+            <a:ext cx="490654" cy="0"/>
+          </a:xfrm>
+          <a:prstGeom prst="line">
+            <a:avLst/>
+          </a:prstGeom>
+          <a:ln w="9525">
+            <a:solidFill>
+              <a:schemeClr val="tx1"/>
+            </a:solidFill>
+          </a:ln>
+        </p:spPr>
+        <p:style>
+          <a:lnRef idx="1">
+            <a:schemeClr val="accent1"/>
+          </a:lnRef>
+          <a:fillRef idx="0">
+            <a:schemeClr val="accent1"/>
+          </a:fillRef>
+          <a:effectRef idx="0">
+            <a:schemeClr val="accent1"/>
+          </a:effectRef>
+          <a:fontRef idx="minor">
+            <a:schemeClr val="tx1"/>
+          </a:fontRef>
+        </p:style>
+      </p:cxnSp>
+      <p:cxnSp>
+        <p:nvCxnSpPr>
+          <p:cNvPr id="198" name="直接连接符 197">
+            <a:extLst>
+              <a:ext uri="{FF2B5EF4-FFF2-40B4-BE49-F238E27FC236}">
+                <a16:creationId xmlns:a16="http://schemas.microsoft.com/office/drawing/2014/main" id="{760DCBE9-DB4F-F5B8-77A1-47107FD50BAA}"/>
+              </a:ext>
+            </a:extLst>
+          </p:cNvPr>
+          <p:cNvCxnSpPr>
+            <a:cxnSpLocks/>
+          </p:cNvCxnSpPr>
+          <p:nvPr/>
+        </p:nvCxnSpPr>
+        <p:spPr>
+          <a:xfrm>
+            <a:off x="11385246" y="5342574"/>
+            <a:ext cx="433285" cy="0"/>
+          </a:xfrm>
+          <a:prstGeom prst="line">
+            <a:avLst/>
+          </a:prstGeom>
+          <a:ln w="9525">
+            <a:solidFill>
+              <a:schemeClr val="tx1"/>
+            </a:solidFill>
+          </a:ln>
+        </p:spPr>
+        <p:style>
+          <a:lnRef idx="1">
+            <a:schemeClr val="accent1"/>
+          </a:lnRef>
+          <a:fillRef idx="0">
+            <a:schemeClr val="accent1"/>
+          </a:fillRef>
+          <a:effectRef idx="0">
+            <a:schemeClr val="accent1"/>
+          </a:effectRef>
+          <a:fontRef idx="minor">
+            <a:schemeClr val="tx1"/>
+          </a:fontRef>
+        </p:style>
+      </p:cxnSp>
+      <mc:AlternateContent xmlns:mc="http://schemas.openxmlformats.org/markup-compatibility/2006">
+        <mc:Choice xmlns:a14="http://schemas.microsoft.com/office/drawing/2010/main" Requires="a14">
+          <p:sp>
+            <p:nvSpPr>
+              <p:cNvPr id="201" name="文本框 200">
+                <a:extLst>
+                  <a:ext uri="{FF2B5EF4-FFF2-40B4-BE49-F238E27FC236}">
+                    <a16:creationId xmlns:a16="http://schemas.microsoft.com/office/drawing/2014/main" id="{5364D89C-F9CB-7A3B-0D91-C58276F5023D}"/>
+                  </a:ext>
+                </a:extLst>
+              </p:cNvPr>
+              <p:cNvSpPr txBox="1"/>
+              <p:nvPr/>
+            </p:nvSpPr>
+            <p:spPr>
+              <a:xfrm>
+                <a:off x="11229228" y="2226273"/>
+                <a:ext cx="962772" cy="523220"/>
+              </a:xfrm>
+              <a:prstGeom prst="rect">
+                <a:avLst/>
+              </a:prstGeom>
+              <a:noFill/>
+            </p:spPr>
+            <p:txBody>
+              <a:bodyPr wrap="square" rtlCol="0">
+                <a:spAutoFit/>
+              </a:bodyPr>
+              <a:lstStyle/>
+              <a:p>
+                <a:pPr algn="ctr"/>
+                <a:r>
+                  <a:rPr lang="zh-CN" altLang="en-US" sz="1400" dirty="0"/>
+                  <a:t>初始化值列表 </a:t>
+                </a:r>
+                <a14:m>
+                  <m:oMath xmlns:m="http://schemas.openxmlformats.org/officeDocument/2006/math">
+                    <m:r>
+                      <a:rPr lang="en-US" altLang="zh-CN" sz="1400" b="1" i="1" smtClean="0">
+                        <a:latin typeface="Cambria Math" panose="02040503050406030204" pitchFamily="18" charset="0"/>
+                      </a:rPr>
+                      <m:t>𝑰</m:t>
+                    </m:r>
+                  </m:oMath>
+                </a14:m>
+                <a:r>
+                  <a:rPr lang="zh-CN" altLang="en-US" sz="1400" dirty="0"/>
+                  <a:t> </a:t>
+                </a:r>
+              </a:p>
+            </p:txBody>
+          </p:sp>
+        </mc:Choice>
+        <mc:Fallback>
+          <p:sp>
+            <p:nvSpPr>
+              <p:cNvPr id="201" name="文本框 200">
+                <a:extLst>
+                  <a:ext uri="{FF2B5EF4-FFF2-40B4-BE49-F238E27FC236}">
+                    <a16:creationId xmlns:a16="http://schemas.microsoft.com/office/drawing/2014/main" id="{5364D89C-F9CB-7A3B-0D91-C58276F5023D}"/>
+                  </a:ext>
+                </a:extLst>
+              </p:cNvPr>
+              <p:cNvSpPr txBox="1">
+                <a:spLocks noRot="1" noChangeAspect="1" noMove="1" noResize="1" noEditPoints="1" noAdjustHandles="1" noChangeArrowheads="1" noChangeShapeType="1" noTextEdit="1"/>
+              </p:cNvSpPr>
+              <p:nvPr/>
+            </p:nvSpPr>
+            <p:spPr>
+              <a:xfrm>
+                <a:off x="11229228" y="2226273"/>
+                <a:ext cx="962772" cy="523220"/>
+              </a:xfrm>
+              <a:prstGeom prst="rect">
+                <a:avLst/>
+              </a:prstGeom>
+              <a:blipFill>
+                <a:blip r:embed="rId8"/>
+                <a:stretch>
+                  <a:fillRect t="-2326" b="-11628"/>
+                </a:stretch>
+              </a:blipFill>
+            </p:spPr>
+            <p:txBody>
+              <a:bodyPr/>
+              <a:lstStyle/>
+              <a:p>
+                <a:r>
+                  <a:rPr lang="zh-CN" altLang="en-US">
+                    <a:noFill/>
+                  </a:rPr>
+                  <a:t> </a:t>
+                </a:r>
+              </a:p>
+            </p:txBody>
+          </p:sp>
+        </mc:Fallback>
+      </mc:AlternateContent>
+      <mc:AlternateContent xmlns:mc="http://schemas.openxmlformats.org/markup-compatibility/2006">
+        <mc:Choice xmlns:a14="http://schemas.microsoft.com/office/drawing/2010/main" Requires="a14">
+          <p:sp>
+            <p:nvSpPr>
+              <p:cNvPr id="202" name="文本框 201">
+                <a:extLst>
+                  <a:ext uri="{FF2B5EF4-FFF2-40B4-BE49-F238E27FC236}">
+                    <a16:creationId xmlns:a16="http://schemas.microsoft.com/office/drawing/2014/main" id="{12AB3F9F-AA84-8274-18F0-BE6658204DFB}"/>
+                  </a:ext>
+                </a:extLst>
+              </p:cNvPr>
+              <p:cNvSpPr txBox="1"/>
+              <p:nvPr/>
+            </p:nvSpPr>
+            <p:spPr>
+              <a:xfrm>
+                <a:off x="11229228" y="5436691"/>
+                <a:ext cx="962772" cy="523220"/>
+              </a:xfrm>
+              <a:prstGeom prst="rect">
+                <a:avLst/>
+              </a:prstGeom>
+              <a:noFill/>
+            </p:spPr>
+            <p:txBody>
+              <a:bodyPr wrap="square" rtlCol="0">
+                <a:spAutoFit/>
+              </a:bodyPr>
+              <a:lstStyle/>
+              <a:p>
+                <a:pPr algn="ctr"/>
+                <a:r>
+                  <a:rPr lang="zh-CN" altLang="en-US" sz="1400" dirty="0"/>
+                  <a:t>初始化值列表 </a:t>
+                </a:r>
+                <a14:m>
+                  <m:oMath xmlns:m="http://schemas.openxmlformats.org/officeDocument/2006/math">
+                    <m:r>
+                      <a:rPr lang="en-US" altLang="zh-CN" sz="1400" b="1" i="1">
+                        <a:latin typeface="Cambria Math" panose="02040503050406030204" pitchFamily="18" charset="0"/>
+                      </a:rPr>
+                      <m:t>𝑰</m:t>
+                    </m:r>
+                    <m:r>
+                      <a:rPr lang="en-US" altLang="zh-CN" sz="1400" b="1" i="1" smtClean="0">
+                        <a:latin typeface="Cambria Math" panose="02040503050406030204" pitchFamily="18" charset="0"/>
+                      </a:rPr>
+                      <m:t>′</m:t>
+                    </m:r>
+                  </m:oMath>
+                </a14:m>
+                <a:endParaRPr lang="zh-CN" altLang="en-US" sz="1400" b="1" dirty="0"/>
+              </a:p>
+            </p:txBody>
+          </p:sp>
+        </mc:Choice>
+        <mc:Fallback>
+          <p:sp>
+            <p:nvSpPr>
+              <p:cNvPr id="202" name="文本框 201">
+                <a:extLst>
+                  <a:ext uri="{FF2B5EF4-FFF2-40B4-BE49-F238E27FC236}">
+                    <a16:creationId xmlns:a16="http://schemas.microsoft.com/office/drawing/2014/main" id="{12AB3F9F-AA84-8274-18F0-BE6658204DFB}"/>
+                  </a:ext>
+                </a:extLst>
+              </p:cNvPr>
+              <p:cNvSpPr txBox="1">
+                <a:spLocks noRot="1" noChangeAspect="1" noMove="1" noResize="1" noEditPoints="1" noAdjustHandles="1" noChangeArrowheads="1" noChangeShapeType="1" noTextEdit="1"/>
+              </p:cNvSpPr>
+              <p:nvPr/>
+            </p:nvSpPr>
+            <p:spPr>
+              <a:xfrm>
+                <a:off x="11229228" y="5436691"/>
+                <a:ext cx="962772" cy="523220"/>
+              </a:xfrm>
+              <a:prstGeom prst="rect">
+                <a:avLst/>
+              </a:prstGeom>
+              <a:blipFill>
+                <a:blip r:embed="rId9"/>
+                <a:stretch>
+                  <a:fillRect t="-2326" b="-10465"/>
+                </a:stretch>
+              </a:blipFill>
+            </p:spPr>
+            <p:txBody>
+              <a:bodyPr/>
+              <a:lstStyle/>
+              <a:p>
+                <a:r>
+                  <a:rPr lang="zh-CN" altLang="en-US">
+                    <a:noFill/>
+                  </a:rPr>
+                  <a:t> </a:t>
+                </a:r>
+              </a:p>
+            </p:txBody>
+          </p:sp>
+        </mc:Fallback>
+      </mc:AlternateContent>
     </p:spTree>
     <p:extLst>
       <p:ext uri="{BB962C8B-B14F-4D97-AF65-F5344CB8AC3E}">
